--- a/docs/evidencias/Pedidos360-Evidencias.pptx
+++ b/docs/evidencias/Pedidos360-Evidencias.pptx
@@ -13,6 +13,11 @@
     <p:sldId id="261" r:id="rId12"/>
     <p:sldId id="262" r:id="rId13"/>
     <p:sldId id="263" r:id="rId14"/>
+    <p:sldId id="264" r:id="rId15"/>
+    <p:sldId id="265" r:id="rId16"/>
+    <p:sldId id="266" r:id="rId17"/>
+    <p:sldId id="267" r:id="rId18"/>
+    <p:sldId id="268" r:id="rId19"/>
   </p:sldIdLst>
   <p:sldSz cx="12191695" cy="6858000" type="screen4x3"/>
   <p:notesSz cx="6858000" cy="9144000"/>
@@ -3119,13 +3124,13 @@
           <a:p>
             <a:pPr algn="ctr"/>
             <a:r>
-              <a:rPr sz="4800" b="1">
+              <a:rPr sz="4400" b="1">
                 <a:solidFill>
                   <a:srgbClr val="0B3D91"/>
                 </a:solidFill>
                 <a:latin typeface="Calibri"/>
               </a:rPr>
-              <a:t>Pedidos360 — Evidencias EP2</a:t>
+              <a:t>Pedidos360 — Evidencias EP2/EP3/EP4</a:t>
             </a:r>
           </a:p>
         </p:txBody>
@@ -3160,7 +3165,7 @@
                 </a:solidFill>
                 <a:latin typeface="Calibri"/>
               </a:rPr>
-              <a:t>DSY1107 · Desarrollo Cloud Native I · presentación individual</a:t>
+              <a:t>DSY1107 · Desarrollo Cloud Native I · mensajeria RabbitMQ + admin</a:t>
             </a:r>
           </a:p>
         </p:txBody>
@@ -3195,11 +3200,5144 @@
                 </a:solidFill>
                 <a:latin typeface="Calibri"/>
               </a:rPr>
-              <a:t>SPA Angular + MSAL (PKCE) → API Gateway (JWT) → ALB → EC2 Spring Boot</a:t>
+              <a:t>SPA Angular + MSAL (PKCE) → API Gateway (JWT) → ALB → EC2 Spring Boot → RabbitMQ</a:t>
             </a:r>
             <a:br/>
             <a:r>
-              <a:t>Generado: 2026-09-22 19:29:47 · evidencia real contra el endpoint prod</a:t>
+              <a:t>Generado: 2026-09-22 19:29:47</a:t>
+            </a:r>
+          </a:p>
+        </p:txBody>
+      </p:sp>
+    </p:spTree>
+  </p:cSld>
+  <p:clrMapOvr>
+    <a:masterClrMapping/>
+  </p:clrMapOvr>
+</p:sld>
+</file>
+
+<file path=ppt/slides/slide10.xml><?xml version="1.0" encoding="utf-8"?>
+<p:sld xmlns:a="http://schemas.openxmlformats.org/drawingml/2006/main" xmlns:p="http://schemas.openxmlformats.org/presentationml/2006/main" xmlns:r="http://schemas.openxmlformats.org/officeDocument/2006/relationships">
+  <p:cSld>
+    <p:spTree>
+      <p:nvGrpSpPr>
+        <p:cNvPr id="1" name=""/>
+        <p:cNvGrpSpPr/>
+        <p:nvPr/>
+      </p:nvGrpSpPr>
+      <p:grpSpPr/>
+      <p:sp>
+        <p:nvSpPr>
+          <p:cNvPr id="2" name="Rectangle 1"/>
+          <p:cNvSpPr/>
+          <p:nvPr/>
+        </p:nvSpPr>
+        <p:spPr>
+          <a:xfrm>
+            <a:off x="0" y="0"/>
+            <a:ext cx="12191695" cy="868680"/>
+          </a:xfrm>
+          <a:prstGeom prst="rect">
+            <a:avLst/>
+          </a:prstGeom>
+          <a:solidFill>
+            <a:srgbClr val="1F2A44"/>
+          </a:solidFill>
+          <a:ln>
+            <a:noFill/>
+          </a:ln>
+        </p:spPr>
+        <p:style>
+          <a:lnRef idx="1">
+            <a:schemeClr val="accent1"/>
+          </a:lnRef>
+          <a:fillRef idx="3">
+            <a:schemeClr val="accent1"/>
+          </a:fillRef>
+          <a:effectRef idx="2">
+            <a:schemeClr val="accent1"/>
+          </a:effectRef>
+          <a:fontRef idx="minor">
+            <a:schemeClr val="lt1"/>
+          </a:fontRef>
+        </p:style>
+        <p:txBody>
+          <a:bodyPr rtlCol="0" anchor="ctr"/>
+          <a:lstStyle/>
+          <a:p>
+            <a:pPr algn="ctr"/>
+          </a:p>
+        </p:txBody>
+      </p:sp>
+      <p:sp>
+        <p:nvSpPr>
+          <p:cNvPr id="3" name="TextBox 2"/>
+          <p:cNvSpPr txBox="1"/>
+          <p:nvPr/>
+        </p:nvSpPr>
+        <p:spPr>
+          <a:xfrm>
+            <a:off x="502920" y="109728"/>
+            <a:ext cx="10515600" cy="548640"/>
+          </a:xfrm>
+          <a:prstGeom prst="rect">
+            <a:avLst/>
+          </a:prstGeom>
+          <a:noFill/>
+        </p:spPr>
+        <p:txBody>
+          <a:bodyPr wrap="square">
+            <a:spAutoFit/>
+          </a:bodyPr>
+          <a:lstStyle/>
+          <a:p>
+            <a:pPr algn="l"/>
+            <a:r>
+              <a:rPr sz="2600" b="1">
+                <a:solidFill>
+                  <a:srgbClr val="FFFFFF"/>
+                </a:solidFill>
+                <a:latin typeface="Calibri"/>
+              </a:rPr>
+              <a:t>Etapa 3 · Evidencia del cluster, colas y exchanges (EP4)</a:t>
+            </a:r>
+          </a:p>
+        </p:txBody>
+      </p:sp>
+      <p:sp>
+        <p:nvSpPr>
+          <p:cNvPr id="4" name="TextBox 3"/>
+          <p:cNvSpPr txBox="1"/>
+          <p:nvPr/>
+        </p:nvSpPr>
+        <p:spPr>
+          <a:xfrm>
+            <a:off x="502920" y="1051560"/>
+            <a:ext cx="11155680" cy="320040"/>
+          </a:xfrm>
+          <a:prstGeom prst="rect">
+            <a:avLst/>
+          </a:prstGeom>
+          <a:noFill/>
+        </p:spPr>
+        <p:txBody>
+          <a:bodyPr wrap="square">
+            <a:spAutoFit/>
+          </a:bodyPr>
+          <a:lstStyle/>
+          <a:p>
+            <a:pPr algn="l"/>
+            <a:r>
+              <a:rPr sz="1300" b="1">
+                <a:solidFill>
+                  <a:srgbClr val="0B3D91"/>
+                </a:solidFill>
+                <a:latin typeface="Consolas"/>
+              </a:rPr>
+              <a:t>Cluster: rabbit@rabbitmq-node1  ·  RabbitMQ 3.13.7</a:t>
+            </a:r>
+          </a:p>
+        </p:txBody>
+      </p:sp>
+      <p:sp>
+        <p:nvSpPr>
+          <p:cNvPr id="5" name="TextBox 4"/>
+          <p:cNvSpPr txBox="1"/>
+          <p:nvPr/>
+        </p:nvSpPr>
+        <p:spPr>
+          <a:xfrm>
+            <a:off x="502920" y="1481328"/>
+            <a:ext cx="5486400" cy="274320"/>
+          </a:xfrm>
+          <a:prstGeom prst="rect">
+            <a:avLst/>
+          </a:prstGeom>
+          <a:noFill/>
+        </p:spPr>
+        <p:txBody>
+          <a:bodyPr wrap="square">
+            <a:spAutoFit/>
+          </a:bodyPr>
+          <a:lstStyle/>
+          <a:p>
+            <a:pPr algn="l"/>
+            <a:r>
+              <a:rPr sz="1200" b="1">
+                <a:solidFill>
+                  <a:srgbClr val="1F2A44"/>
+                </a:solidFill>
+                <a:latin typeface="Calibri"/>
+              </a:rPr>
+              <a:t>Nodos (cluster)</a:t>
+            </a:r>
+          </a:p>
+        </p:txBody>
+      </p:sp>
+      <p:sp>
+        <p:nvSpPr>
+          <p:cNvPr id="6" name="Rounded Rectangle 5"/>
+          <p:cNvSpPr/>
+          <p:nvPr/>
+        </p:nvSpPr>
+        <p:spPr>
+          <a:xfrm>
+            <a:off x="548640" y="1783080"/>
+            <a:ext cx="5394960" cy="365760"/>
+          </a:xfrm>
+          <a:prstGeom prst="roundRect">
+            <a:avLst>
+              <a:gd name="adj" fmla="val 28000"/>
+            </a:avLst>
+          </a:prstGeom>
+          <a:solidFill>
+            <a:srgbClr val="1B7A43"/>
+          </a:solidFill>
+          <a:ln>
+            <a:noFill/>
+          </a:ln>
+        </p:spPr>
+        <p:style>
+          <a:lnRef idx="1">
+            <a:schemeClr val="accent1"/>
+          </a:lnRef>
+          <a:fillRef idx="3">
+            <a:schemeClr val="accent1"/>
+          </a:fillRef>
+          <a:effectRef idx="2">
+            <a:schemeClr val="accent1"/>
+          </a:effectRef>
+          <a:fontRef idx="minor">
+            <a:schemeClr val="lt1"/>
+          </a:fontRef>
+        </p:style>
+        <p:txBody>
+          <a:bodyPr rtlCol="0" anchor="ctr" wrap="none" lIns="0" rIns="0" tIns="0" bIns="0"/>
+          <a:lstStyle/>
+          <a:p>
+            <a:pPr algn="ctr"/>
+            <a:r>
+              <a:rPr sz="1000" b="1">
+                <a:solidFill>
+                  <a:srgbClr val="FFFFFF"/>
+                </a:solidFill>
+                <a:latin typeface="Consolas"/>
+              </a:rPr>
+              <a:t>rabbit@rabbitmq-node1  running=True  (disc)</a:t>
+            </a:r>
+          </a:p>
+        </p:txBody>
+      </p:sp>
+      <p:sp>
+        <p:nvSpPr>
+          <p:cNvPr id="7" name="Rounded Rectangle 6"/>
+          <p:cNvSpPr/>
+          <p:nvPr/>
+        </p:nvSpPr>
+        <p:spPr>
+          <a:xfrm>
+            <a:off x="548640" y="2203704"/>
+            <a:ext cx="5394960" cy="365760"/>
+          </a:xfrm>
+          <a:prstGeom prst="roundRect">
+            <a:avLst>
+              <a:gd name="adj" fmla="val 28000"/>
+            </a:avLst>
+          </a:prstGeom>
+          <a:solidFill>
+            <a:srgbClr val="1B7A43"/>
+          </a:solidFill>
+          <a:ln>
+            <a:noFill/>
+          </a:ln>
+        </p:spPr>
+        <p:style>
+          <a:lnRef idx="1">
+            <a:schemeClr val="accent1"/>
+          </a:lnRef>
+          <a:fillRef idx="3">
+            <a:schemeClr val="accent1"/>
+          </a:fillRef>
+          <a:effectRef idx="2">
+            <a:schemeClr val="accent1"/>
+          </a:effectRef>
+          <a:fontRef idx="minor">
+            <a:schemeClr val="lt1"/>
+          </a:fontRef>
+        </p:style>
+        <p:txBody>
+          <a:bodyPr rtlCol="0" anchor="ctr" wrap="none" lIns="0" rIns="0" tIns="0" bIns="0"/>
+          <a:lstStyle/>
+          <a:p>
+            <a:pPr algn="ctr"/>
+            <a:r>
+              <a:rPr sz="1000" b="1">
+                <a:solidFill>
+                  <a:srgbClr val="FFFFFF"/>
+                </a:solidFill>
+                <a:latin typeface="Consolas"/>
+              </a:rPr>
+              <a:t>rabbit@rabbitmq-node2  running=True  (disc)</a:t>
+            </a:r>
+          </a:p>
+        </p:txBody>
+      </p:sp>
+      <p:sp>
+        <p:nvSpPr>
+          <p:cNvPr id="8" name="TextBox 7"/>
+          <p:cNvSpPr txBox="1"/>
+          <p:nvPr/>
+        </p:nvSpPr>
+        <p:spPr>
+          <a:xfrm>
+            <a:off x="6172200" y="1481328"/>
+            <a:ext cx="5486400" cy="274320"/>
+          </a:xfrm>
+          <a:prstGeom prst="rect">
+            <a:avLst/>
+          </a:prstGeom>
+          <a:noFill/>
+        </p:spPr>
+        <p:txBody>
+          <a:bodyPr wrap="square">
+            <a:spAutoFit/>
+          </a:bodyPr>
+          <a:lstStyle/>
+          <a:p>
+            <a:pPr algn="l"/>
+            <a:r>
+              <a:rPr sz="1200" b="1">
+                <a:solidFill>
+                  <a:srgbClr val="1F2A44"/>
+                </a:solidFill>
+                <a:latin typeface="Calibri"/>
+              </a:rPr>
+              <a:t>Exchanges</a:t>
+            </a:r>
+          </a:p>
+        </p:txBody>
+      </p:sp>
+      <p:sp>
+        <p:nvSpPr>
+          <p:cNvPr id="9" name="Rounded Rectangle 8"/>
+          <p:cNvSpPr/>
+          <p:nvPr/>
+        </p:nvSpPr>
+        <p:spPr>
+          <a:xfrm>
+            <a:off x="6217920" y="1783080"/>
+            <a:ext cx="5394960" cy="365760"/>
+          </a:xfrm>
+          <a:prstGeom prst="roundRect">
+            <a:avLst>
+              <a:gd name="adj" fmla="val 28000"/>
+            </a:avLst>
+          </a:prstGeom>
+          <a:solidFill>
+            <a:srgbClr val="0B3D91"/>
+          </a:solidFill>
+          <a:ln>
+            <a:noFill/>
+          </a:ln>
+        </p:spPr>
+        <p:style>
+          <a:lnRef idx="1">
+            <a:schemeClr val="accent1"/>
+          </a:lnRef>
+          <a:fillRef idx="3">
+            <a:schemeClr val="accent1"/>
+          </a:fillRef>
+          <a:effectRef idx="2">
+            <a:schemeClr val="accent1"/>
+          </a:effectRef>
+          <a:fontRef idx="minor">
+            <a:schemeClr val="lt1"/>
+          </a:fontRef>
+        </p:style>
+        <p:txBody>
+          <a:bodyPr rtlCol="0" anchor="ctr" wrap="none" lIns="0" rIns="0" tIns="0" bIns="0"/>
+          <a:lstStyle/>
+          <a:p>
+            <a:pPr algn="ctr"/>
+            <a:r>
+              <a:rPr sz="1000" b="1">
+                <a:solidFill>
+                  <a:srgbClr val="FFFFFF"/>
+                </a:solidFill>
+                <a:latin typeface="Consolas"/>
+              </a:rPr>
+              <a:t>pedido.documento  [topic]</a:t>
+            </a:r>
+          </a:p>
+        </p:txBody>
+      </p:sp>
+      <p:sp>
+        <p:nvSpPr>
+          <p:cNvPr id="10" name="Rounded Rectangle 9"/>
+          <p:cNvSpPr/>
+          <p:nvPr/>
+        </p:nvSpPr>
+        <p:spPr>
+          <a:xfrm>
+            <a:off x="6217920" y="2203704"/>
+            <a:ext cx="5394960" cy="365760"/>
+          </a:xfrm>
+          <a:prstGeom prst="roundRect">
+            <a:avLst>
+              <a:gd name="adj" fmla="val 28000"/>
+            </a:avLst>
+          </a:prstGeom>
+          <a:solidFill>
+            <a:srgbClr val="0B3D91"/>
+          </a:solidFill>
+          <a:ln>
+            <a:noFill/>
+          </a:ln>
+        </p:spPr>
+        <p:style>
+          <a:lnRef idx="1">
+            <a:schemeClr val="accent1"/>
+          </a:lnRef>
+          <a:fillRef idx="3">
+            <a:schemeClr val="accent1"/>
+          </a:fillRef>
+          <a:effectRef idx="2">
+            <a:schemeClr val="accent1"/>
+          </a:effectRef>
+          <a:fontRef idx="minor">
+            <a:schemeClr val="lt1"/>
+          </a:fontRef>
+        </p:style>
+        <p:txBody>
+          <a:bodyPr rtlCol="0" anchor="ctr" wrap="none" lIns="0" rIns="0" tIns="0" bIns="0"/>
+          <a:lstStyle/>
+          <a:p>
+            <a:pPr algn="ctr"/>
+            <a:r>
+              <a:rPr sz="1000" b="1">
+                <a:solidFill>
+                  <a:srgbClr val="FFFFFF"/>
+                </a:solidFill>
+                <a:latin typeface="Consolas"/>
+              </a:rPr>
+              <a:t>pedido.documento.dlx  [direct]</a:t>
+            </a:r>
+          </a:p>
+        </p:txBody>
+      </p:sp>
+      <p:sp>
+        <p:nvSpPr>
+          <p:cNvPr id="11" name="Rounded Rectangle 10"/>
+          <p:cNvSpPr/>
+          <p:nvPr/>
+        </p:nvSpPr>
+        <p:spPr>
+          <a:xfrm>
+            <a:off x="6217920" y="2624328"/>
+            <a:ext cx="5394960" cy="365760"/>
+          </a:xfrm>
+          <a:prstGeom prst="roundRect">
+            <a:avLst>
+              <a:gd name="adj" fmla="val 28000"/>
+            </a:avLst>
+          </a:prstGeom>
+          <a:solidFill>
+            <a:srgbClr val="0B3D91"/>
+          </a:solidFill>
+          <a:ln>
+            <a:noFill/>
+          </a:ln>
+        </p:spPr>
+        <p:style>
+          <a:lnRef idx="1">
+            <a:schemeClr val="accent1"/>
+          </a:lnRef>
+          <a:fillRef idx="3">
+            <a:schemeClr val="accent1"/>
+          </a:fillRef>
+          <a:effectRef idx="2">
+            <a:schemeClr val="accent1"/>
+          </a:effectRef>
+          <a:fontRef idx="minor">
+            <a:schemeClr val="lt1"/>
+          </a:fontRef>
+        </p:style>
+        <p:txBody>
+          <a:bodyPr rtlCol="0" anchor="ctr" wrap="none" lIns="0" rIns="0" tIns="0" bIns="0"/>
+          <a:lstStyle/>
+          <a:p>
+            <a:pPr algn="ctr"/>
+            <a:r>
+              <a:rPr sz="1000" b="1">
+                <a:solidFill>
+                  <a:srgbClr val="FFFFFF"/>
+                </a:solidFill>
+                <a:latin typeface="Consolas"/>
+              </a:rPr>
+              <a:t>pedido.notificacion  [direct]</a:t>
+            </a:r>
+          </a:p>
+        </p:txBody>
+      </p:sp>
+      <p:sp>
+        <p:nvSpPr>
+          <p:cNvPr id="12" name="Rounded Rectangle 11"/>
+          <p:cNvSpPr/>
+          <p:nvPr/>
+        </p:nvSpPr>
+        <p:spPr>
+          <a:xfrm>
+            <a:off x="6217920" y="3044952"/>
+            <a:ext cx="5394960" cy="365760"/>
+          </a:xfrm>
+          <a:prstGeom prst="roundRect">
+            <a:avLst>
+              <a:gd name="adj" fmla="val 28000"/>
+            </a:avLst>
+          </a:prstGeom>
+          <a:solidFill>
+            <a:srgbClr val="0B3D91"/>
+          </a:solidFill>
+          <a:ln>
+            <a:noFill/>
+          </a:ln>
+        </p:spPr>
+        <p:style>
+          <a:lnRef idx="1">
+            <a:schemeClr val="accent1"/>
+          </a:lnRef>
+          <a:fillRef idx="3">
+            <a:schemeClr val="accent1"/>
+          </a:fillRef>
+          <a:effectRef idx="2">
+            <a:schemeClr val="accent1"/>
+          </a:effectRef>
+          <a:fontRef idx="minor">
+            <a:schemeClr val="lt1"/>
+          </a:fontRef>
+        </p:style>
+        <p:txBody>
+          <a:bodyPr rtlCol="0" anchor="ctr" wrap="none" lIns="0" rIns="0" tIns="0" bIns="0"/>
+          <a:lstStyle/>
+          <a:p>
+            <a:pPr algn="ctr"/>
+            <a:r>
+              <a:rPr sz="1000" b="1">
+                <a:solidFill>
+                  <a:srgbClr val="FFFFFF"/>
+                </a:solidFill>
+                <a:latin typeface="Consolas"/>
+              </a:rPr>
+              <a:t>pedido.notificacion.dlx  [direct]</a:t>
+            </a:r>
+          </a:p>
+        </p:txBody>
+      </p:sp>
+      <p:sp>
+        <p:nvSpPr>
+          <p:cNvPr id="13" name="Rounded Rectangle 12"/>
+          <p:cNvSpPr/>
+          <p:nvPr/>
+        </p:nvSpPr>
+        <p:spPr>
+          <a:xfrm>
+            <a:off x="6217920" y="3465576"/>
+            <a:ext cx="5394960" cy="365760"/>
+          </a:xfrm>
+          <a:prstGeom prst="roundRect">
+            <a:avLst>
+              <a:gd name="adj" fmla="val 28000"/>
+            </a:avLst>
+          </a:prstGeom>
+          <a:solidFill>
+            <a:srgbClr val="0B3D91"/>
+          </a:solidFill>
+          <a:ln>
+            <a:noFill/>
+          </a:ln>
+        </p:spPr>
+        <p:style>
+          <a:lnRef idx="1">
+            <a:schemeClr val="accent1"/>
+          </a:lnRef>
+          <a:fillRef idx="3">
+            <a:schemeClr val="accent1"/>
+          </a:fillRef>
+          <a:effectRef idx="2">
+            <a:schemeClr val="accent1"/>
+          </a:effectRef>
+          <a:fontRef idx="minor">
+            <a:schemeClr val="lt1"/>
+          </a:fontRef>
+        </p:style>
+        <p:txBody>
+          <a:bodyPr rtlCol="0" anchor="ctr" wrap="none" lIns="0" rIns="0" tIns="0" bIns="0"/>
+          <a:lstStyle/>
+          <a:p>
+            <a:pPr algn="ctr"/>
+            <a:r>
+              <a:rPr sz="1000" b="1">
+                <a:solidFill>
+                  <a:srgbClr val="FFFFFF"/>
+                </a:solidFill>
+                <a:latin typeface="Consolas"/>
+              </a:rPr>
+              <a:t>ticket  [topic]</a:t>
+            </a:r>
+          </a:p>
+        </p:txBody>
+      </p:sp>
+      <p:sp>
+        <p:nvSpPr>
+          <p:cNvPr id="14" name="Rounded Rectangle 13"/>
+          <p:cNvSpPr/>
+          <p:nvPr/>
+        </p:nvSpPr>
+        <p:spPr>
+          <a:xfrm>
+            <a:off x="6217920" y="3886200"/>
+            <a:ext cx="5394960" cy="365760"/>
+          </a:xfrm>
+          <a:prstGeom prst="roundRect">
+            <a:avLst>
+              <a:gd name="adj" fmla="val 28000"/>
+            </a:avLst>
+          </a:prstGeom>
+          <a:solidFill>
+            <a:srgbClr val="0B3D91"/>
+          </a:solidFill>
+          <a:ln>
+            <a:noFill/>
+          </a:ln>
+        </p:spPr>
+        <p:style>
+          <a:lnRef idx="1">
+            <a:schemeClr val="accent1"/>
+          </a:lnRef>
+          <a:fillRef idx="3">
+            <a:schemeClr val="accent1"/>
+          </a:fillRef>
+          <a:effectRef idx="2">
+            <a:schemeClr val="accent1"/>
+          </a:effectRef>
+          <a:fontRef idx="minor">
+            <a:schemeClr val="lt1"/>
+          </a:fontRef>
+        </p:style>
+        <p:txBody>
+          <a:bodyPr rtlCol="0" anchor="ctr" wrap="none" lIns="0" rIns="0" tIns="0" bIns="0"/>
+          <a:lstStyle/>
+          <a:p>
+            <a:pPr algn="ctr"/>
+            <a:r>
+              <a:rPr sz="1000" b="1">
+                <a:solidFill>
+                  <a:srgbClr val="FFFFFF"/>
+                </a:solidFill>
+                <a:latin typeface="Consolas"/>
+              </a:rPr>
+              <a:t>ticket.dlx  [direct]</a:t>
+            </a:r>
+          </a:p>
+        </p:txBody>
+      </p:sp>
+      <p:sp>
+        <p:nvSpPr>
+          <p:cNvPr id="15" name="TextBox 14"/>
+          <p:cNvSpPr txBox="1"/>
+          <p:nvPr/>
+        </p:nvSpPr>
+        <p:spPr>
+          <a:xfrm>
+            <a:off x="502920" y="3246120"/>
+            <a:ext cx="11155680" cy="274320"/>
+          </a:xfrm>
+          <a:prstGeom prst="rect">
+            <a:avLst/>
+          </a:prstGeom>
+          <a:noFill/>
+        </p:spPr>
+        <p:txBody>
+          <a:bodyPr wrap="square">
+            <a:spAutoFit/>
+          </a:bodyPr>
+          <a:lstStyle/>
+          <a:p>
+            <a:pPr algn="l"/>
+            <a:r>
+              <a:rPr sz="1200" b="1">
+                <a:solidFill>
+                  <a:srgbClr val="1F2A44"/>
+                </a:solidFill>
+                <a:latin typeface="Calibri"/>
+              </a:rPr>
+              <a:t>Colas (3 + 3 DLQ)</a:t>
+            </a:r>
+          </a:p>
+        </p:txBody>
+      </p:sp>
+      <p:sp>
+        <p:nvSpPr>
+          <p:cNvPr id="16" name="Rounded Rectangle 15"/>
+          <p:cNvSpPr/>
+          <p:nvPr/>
+        </p:nvSpPr>
+        <p:spPr>
+          <a:xfrm>
+            <a:off x="502920" y="3566160"/>
+            <a:ext cx="3657600" cy="822960"/>
+          </a:xfrm>
+          <a:prstGeom prst="roundRect">
+            <a:avLst>
+              <a:gd name="adj" fmla="val 8000"/>
+            </a:avLst>
+          </a:prstGeom>
+          <a:solidFill>
+            <a:srgbClr val="F4F6FA"/>
+          </a:solidFill>
+          <a:ln w="16510">
+            <a:solidFill>
+              <a:srgbClr val="1B7A43"/>
+            </a:solidFill>
+          </a:ln>
+        </p:spPr>
+        <p:style>
+          <a:lnRef idx="1">
+            <a:schemeClr val="accent1"/>
+          </a:lnRef>
+          <a:fillRef idx="3">
+            <a:schemeClr val="accent1"/>
+          </a:fillRef>
+          <a:effectRef idx="2">
+            <a:schemeClr val="accent1"/>
+          </a:effectRef>
+          <a:fontRef idx="minor">
+            <a:schemeClr val="lt1"/>
+          </a:fontRef>
+        </p:style>
+        <p:txBody>
+          <a:bodyPr rtlCol="0" anchor="ctr"/>
+          <a:lstStyle/>
+          <a:p>
+            <a:pPr algn="ctr"/>
+          </a:p>
+        </p:txBody>
+      </p:sp>
+      <p:sp>
+        <p:nvSpPr>
+          <p:cNvPr id="17" name="TextBox 16"/>
+          <p:cNvSpPr txBox="1"/>
+          <p:nvPr/>
+        </p:nvSpPr>
+        <p:spPr>
+          <a:xfrm>
+            <a:off x="612648" y="3639312"/>
+            <a:ext cx="3438144" cy="292608"/>
+          </a:xfrm>
+          <a:prstGeom prst="rect">
+            <a:avLst/>
+          </a:prstGeom>
+          <a:noFill/>
+        </p:spPr>
+        <p:txBody>
+          <a:bodyPr wrap="square">
+            <a:spAutoFit/>
+          </a:bodyPr>
+          <a:lstStyle/>
+          <a:p>
+            <a:pPr algn="l"/>
+            <a:r>
+              <a:rPr sz="1100" b="1">
+                <a:solidFill>
+                  <a:srgbClr val="1F2A44"/>
+                </a:solidFill>
+                <a:latin typeface="Consolas"/>
+              </a:rPr>
+              <a:t>documentos.pedidos</a:t>
+            </a:r>
+          </a:p>
+        </p:txBody>
+      </p:sp>
+      <p:sp>
+        <p:nvSpPr>
+          <p:cNvPr id="18" name="TextBox 17"/>
+          <p:cNvSpPr txBox="1"/>
+          <p:nvPr/>
+        </p:nvSpPr>
+        <p:spPr>
+          <a:xfrm>
+            <a:off x="612648" y="3950208"/>
+            <a:ext cx="3438144" cy="365760"/>
+          </a:xfrm>
+          <a:prstGeom prst="rect">
+            <a:avLst/>
+          </a:prstGeom>
+          <a:noFill/>
+        </p:spPr>
+        <p:txBody>
+          <a:bodyPr wrap="square">
+            <a:spAutoFit/>
+          </a:bodyPr>
+          <a:lstStyle/>
+          <a:p>
+            <a:pPr algn="l"/>
+            <a:r>
+              <a:rPr sz="900" b="0">
+                <a:solidFill>
+                  <a:srgbClr val="606A7A"/>
+                </a:solidFill>
+                <a:latin typeface="Consolas"/>
+              </a:rPr>
+              <a:t>msgs=0 ready=0 consumers=1</a:t>
+            </a:r>
+          </a:p>
+        </p:txBody>
+      </p:sp>
+      <p:sp>
+        <p:nvSpPr>
+          <p:cNvPr id="19" name="Rounded Rectangle 18"/>
+          <p:cNvSpPr/>
+          <p:nvPr/>
+        </p:nvSpPr>
+        <p:spPr>
+          <a:xfrm>
+            <a:off x="4251959" y="3566160"/>
+            <a:ext cx="3657600" cy="822960"/>
+          </a:xfrm>
+          <a:prstGeom prst="roundRect">
+            <a:avLst>
+              <a:gd name="adj" fmla="val 8000"/>
+            </a:avLst>
+          </a:prstGeom>
+          <a:solidFill>
+            <a:srgbClr val="F4F6FA"/>
+          </a:solidFill>
+          <a:ln w="16510">
+            <a:solidFill>
+              <a:srgbClr val="C85600"/>
+            </a:solidFill>
+          </a:ln>
+        </p:spPr>
+        <p:style>
+          <a:lnRef idx="1">
+            <a:schemeClr val="accent1"/>
+          </a:lnRef>
+          <a:fillRef idx="3">
+            <a:schemeClr val="accent1"/>
+          </a:fillRef>
+          <a:effectRef idx="2">
+            <a:schemeClr val="accent1"/>
+          </a:effectRef>
+          <a:fontRef idx="minor">
+            <a:schemeClr val="lt1"/>
+          </a:fontRef>
+        </p:style>
+        <p:txBody>
+          <a:bodyPr rtlCol="0" anchor="ctr"/>
+          <a:lstStyle/>
+          <a:p>
+            <a:pPr algn="ctr"/>
+          </a:p>
+        </p:txBody>
+      </p:sp>
+      <p:sp>
+        <p:nvSpPr>
+          <p:cNvPr id="20" name="TextBox 19"/>
+          <p:cNvSpPr txBox="1"/>
+          <p:nvPr/>
+        </p:nvSpPr>
+        <p:spPr>
+          <a:xfrm>
+            <a:off x="4361688" y="3639312"/>
+            <a:ext cx="3438144" cy="292608"/>
+          </a:xfrm>
+          <a:prstGeom prst="rect">
+            <a:avLst/>
+          </a:prstGeom>
+          <a:noFill/>
+        </p:spPr>
+        <p:txBody>
+          <a:bodyPr wrap="square">
+            <a:spAutoFit/>
+          </a:bodyPr>
+          <a:lstStyle/>
+          <a:p>
+            <a:pPr algn="l"/>
+            <a:r>
+              <a:rPr sz="1100" b="1">
+                <a:solidFill>
+                  <a:srgbClr val="1F2A44"/>
+                </a:solidFill>
+                <a:latin typeface="Consolas"/>
+              </a:rPr>
+              <a:t>documentos.pedidos.dlq</a:t>
+            </a:r>
+          </a:p>
+        </p:txBody>
+      </p:sp>
+      <p:sp>
+        <p:nvSpPr>
+          <p:cNvPr id="21" name="TextBox 20"/>
+          <p:cNvSpPr txBox="1"/>
+          <p:nvPr/>
+        </p:nvSpPr>
+        <p:spPr>
+          <a:xfrm>
+            <a:off x="4361688" y="3950208"/>
+            <a:ext cx="3438144" cy="365760"/>
+          </a:xfrm>
+          <a:prstGeom prst="rect">
+            <a:avLst/>
+          </a:prstGeom>
+          <a:noFill/>
+        </p:spPr>
+        <p:txBody>
+          <a:bodyPr wrap="square">
+            <a:spAutoFit/>
+          </a:bodyPr>
+          <a:lstStyle/>
+          <a:p>
+            <a:pPr algn="l"/>
+            <a:r>
+              <a:rPr sz="900" b="0">
+                <a:solidFill>
+                  <a:srgbClr val="606A7A"/>
+                </a:solidFill>
+                <a:latin typeface="Consolas"/>
+              </a:rPr>
+              <a:t>msgs=0 ready=0 consumers=0</a:t>
+            </a:r>
+          </a:p>
+        </p:txBody>
+      </p:sp>
+      <p:sp>
+        <p:nvSpPr>
+          <p:cNvPr id="22" name="Rounded Rectangle 21"/>
+          <p:cNvSpPr/>
+          <p:nvPr/>
+        </p:nvSpPr>
+        <p:spPr>
+          <a:xfrm>
+            <a:off x="8001000" y="3566160"/>
+            <a:ext cx="3657600" cy="822960"/>
+          </a:xfrm>
+          <a:prstGeom prst="roundRect">
+            <a:avLst>
+              <a:gd name="adj" fmla="val 8000"/>
+            </a:avLst>
+          </a:prstGeom>
+          <a:solidFill>
+            <a:srgbClr val="F4F6FA"/>
+          </a:solidFill>
+          <a:ln w="16510">
+            <a:solidFill>
+              <a:srgbClr val="1B7A43"/>
+            </a:solidFill>
+          </a:ln>
+        </p:spPr>
+        <p:style>
+          <a:lnRef idx="1">
+            <a:schemeClr val="accent1"/>
+          </a:lnRef>
+          <a:fillRef idx="3">
+            <a:schemeClr val="accent1"/>
+          </a:fillRef>
+          <a:effectRef idx="2">
+            <a:schemeClr val="accent1"/>
+          </a:effectRef>
+          <a:fontRef idx="minor">
+            <a:schemeClr val="lt1"/>
+          </a:fontRef>
+        </p:style>
+        <p:txBody>
+          <a:bodyPr rtlCol="0" anchor="ctr"/>
+          <a:lstStyle/>
+          <a:p>
+            <a:pPr algn="ctr"/>
+          </a:p>
+        </p:txBody>
+      </p:sp>
+      <p:sp>
+        <p:nvSpPr>
+          <p:cNvPr id="23" name="TextBox 22"/>
+          <p:cNvSpPr txBox="1"/>
+          <p:nvPr/>
+        </p:nvSpPr>
+        <p:spPr>
+          <a:xfrm>
+            <a:off x="8110727" y="3639312"/>
+            <a:ext cx="3438144" cy="292608"/>
+          </a:xfrm>
+          <a:prstGeom prst="rect">
+            <a:avLst/>
+          </a:prstGeom>
+          <a:noFill/>
+        </p:spPr>
+        <p:txBody>
+          <a:bodyPr wrap="square">
+            <a:spAutoFit/>
+          </a:bodyPr>
+          <a:lstStyle/>
+          <a:p>
+            <a:pPr algn="l"/>
+            <a:r>
+              <a:rPr sz="1100" b="1">
+                <a:solidFill>
+                  <a:srgbClr val="1F2A44"/>
+                </a:solidFill>
+                <a:latin typeface="Consolas"/>
+              </a:rPr>
+              <a:t>notificaciones.pedidos</a:t>
+            </a:r>
+          </a:p>
+        </p:txBody>
+      </p:sp>
+      <p:sp>
+        <p:nvSpPr>
+          <p:cNvPr id="24" name="TextBox 23"/>
+          <p:cNvSpPr txBox="1"/>
+          <p:nvPr/>
+        </p:nvSpPr>
+        <p:spPr>
+          <a:xfrm>
+            <a:off x="8110727" y="3950208"/>
+            <a:ext cx="3438144" cy="365760"/>
+          </a:xfrm>
+          <a:prstGeom prst="rect">
+            <a:avLst/>
+          </a:prstGeom>
+          <a:noFill/>
+        </p:spPr>
+        <p:txBody>
+          <a:bodyPr wrap="square">
+            <a:spAutoFit/>
+          </a:bodyPr>
+          <a:lstStyle/>
+          <a:p>
+            <a:pPr algn="l"/>
+            <a:r>
+              <a:rPr sz="900" b="0">
+                <a:solidFill>
+                  <a:srgbClr val="606A7A"/>
+                </a:solidFill>
+                <a:latin typeface="Consolas"/>
+              </a:rPr>
+              <a:t>msgs=0 ready=0 consumers=1</a:t>
+            </a:r>
+          </a:p>
+        </p:txBody>
+      </p:sp>
+      <p:sp>
+        <p:nvSpPr>
+          <p:cNvPr id="25" name="Rounded Rectangle 24"/>
+          <p:cNvSpPr/>
+          <p:nvPr/>
+        </p:nvSpPr>
+        <p:spPr>
+          <a:xfrm>
+            <a:off x="502920" y="4498848"/>
+            <a:ext cx="3657600" cy="822960"/>
+          </a:xfrm>
+          <a:prstGeom prst="roundRect">
+            <a:avLst>
+              <a:gd name="adj" fmla="val 8000"/>
+            </a:avLst>
+          </a:prstGeom>
+          <a:solidFill>
+            <a:srgbClr val="F4F6FA"/>
+          </a:solidFill>
+          <a:ln w="16510">
+            <a:solidFill>
+              <a:srgbClr val="C85600"/>
+            </a:solidFill>
+          </a:ln>
+        </p:spPr>
+        <p:style>
+          <a:lnRef idx="1">
+            <a:schemeClr val="accent1"/>
+          </a:lnRef>
+          <a:fillRef idx="3">
+            <a:schemeClr val="accent1"/>
+          </a:fillRef>
+          <a:effectRef idx="2">
+            <a:schemeClr val="accent1"/>
+          </a:effectRef>
+          <a:fontRef idx="minor">
+            <a:schemeClr val="lt1"/>
+          </a:fontRef>
+        </p:style>
+        <p:txBody>
+          <a:bodyPr rtlCol="0" anchor="ctr"/>
+          <a:lstStyle/>
+          <a:p>
+            <a:pPr algn="ctr"/>
+          </a:p>
+        </p:txBody>
+      </p:sp>
+      <p:sp>
+        <p:nvSpPr>
+          <p:cNvPr id="26" name="TextBox 25"/>
+          <p:cNvSpPr txBox="1"/>
+          <p:nvPr/>
+        </p:nvSpPr>
+        <p:spPr>
+          <a:xfrm>
+            <a:off x="612648" y="4572000"/>
+            <a:ext cx="3438144" cy="292608"/>
+          </a:xfrm>
+          <a:prstGeom prst="rect">
+            <a:avLst/>
+          </a:prstGeom>
+          <a:noFill/>
+        </p:spPr>
+        <p:txBody>
+          <a:bodyPr wrap="square">
+            <a:spAutoFit/>
+          </a:bodyPr>
+          <a:lstStyle/>
+          <a:p>
+            <a:pPr algn="l"/>
+            <a:r>
+              <a:rPr sz="1100" b="1">
+                <a:solidFill>
+                  <a:srgbClr val="1F2A44"/>
+                </a:solidFill>
+                <a:latin typeface="Consolas"/>
+              </a:rPr>
+              <a:t>notificaciones.pedidos.dlq</a:t>
+            </a:r>
+          </a:p>
+        </p:txBody>
+      </p:sp>
+      <p:sp>
+        <p:nvSpPr>
+          <p:cNvPr id="27" name="TextBox 26"/>
+          <p:cNvSpPr txBox="1"/>
+          <p:nvPr/>
+        </p:nvSpPr>
+        <p:spPr>
+          <a:xfrm>
+            <a:off x="612648" y="4882896"/>
+            <a:ext cx="3438144" cy="365760"/>
+          </a:xfrm>
+          <a:prstGeom prst="rect">
+            <a:avLst/>
+          </a:prstGeom>
+          <a:noFill/>
+        </p:spPr>
+        <p:txBody>
+          <a:bodyPr wrap="square">
+            <a:spAutoFit/>
+          </a:bodyPr>
+          <a:lstStyle/>
+          <a:p>
+            <a:pPr algn="l"/>
+            <a:r>
+              <a:rPr sz="900" b="0">
+                <a:solidFill>
+                  <a:srgbClr val="606A7A"/>
+                </a:solidFill>
+                <a:latin typeface="Consolas"/>
+              </a:rPr>
+              <a:t>msgs=0 ready=0 consumers=0</a:t>
+            </a:r>
+          </a:p>
+        </p:txBody>
+      </p:sp>
+      <p:sp>
+        <p:nvSpPr>
+          <p:cNvPr id="28" name="Rounded Rectangle 27"/>
+          <p:cNvSpPr/>
+          <p:nvPr/>
+        </p:nvSpPr>
+        <p:spPr>
+          <a:xfrm>
+            <a:off x="4251959" y="4498848"/>
+            <a:ext cx="3657600" cy="822960"/>
+          </a:xfrm>
+          <a:prstGeom prst="roundRect">
+            <a:avLst>
+              <a:gd name="adj" fmla="val 8000"/>
+            </a:avLst>
+          </a:prstGeom>
+          <a:solidFill>
+            <a:srgbClr val="F4F6FA"/>
+          </a:solidFill>
+          <a:ln w="16510">
+            <a:solidFill>
+              <a:srgbClr val="1B7A43"/>
+            </a:solidFill>
+          </a:ln>
+        </p:spPr>
+        <p:style>
+          <a:lnRef idx="1">
+            <a:schemeClr val="accent1"/>
+          </a:lnRef>
+          <a:fillRef idx="3">
+            <a:schemeClr val="accent1"/>
+          </a:fillRef>
+          <a:effectRef idx="2">
+            <a:schemeClr val="accent1"/>
+          </a:effectRef>
+          <a:fontRef idx="minor">
+            <a:schemeClr val="lt1"/>
+          </a:fontRef>
+        </p:style>
+        <p:txBody>
+          <a:bodyPr rtlCol="0" anchor="ctr"/>
+          <a:lstStyle/>
+          <a:p>
+            <a:pPr algn="ctr"/>
+          </a:p>
+        </p:txBody>
+      </p:sp>
+      <p:sp>
+        <p:nvSpPr>
+          <p:cNvPr id="29" name="TextBox 28"/>
+          <p:cNvSpPr txBox="1"/>
+          <p:nvPr/>
+        </p:nvSpPr>
+        <p:spPr>
+          <a:xfrm>
+            <a:off x="4361688" y="4572000"/>
+            <a:ext cx="3438144" cy="292608"/>
+          </a:xfrm>
+          <a:prstGeom prst="rect">
+            <a:avLst/>
+          </a:prstGeom>
+          <a:noFill/>
+        </p:spPr>
+        <p:txBody>
+          <a:bodyPr wrap="square">
+            <a:spAutoFit/>
+          </a:bodyPr>
+          <a:lstStyle/>
+          <a:p>
+            <a:pPr algn="l"/>
+            <a:r>
+              <a:rPr sz="1100" b="1">
+                <a:solidFill>
+                  <a:srgbClr val="1F2A44"/>
+                </a:solidFill>
+                <a:latin typeface="Consolas"/>
+              </a:rPr>
+              <a:t>tickets.pedidos</a:t>
+            </a:r>
+          </a:p>
+        </p:txBody>
+      </p:sp>
+      <p:sp>
+        <p:nvSpPr>
+          <p:cNvPr id="30" name="TextBox 29"/>
+          <p:cNvSpPr txBox="1"/>
+          <p:nvPr/>
+        </p:nvSpPr>
+        <p:spPr>
+          <a:xfrm>
+            <a:off x="4361688" y="4882896"/>
+            <a:ext cx="3438144" cy="365760"/>
+          </a:xfrm>
+          <a:prstGeom prst="rect">
+            <a:avLst/>
+          </a:prstGeom>
+          <a:noFill/>
+        </p:spPr>
+        <p:txBody>
+          <a:bodyPr wrap="square">
+            <a:spAutoFit/>
+          </a:bodyPr>
+          <a:lstStyle/>
+          <a:p>
+            <a:pPr algn="l"/>
+            <a:r>
+              <a:rPr sz="900" b="0">
+                <a:solidFill>
+                  <a:srgbClr val="606A7A"/>
+                </a:solidFill>
+                <a:latin typeface="Consolas"/>
+              </a:rPr>
+              <a:t>msgs=0 ready=0 consumers=1</a:t>
+            </a:r>
+          </a:p>
+        </p:txBody>
+      </p:sp>
+      <p:sp>
+        <p:nvSpPr>
+          <p:cNvPr id="31" name="Rounded Rectangle 30"/>
+          <p:cNvSpPr/>
+          <p:nvPr/>
+        </p:nvSpPr>
+        <p:spPr>
+          <a:xfrm>
+            <a:off x="8001000" y="4498848"/>
+            <a:ext cx="3657600" cy="822960"/>
+          </a:xfrm>
+          <a:prstGeom prst="roundRect">
+            <a:avLst>
+              <a:gd name="adj" fmla="val 8000"/>
+            </a:avLst>
+          </a:prstGeom>
+          <a:solidFill>
+            <a:srgbClr val="F4F6FA"/>
+          </a:solidFill>
+          <a:ln w="16510">
+            <a:solidFill>
+              <a:srgbClr val="C85600"/>
+            </a:solidFill>
+          </a:ln>
+        </p:spPr>
+        <p:style>
+          <a:lnRef idx="1">
+            <a:schemeClr val="accent1"/>
+          </a:lnRef>
+          <a:fillRef idx="3">
+            <a:schemeClr val="accent1"/>
+          </a:fillRef>
+          <a:effectRef idx="2">
+            <a:schemeClr val="accent1"/>
+          </a:effectRef>
+          <a:fontRef idx="minor">
+            <a:schemeClr val="lt1"/>
+          </a:fontRef>
+        </p:style>
+        <p:txBody>
+          <a:bodyPr rtlCol="0" anchor="ctr"/>
+          <a:lstStyle/>
+          <a:p>
+            <a:pPr algn="ctr"/>
+          </a:p>
+        </p:txBody>
+      </p:sp>
+      <p:sp>
+        <p:nvSpPr>
+          <p:cNvPr id="32" name="TextBox 31"/>
+          <p:cNvSpPr txBox="1"/>
+          <p:nvPr/>
+        </p:nvSpPr>
+        <p:spPr>
+          <a:xfrm>
+            <a:off x="8110727" y="4572000"/>
+            <a:ext cx="3438144" cy="292608"/>
+          </a:xfrm>
+          <a:prstGeom prst="rect">
+            <a:avLst/>
+          </a:prstGeom>
+          <a:noFill/>
+        </p:spPr>
+        <p:txBody>
+          <a:bodyPr wrap="square">
+            <a:spAutoFit/>
+          </a:bodyPr>
+          <a:lstStyle/>
+          <a:p>
+            <a:pPr algn="l"/>
+            <a:r>
+              <a:rPr sz="1100" b="1">
+                <a:solidFill>
+                  <a:srgbClr val="1F2A44"/>
+                </a:solidFill>
+                <a:latin typeface="Consolas"/>
+              </a:rPr>
+              <a:t>tickets.pedidos.dlq</a:t>
+            </a:r>
+          </a:p>
+        </p:txBody>
+      </p:sp>
+      <p:sp>
+        <p:nvSpPr>
+          <p:cNvPr id="33" name="TextBox 32"/>
+          <p:cNvSpPr txBox="1"/>
+          <p:nvPr/>
+        </p:nvSpPr>
+        <p:spPr>
+          <a:xfrm>
+            <a:off x="8110727" y="4882896"/>
+            <a:ext cx="3438144" cy="365760"/>
+          </a:xfrm>
+          <a:prstGeom prst="rect">
+            <a:avLst/>
+          </a:prstGeom>
+          <a:noFill/>
+        </p:spPr>
+        <p:txBody>
+          <a:bodyPr wrap="square">
+            <a:spAutoFit/>
+          </a:bodyPr>
+          <a:lstStyle/>
+          <a:p>
+            <a:pPr algn="l"/>
+            <a:r>
+              <a:rPr sz="900" b="0">
+                <a:solidFill>
+                  <a:srgbClr val="606A7A"/>
+                </a:solidFill>
+                <a:latin typeface="Consolas"/>
+              </a:rPr>
+              <a:t>msgs=0 ready=0 consumers=0</a:t>
+            </a:r>
+          </a:p>
+        </p:txBody>
+      </p:sp>
+      <p:sp>
+        <p:nvSpPr>
+          <p:cNvPr id="34" name="TextBox 33"/>
+          <p:cNvSpPr txBox="1"/>
+          <p:nvPr/>
+        </p:nvSpPr>
+        <p:spPr>
+          <a:xfrm>
+            <a:off x="502920" y="5394960"/>
+            <a:ext cx="11155680" cy="914400"/>
+          </a:xfrm>
+          <a:prstGeom prst="rect">
+            <a:avLst/>
+          </a:prstGeom>
+          <a:noFill/>
+        </p:spPr>
+        <p:txBody>
+          <a:bodyPr wrap="square">
+            <a:spAutoFit/>
+          </a:bodyPr>
+          <a:lstStyle/>
+          <a:p>
+            <a:pPr algn="ctr"/>
+            <a:r>
+              <a:rPr sz="1200" b="0">
+                <a:solidFill>
+                  <a:srgbClr val="606A7A"/>
+                </a:solidFill>
+                <a:latin typeface="Calibri"/>
+              </a:rPr>
+              <a:t>[Captura pendiente: UI RabbitMQ → Queues + Nodes + docker compose ps]</a:t>
+            </a:r>
+          </a:p>
+        </p:txBody>
+      </p:sp>
+    </p:spTree>
+  </p:cSld>
+  <p:clrMapOvr>
+    <a:masterClrMapping/>
+  </p:clrMapOvr>
+</p:sld>
+</file>
+
+<file path=ppt/slides/slide11.xml><?xml version="1.0" encoding="utf-8"?>
+<p:sld xmlns:a="http://schemas.openxmlformats.org/drawingml/2006/main" xmlns:p="http://schemas.openxmlformats.org/presentationml/2006/main" xmlns:r="http://schemas.openxmlformats.org/officeDocument/2006/relationships">
+  <p:cSld>
+    <p:spTree>
+      <p:nvGrpSpPr>
+        <p:cNvPr id="1" name=""/>
+        <p:cNvGrpSpPr/>
+        <p:nvPr/>
+      </p:nvGrpSpPr>
+      <p:grpSpPr/>
+      <p:sp>
+        <p:nvSpPr>
+          <p:cNvPr id="2" name="Rectangle 1"/>
+          <p:cNvSpPr/>
+          <p:nvPr/>
+        </p:nvSpPr>
+        <p:spPr>
+          <a:xfrm>
+            <a:off x="0" y="0"/>
+            <a:ext cx="12191695" cy="868680"/>
+          </a:xfrm>
+          <a:prstGeom prst="rect">
+            <a:avLst/>
+          </a:prstGeom>
+          <a:solidFill>
+            <a:srgbClr val="1F2A44"/>
+          </a:solidFill>
+          <a:ln>
+            <a:noFill/>
+          </a:ln>
+        </p:spPr>
+        <p:style>
+          <a:lnRef idx="1">
+            <a:schemeClr val="accent1"/>
+          </a:lnRef>
+          <a:fillRef idx="3">
+            <a:schemeClr val="accent1"/>
+          </a:fillRef>
+          <a:effectRef idx="2">
+            <a:schemeClr val="accent1"/>
+          </a:effectRef>
+          <a:fontRef idx="minor">
+            <a:schemeClr val="lt1"/>
+          </a:fontRef>
+        </p:style>
+        <p:txBody>
+          <a:bodyPr rtlCol="0" anchor="ctr"/>
+          <a:lstStyle/>
+          <a:p>
+            <a:pPr algn="ctr"/>
+          </a:p>
+        </p:txBody>
+      </p:sp>
+      <p:sp>
+        <p:nvSpPr>
+          <p:cNvPr id="3" name="TextBox 2"/>
+          <p:cNvSpPr txBox="1"/>
+          <p:nvPr/>
+        </p:nvSpPr>
+        <p:spPr>
+          <a:xfrm>
+            <a:off x="502920" y="109728"/>
+            <a:ext cx="10515600" cy="548640"/>
+          </a:xfrm>
+          <a:prstGeom prst="rect">
+            <a:avLst/>
+          </a:prstGeom>
+          <a:noFill/>
+        </p:spPr>
+        <p:txBody>
+          <a:bodyPr wrap="square">
+            <a:spAutoFit/>
+          </a:bodyPr>
+          <a:lstStyle/>
+          <a:p>
+            <a:pPr algn="l"/>
+            <a:r>
+              <a:rPr sz="2600" b="1">
+                <a:solidFill>
+                  <a:srgbClr val="FFFFFF"/>
+                </a:solidFill>
+                <a:latin typeface="Calibri"/>
+              </a:rPr>
+              <a:t>Etapa 3 · Microservicio admin RabbitMQ :8091 (EP3: 13% + 10% + 7%)</a:t>
+            </a:r>
+          </a:p>
+        </p:txBody>
+      </p:sp>
+      <p:sp>
+        <p:nvSpPr>
+          <p:cNvPr id="4" name="TextBox 3"/>
+          <p:cNvSpPr txBox="1"/>
+          <p:nvPr/>
+        </p:nvSpPr>
+        <p:spPr>
+          <a:xfrm>
+            <a:off x="502920" y="1051560"/>
+            <a:ext cx="11155680" cy="320040"/>
+          </a:xfrm>
+          <a:prstGeom prst="rect">
+            <a:avLst/>
+          </a:prstGeom>
+          <a:noFill/>
+        </p:spPr>
+        <p:txBody>
+          <a:bodyPr wrap="square">
+            <a:spAutoFit/>
+          </a:bodyPr>
+          <a:lstStyle/>
+          <a:p>
+            <a:pPr algn="l"/>
+            <a:r>
+              <a:rPr sz="1200" b="1">
+                <a:solidFill>
+                  <a:srgbClr val="0B3D91"/>
+                </a:solidFill>
+                <a:latin typeface="Calibri"/>
+              </a:rPr>
+              <a:t>RabbitAdminService (AmqpAdmin) encapsula la topologia; DTO con Bean Validation; rol PEDIDOS_ADMIN</a:t>
+            </a:r>
+          </a:p>
+        </p:txBody>
+      </p:sp>
+      <p:sp>
+        <p:nvSpPr>
+          <p:cNvPr id="5" name="Rounded Rectangle 4"/>
+          <p:cNvSpPr/>
+          <p:nvPr/>
+        </p:nvSpPr>
+        <p:spPr>
+          <a:xfrm>
+            <a:off x="548640" y="1463040"/>
+            <a:ext cx="1143000" cy="329184"/>
+          </a:xfrm>
+          <a:prstGeom prst="roundRect">
+            <a:avLst>
+              <a:gd name="adj" fmla="val 28000"/>
+            </a:avLst>
+          </a:prstGeom>
+          <a:solidFill>
+            <a:srgbClr val="1B7A43"/>
+          </a:solidFill>
+          <a:ln>
+            <a:noFill/>
+          </a:ln>
+        </p:spPr>
+        <p:style>
+          <a:lnRef idx="1">
+            <a:schemeClr val="accent1"/>
+          </a:lnRef>
+          <a:fillRef idx="3">
+            <a:schemeClr val="accent1"/>
+          </a:fillRef>
+          <a:effectRef idx="2">
+            <a:schemeClr val="accent1"/>
+          </a:effectRef>
+          <a:fontRef idx="minor">
+            <a:schemeClr val="lt1"/>
+          </a:fontRef>
+        </p:style>
+        <p:txBody>
+          <a:bodyPr rtlCol="0" anchor="ctr" wrap="none" lIns="0" rIns="0" tIns="0" bIns="0"/>
+          <a:lstStyle/>
+          <a:p>
+            <a:pPr algn="ctr"/>
+            <a:r>
+              <a:rPr sz="1000" b="1">
+                <a:solidFill>
+                  <a:srgbClr val="FFFFFF"/>
+                </a:solidFill>
+                <a:latin typeface="Consolas"/>
+              </a:rPr>
+              <a:t>POST</a:t>
+            </a:r>
+          </a:p>
+        </p:txBody>
+      </p:sp>
+      <p:sp>
+        <p:nvSpPr>
+          <p:cNvPr id="6" name="TextBox 5"/>
+          <p:cNvSpPr txBox="1"/>
+          <p:nvPr/>
+        </p:nvSpPr>
+        <p:spPr>
+          <a:xfrm>
+            <a:off x="1828800" y="1481328"/>
+            <a:ext cx="4937760" cy="310896"/>
+          </a:xfrm>
+          <a:prstGeom prst="rect">
+            <a:avLst/>
+          </a:prstGeom>
+          <a:noFill/>
+        </p:spPr>
+        <p:txBody>
+          <a:bodyPr wrap="square">
+            <a:spAutoFit/>
+          </a:bodyPr>
+          <a:lstStyle/>
+          <a:p>
+            <a:pPr algn="l"/>
+            <a:r>
+              <a:rPr sz="1100" b="0">
+                <a:solidFill>
+                  <a:srgbClr val="1F2A44"/>
+                </a:solidFill>
+                <a:latin typeface="Consolas"/>
+              </a:rPr>
+              <a:t>/admin/queues</a:t>
+            </a:r>
+          </a:p>
+        </p:txBody>
+      </p:sp>
+      <p:sp>
+        <p:nvSpPr>
+          <p:cNvPr id="7" name="TextBox 6"/>
+          <p:cNvSpPr txBox="1"/>
+          <p:nvPr/>
+        </p:nvSpPr>
+        <p:spPr>
+          <a:xfrm>
+            <a:off x="6858000" y="1481328"/>
+            <a:ext cx="4846320" cy="310896"/>
+          </a:xfrm>
+          <a:prstGeom prst="rect">
+            <a:avLst/>
+          </a:prstGeom>
+          <a:noFill/>
+        </p:spPr>
+        <p:txBody>
+          <a:bodyPr wrap="square">
+            <a:spAutoFit/>
+          </a:bodyPr>
+          <a:lstStyle/>
+          <a:p>
+            <a:pPr algn="l"/>
+            <a:r>
+              <a:rPr sz="1000" b="0">
+                <a:solidFill>
+                  <a:srgbClr val="606A7A"/>
+                </a:solidFill>
+                <a:latin typeface="Calibri"/>
+              </a:rPr>
+              <a:t>crea cola (DTO ColaRequest)</a:t>
+            </a:r>
+          </a:p>
+        </p:txBody>
+      </p:sp>
+      <p:sp>
+        <p:nvSpPr>
+          <p:cNvPr id="8" name="Rounded Rectangle 7"/>
+          <p:cNvSpPr/>
+          <p:nvPr/>
+        </p:nvSpPr>
+        <p:spPr>
+          <a:xfrm>
+            <a:off x="548640" y="1847088"/>
+            <a:ext cx="1143000" cy="329184"/>
+          </a:xfrm>
+          <a:prstGeom prst="roundRect">
+            <a:avLst>
+              <a:gd name="adj" fmla="val 28000"/>
+            </a:avLst>
+          </a:prstGeom>
+          <a:solidFill>
+            <a:srgbClr val="C85600"/>
+          </a:solidFill>
+          <a:ln>
+            <a:noFill/>
+          </a:ln>
+        </p:spPr>
+        <p:style>
+          <a:lnRef idx="1">
+            <a:schemeClr val="accent1"/>
+          </a:lnRef>
+          <a:fillRef idx="3">
+            <a:schemeClr val="accent1"/>
+          </a:fillRef>
+          <a:effectRef idx="2">
+            <a:schemeClr val="accent1"/>
+          </a:effectRef>
+          <a:fontRef idx="minor">
+            <a:schemeClr val="lt1"/>
+          </a:fontRef>
+        </p:style>
+        <p:txBody>
+          <a:bodyPr rtlCol="0" anchor="ctr" wrap="none" lIns="0" rIns="0" tIns="0" bIns="0"/>
+          <a:lstStyle/>
+          <a:p>
+            <a:pPr algn="ctr"/>
+            <a:r>
+              <a:rPr sz="1000" b="1">
+                <a:solidFill>
+                  <a:srgbClr val="FFFFFF"/>
+                </a:solidFill>
+                <a:latin typeface="Consolas"/>
+              </a:rPr>
+              <a:t>DELETE</a:t>
+            </a:r>
+          </a:p>
+        </p:txBody>
+      </p:sp>
+      <p:sp>
+        <p:nvSpPr>
+          <p:cNvPr id="9" name="TextBox 8"/>
+          <p:cNvSpPr txBox="1"/>
+          <p:nvPr/>
+        </p:nvSpPr>
+        <p:spPr>
+          <a:xfrm>
+            <a:off x="1828800" y="1865376"/>
+            <a:ext cx="4937760" cy="310896"/>
+          </a:xfrm>
+          <a:prstGeom prst="rect">
+            <a:avLst/>
+          </a:prstGeom>
+          <a:noFill/>
+        </p:spPr>
+        <p:txBody>
+          <a:bodyPr wrap="square">
+            <a:spAutoFit/>
+          </a:bodyPr>
+          <a:lstStyle/>
+          <a:p>
+            <a:pPr algn="l"/>
+            <a:r>
+              <a:rPr sz="1100" b="0">
+                <a:solidFill>
+                  <a:srgbClr val="1F2A44"/>
+                </a:solidFill>
+                <a:latin typeface="Consolas"/>
+              </a:rPr>
+              <a:t>/admin/queues/{nombre}</a:t>
+            </a:r>
+          </a:p>
+        </p:txBody>
+      </p:sp>
+      <p:sp>
+        <p:nvSpPr>
+          <p:cNvPr id="10" name="TextBox 9"/>
+          <p:cNvSpPr txBox="1"/>
+          <p:nvPr/>
+        </p:nvSpPr>
+        <p:spPr>
+          <a:xfrm>
+            <a:off x="6858000" y="1865376"/>
+            <a:ext cx="4846320" cy="310896"/>
+          </a:xfrm>
+          <a:prstGeom prst="rect">
+            <a:avLst/>
+          </a:prstGeom>
+          <a:noFill/>
+        </p:spPr>
+        <p:txBody>
+          <a:bodyPr wrap="square">
+            <a:spAutoFit/>
+          </a:bodyPr>
+          <a:lstStyle/>
+          <a:p>
+            <a:pPr algn="l"/>
+            <a:r>
+              <a:rPr sz="1000" b="0">
+                <a:solidFill>
+                  <a:srgbClr val="606A7A"/>
+                </a:solidFill>
+                <a:latin typeface="Calibri"/>
+              </a:rPr>
+              <a:t>elimina cola</a:t>
+            </a:r>
+          </a:p>
+        </p:txBody>
+      </p:sp>
+      <p:sp>
+        <p:nvSpPr>
+          <p:cNvPr id="11" name="Rounded Rectangle 10"/>
+          <p:cNvSpPr/>
+          <p:nvPr/>
+        </p:nvSpPr>
+        <p:spPr>
+          <a:xfrm>
+            <a:off x="548640" y="2231136"/>
+            <a:ext cx="1143000" cy="329184"/>
+          </a:xfrm>
+          <a:prstGeom prst="roundRect">
+            <a:avLst>
+              <a:gd name="adj" fmla="val 28000"/>
+            </a:avLst>
+          </a:prstGeom>
+          <a:solidFill>
+            <a:srgbClr val="1B7A43"/>
+          </a:solidFill>
+          <a:ln>
+            <a:noFill/>
+          </a:ln>
+        </p:spPr>
+        <p:style>
+          <a:lnRef idx="1">
+            <a:schemeClr val="accent1"/>
+          </a:lnRef>
+          <a:fillRef idx="3">
+            <a:schemeClr val="accent1"/>
+          </a:fillRef>
+          <a:effectRef idx="2">
+            <a:schemeClr val="accent1"/>
+          </a:effectRef>
+          <a:fontRef idx="minor">
+            <a:schemeClr val="lt1"/>
+          </a:fontRef>
+        </p:style>
+        <p:txBody>
+          <a:bodyPr rtlCol="0" anchor="ctr" wrap="none" lIns="0" rIns="0" tIns="0" bIns="0"/>
+          <a:lstStyle/>
+          <a:p>
+            <a:pPr algn="ctr"/>
+            <a:r>
+              <a:rPr sz="1000" b="1">
+                <a:solidFill>
+                  <a:srgbClr val="FFFFFF"/>
+                </a:solidFill>
+                <a:latin typeface="Consolas"/>
+              </a:rPr>
+              <a:t>POST</a:t>
+            </a:r>
+          </a:p>
+        </p:txBody>
+      </p:sp>
+      <p:sp>
+        <p:nvSpPr>
+          <p:cNvPr id="12" name="TextBox 11"/>
+          <p:cNvSpPr txBox="1"/>
+          <p:nvPr/>
+        </p:nvSpPr>
+        <p:spPr>
+          <a:xfrm>
+            <a:off x="1828800" y="2249424"/>
+            <a:ext cx="4937760" cy="310896"/>
+          </a:xfrm>
+          <a:prstGeom prst="rect">
+            <a:avLst/>
+          </a:prstGeom>
+          <a:noFill/>
+        </p:spPr>
+        <p:txBody>
+          <a:bodyPr wrap="square">
+            <a:spAutoFit/>
+          </a:bodyPr>
+          <a:lstStyle/>
+          <a:p>
+            <a:pPr algn="l"/>
+            <a:r>
+              <a:rPr sz="1100" b="0">
+                <a:solidFill>
+                  <a:srgbClr val="1F2A44"/>
+                </a:solidFill>
+                <a:latin typeface="Consolas"/>
+              </a:rPr>
+              <a:t>/admin/exchanges</a:t>
+            </a:r>
+          </a:p>
+        </p:txBody>
+      </p:sp>
+      <p:sp>
+        <p:nvSpPr>
+          <p:cNvPr id="13" name="TextBox 12"/>
+          <p:cNvSpPr txBox="1"/>
+          <p:nvPr/>
+        </p:nvSpPr>
+        <p:spPr>
+          <a:xfrm>
+            <a:off x="6858000" y="2249424"/>
+            <a:ext cx="4846320" cy="310896"/>
+          </a:xfrm>
+          <a:prstGeom prst="rect">
+            <a:avLst/>
+          </a:prstGeom>
+          <a:noFill/>
+        </p:spPr>
+        <p:txBody>
+          <a:bodyPr wrap="square">
+            <a:spAutoFit/>
+          </a:bodyPr>
+          <a:lstStyle/>
+          <a:p>
+            <a:pPr algn="l"/>
+            <a:r>
+              <a:rPr sz="1000" b="0">
+                <a:solidFill>
+                  <a:srgbClr val="606A7A"/>
+                </a:solidFill>
+                <a:latin typeface="Calibri"/>
+              </a:rPr>
+              <a:t>crea exchange direct/topic/fanout/headers</a:t>
+            </a:r>
+          </a:p>
+        </p:txBody>
+      </p:sp>
+      <p:sp>
+        <p:nvSpPr>
+          <p:cNvPr id="14" name="Rounded Rectangle 13"/>
+          <p:cNvSpPr/>
+          <p:nvPr/>
+        </p:nvSpPr>
+        <p:spPr>
+          <a:xfrm>
+            <a:off x="548640" y="2615184"/>
+            <a:ext cx="1143000" cy="329184"/>
+          </a:xfrm>
+          <a:prstGeom prst="roundRect">
+            <a:avLst>
+              <a:gd name="adj" fmla="val 28000"/>
+            </a:avLst>
+          </a:prstGeom>
+          <a:solidFill>
+            <a:srgbClr val="C85600"/>
+          </a:solidFill>
+          <a:ln>
+            <a:noFill/>
+          </a:ln>
+        </p:spPr>
+        <p:style>
+          <a:lnRef idx="1">
+            <a:schemeClr val="accent1"/>
+          </a:lnRef>
+          <a:fillRef idx="3">
+            <a:schemeClr val="accent1"/>
+          </a:fillRef>
+          <a:effectRef idx="2">
+            <a:schemeClr val="accent1"/>
+          </a:effectRef>
+          <a:fontRef idx="minor">
+            <a:schemeClr val="lt1"/>
+          </a:fontRef>
+        </p:style>
+        <p:txBody>
+          <a:bodyPr rtlCol="0" anchor="ctr" wrap="none" lIns="0" rIns="0" tIns="0" bIns="0"/>
+          <a:lstStyle/>
+          <a:p>
+            <a:pPr algn="ctr"/>
+            <a:r>
+              <a:rPr sz="1000" b="1">
+                <a:solidFill>
+                  <a:srgbClr val="FFFFFF"/>
+                </a:solidFill>
+                <a:latin typeface="Consolas"/>
+              </a:rPr>
+              <a:t>DELETE</a:t>
+            </a:r>
+          </a:p>
+        </p:txBody>
+      </p:sp>
+      <p:sp>
+        <p:nvSpPr>
+          <p:cNvPr id="15" name="TextBox 14"/>
+          <p:cNvSpPr txBox="1"/>
+          <p:nvPr/>
+        </p:nvSpPr>
+        <p:spPr>
+          <a:xfrm>
+            <a:off x="1828800" y="2633472"/>
+            <a:ext cx="4937760" cy="310896"/>
+          </a:xfrm>
+          <a:prstGeom prst="rect">
+            <a:avLst/>
+          </a:prstGeom>
+          <a:noFill/>
+        </p:spPr>
+        <p:txBody>
+          <a:bodyPr wrap="square">
+            <a:spAutoFit/>
+          </a:bodyPr>
+          <a:lstStyle/>
+          <a:p>
+            <a:pPr algn="l"/>
+            <a:r>
+              <a:rPr sz="1100" b="0">
+                <a:solidFill>
+                  <a:srgbClr val="1F2A44"/>
+                </a:solidFill>
+                <a:latin typeface="Consolas"/>
+              </a:rPr>
+              <a:t>/admin/exchanges/{nombre}</a:t>
+            </a:r>
+          </a:p>
+        </p:txBody>
+      </p:sp>
+      <p:sp>
+        <p:nvSpPr>
+          <p:cNvPr id="16" name="TextBox 15"/>
+          <p:cNvSpPr txBox="1"/>
+          <p:nvPr/>
+        </p:nvSpPr>
+        <p:spPr>
+          <a:xfrm>
+            <a:off x="6858000" y="2633472"/>
+            <a:ext cx="4846320" cy="310896"/>
+          </a:xfrm>
+          <a:prstGeom prst="rect">
+            <a:avLst/>
+          </a:prstGeom>
+          <a:noFill/>
+        </p:spPr>
+        <p:txBody>
+          <a:bodyPr wrap="square">
+            <a:spAutoFit/>
+          </a:bodyPr>
+          <a:lstStyle/>
+          <a:p>
+            <a:pPr algn="l"/>
+            <a:r>
+              <a:rPr sz="1000" b="0">
+                <a:solidFill>
+                  <a:srgbClr val="606A7A"/>
+                </a:solidFill>
+                <a:latin typeface="Calibri"/>
+              </a:rPr>
+              <a:t>elimina exchange</a:t>
+            </a:r>
+          </a:p>
+        </p:txBody>
+      </p:sp>
+      <p:sp>
+        <p:nvSpPr>
+          <p:cNvPr id="17" name="Rounded Rectangle 16"/>
+          <p:cNvSpPr/>
+          <p:nvPr/>
+        </p:nvSpPr>
+        <p:spPr>
+          <a:xfrm>
+            <a:off x="548640" y="2999232"/>
+            <a:ext cx="1143000" cy="329184"/>
+          </a:xfrm>
+          <a:prstGeom prst="roundRect">
+            <a:avLst>
+              <a:gd name="adj" fmla="val 28000"/>
+            </a:avLst>
+          </a:prstGeom>
+          <a:solidFill>
+            <a:srgbClr val="1B7A43"/>
+          </a:solidFill>
+          <a:ln>
+            <a:noFill/>
+          </a:ln>
+        </p:spPr>
+        <p:style>
+          <a:lnRef idx="1">
+            <a:schemeClr val="accent1"/>
+          </a:lnRef>
+          <a:fillRef idx="3">
+            <a:schemeClr val="accent1"/>
+          </a:fillRef>
+          <a:effectRef idx="2">
+            <a:schemeClr val="accent1"/>
+          </a:effectRef>
+          <a:fontRef idx="minor">
+            <a:schemeClr val="lt1"/>
+          </a:fontRef>
+        </p:style>
+        <p:txBody>
+          <a:bodyPr rtlCol="0" anchor="ctr" wrap="none" lIns="0" rIns="0" tIns="0" bIns="0"/>
+          <a:lstStyle/>
+          <a:p>
+            <a:pPr algn="ctr"/>
+            <a:r>
+              <a:rPr sz="1000" b="1">
+                <a:solidFill>
+                  <a:srgbClr val="FFFFFF"/>
+                </a:solidFill>
+                <a:latin typeface="Consolas"/>
+              </a:rPr>
+              <a:t>POST</a:t>
+            </a:r>
+          </a:p>
+        </p:txBody>
+      </p:sp>
+      <p:sp>
+        <p:nvSpPr>
+          <p:cNvPr id="18" name="TextBox 17"/>
+          <p:cNvSpPr txBox="1"/>
+          <p:nvPr/>
+        </p:nvSpPr>
+        <p:spPr>
+          <a:xfrm>
+            <a:off x="1828800" y="3017520"/>
+            <a:ext cx="4937760" cy="310896"/>
+          </a:xfrm>
+          <a:prstGeom prst="rect">
+            <a:avLst/>
+          </a:prstGeom>
+          <a:noFill/>
+        </p:spPr>
+        <p:txBody>
+          <a:bodyPr wrap="square">
+            <a:spAutoFit/>
+          </a:bodyPr>
+          <a:lstStyle/>
+          <a:p>
+            <a:pPr algn="l"/>
+            <a:r>
+              <a:rPr sz="1100" b="0">
+                <a:solidFill>
+                  <a:srgbClr val="1F2A44"/>
+                </a:solidFill>
+                <a:latin typeface="Consolas"/>
+              </a:rPr>
+              <a:t>/admin/bindings</a:t>
+            </a:r>
+          </a:p>
+        </p:txBody>
+      </p:sp>
+      <p:sp>
+        <p:nvSpPr>
+          <p:cNvPr id="19" name="TextBox 18"/>
+          <p:cNvSpPr txBox="1"/>
+          <p:nvPr/>
+        </p:nvSpPr>
+        <p:spPr>
+          <a:xfrm>
+            <a:off x="6858000" y="3017520"/>
+            <a:ext cx="4846320" cy="310896"/>
+          </a:xfrm>
+          <a:prstGeom prst="rect">
+            <a:avLst/>
+          </a:prstGeom>
+          <a:noFill/>
+        </p:spPr>
+        <p:txBody>
+          <a:bodyPr wrap="square">
+            <a:spAutoFit/>
+          </a:bodyPr>
+          <a:lstStyle/>
+          <a:p>
+            <a:pPr algn="l"/>
+            <a:r>
+              <a:rPr sz="1000" b="0">
+                <a:solidFill>
+                  <a:srgbClr val="606A7A"/>
+                </a:solidFill>
+                <a:latin typeface="Calibri"/>
+              </a:rPr>
+              <a:t>vincula cola↔exchange (routing key)</a:t>
+            </a:r>
+          </a:p>
+        </p:txBody>
+      </p:sp>
+      <p:sp>
+        <p:nvSpPr>
+          <p:cNvPr id="20" name="Rounded Rectangle 19"/>
+          <p:cNvSpPr/>
+          <p:nvPr/>
+        </p:nvSpPr>
+        <p:spPr>
+          <a:xfrm>
+            <a:off x="548640" y="3383279"/>
+            <a:ext cx="1143000" cy="329184"/>
+          </a:xfrm>
+          <a:prstGeom prst="roundRect">
+            <a:avLst>
+              <a:gd name="adj" fmla="val 28000"/>
+            </a:avLst>
+          </a:prstGeom>
+          <a:solidFill>
+            <a:srgbClr val="C85600"/>
+          </a:solidFill>
+          <a:ln>
+            <a:noFill/>
+          </a:ln>
+        </p:spPr>
+        <p:style>
+          <a:lnRef idx="1">
+            <a:schemeClr val="accent1"/>
+          </a:lnRef>
+          <a:fillRef idx="3">
+            <a:schemeClr val="accent1"/>
+          </a:fillRef>
+          <a:effectRef idx="2">
+            <a:schemeClr val="accent1"/>
+          </a:effectRef>
+          <a:fontRef idx="minor">
+            <a:schemeClr val="lt1"/>
+          </a:fontRef>
+        </p:style>
+        <p:txBody>
+          <a:bodyPr rtlCol="0" anchor="ctr" wrap="none" lIns="0" rIns="0" tIns="0" bIns="0"/>
+          <a:lstStyle/>
+          <a:p>
+            <a:pPr algn="ctr"/>
+            <a:r>
+              <a:rPr sz="1000" b="1">
+                <a:solidFill>
+                  <a:srgbClr val="FFFFFF"/>
+                </a:solidFill>
+                <a:latin typeface="Consolas"/>
+              </a:rPr>
+              <a:t>DELETE</a:t>
+            </a:r>
+          </a:p>
+        </p:txBody>
+      </p:sp>
+      <p:sp>
+        <p:nvSpPr>
+          <p:cNvPr id="21" name="TextBox 20"/>
+          <p:cNvSpPr txBox="1"/>
+          <p:nvPr/>
+        </p:nvSpPr>
+        <p:spPr>
+          <a:xfrm>
+            <a:off x="1828800" y="3401568"/>
+            <a:ext cx="4937760" cy="310896"/>
+          </a:xfrm>
+          <a:prstGeom prst="rect">
+            <a:avLst/>
+          </a:prstGeom>
+          <a:noFill/>
+        </p:spPr>
+        <p:txBody>
+          <a:bodyPr wrap="square">
+            <a:spAutoFit/>
+          </a:bodyPr>
+          <a:lstStyle/>
+          <a:p>
+            <a:pPr algn="l"/>
+            <a:r>
+              <a:rPr sz="1100" b="0">
+                <a:solidFill>
+                  <a:srgbClr val="1F2A44"/>
+                </a:solidFill>
+                <a:latin typeface="Consolas"/>
+              </a:rPr>
+              <a:t>/admin/bindings</a:t>
+            </a:r>
+          </a:p>
+        </p:txBody>
+      </p:sp>
+      <p:sp>
+        <p:nvSpPr>
+          <p:cNvPr id="22" name="TextBox 21"/>
+          <p:cNvSpPr txBox="1"/>
+          <p:nvPr/>
+        </p:nvSpPr>
+        <p:spPr>
+          <a:xfrm>
+            <a:off x="6858000" y="3401568"/>
+            <a:ext cx="4846320" cy="310896"/>
+          </a:xfrm>
+          <a:prstGeom prst="rect">
+            <a:avLst/>
+          </a:prstGeom>
+          <a:noFill/>
+        </p:spPr>
+        <p:txBody>
+          <a:bodyPr wrap="square">
+            <a:spAutoFit/>
+          </a:bodyPr>
+          <a:lstStyle/>
+          <a:p>
+            <a:pPr algn="l"/>
+            <a:r>
+              <a:rPr sz="1000" b="0">
+                <a:solidFill>
+                  <a:srgbClr val="606A7A"/>
+                </a:solidFill>
+                <a:latin typeface="Calibri"/>
+              </a:rPr>
+              <a:t>desvincula cola↔exchange</a:t>
+            </a:r>
+          </a:p>
+        </p:txBody>
+      </p:sp>
+      <p:sp>
+        <p:nvSpPr>
+          <p:cNvPr id="23" name="Rounded Rectangle 22"/>
+          <p:cNvSpPr/>
+          <p:nvPr/>
+        </p:nvSpPr>
+        <p:spPr>
+          <a:xfrm>
+            <a:off x="548640" y="3767328"/>
+            <a:ext cx="1143000" cy="329184"/>
+          </a:xfrm>
+          <a:prstGeom prst="roundRect">
+            <a:avLst>
+              <a:gd name="adj" fmla="val 28000"/>
+            </a:avLst>
+          </a:prstGeom>
+          <a:solidFill>
+            <a:srgbClr val="1F2A44"/>
+          </a:solidFill>
+          <a:ln>
+            <a:noFill/>
+          </a:ln>
+        </p:spPr>
+        <p:style>
+          <a:lnRef idx="1">
+            <a:schemeClr val="accent1"/>
+          </a:lnRef>
+          <a:fillRef idx="3">
+            <a:schemeClr val="accent1"/>
+          </a:fillRef>
+          <a:effectRef idx="2">
+            <a:schemeClr val="accent1"/>
+          </a:effectRef>
+          <a:fontRef idx="minor">
+            <a:schemeClr val="lt1"/>
+          </a:fontRef>
+        </p:style>
+        <p:txBody>
+          <a:bodyPr rtlCol="0" anchor="ctr" wrap="none" lIns="0" rIns="0" tIns="0" bIns="0"/>
+          <a:lstStyle/>
+          <a:p>
+            <a:pPr algn="ctr"/>
+            <a:r>
+              <a:rPr sz="1000" b="1">
+                <a:solidFill>
+                  <a:srgbClr val="FFFFFF"/>
+                </a:solidFill>
+                <a:latin typeface="Consolas"/>
+              </a:rPr>
+              <a:t>GET</a:t>
+            </a:r>
+          </a:p>
+        </p:txBody>
+      </p:sp>
+      <p:sp>
+        <p:nvSpPr>
+          <p:cNvPr id="24" name="TextBox 23"/>
+          <p:cNvSpPr txBox="1"/>
+          <p:nvPr/>
+        </p:nvSpPr>
+        <p:spPr>
+          <a:xfrm>
+            <a:off x="1828800" y="3785615"/>
+            <a:ext cx="4937760" cy="310896"/>
+          </a:xfrm>
+          <a:prstGeom prst="rect">
+            <a:avLst/>
+          </a:prstGeom>
+          <a:noFill/>
+        </p:spPr>
+        <p:txBody>
+          <a:bodyPr wrap="square">
+            <a:spAutoFit/>
+          </a:bodyPr>
+          <a:lstStyle/>
+          <a:p>
+            <a:pPr algn="l"/>
+            <a:r>
+              <a:rPr sz="1100" b="0">
+                <a:solidFill>
+                  <a:srgbClr val="1F2A44"/>
+                </a:solidFill>
+                <a:latin typeface="Consolas"/>
+              </a:rPr>
+              <a:t>/admin/queues</a:t>
+            </a:r>
+          </a:p>
+        </p:txBody>
+      </p:sp>
+      <p:sp>
+        <p:nvSpPr>
+          <p:cNvPr id="25" name="TextBox 24"/>
+          <p:cNvSpPr txBox="1"/>
+          <p:nvPr/>
+        </p:nvSpPr>
+        <p:spPr>
+          <a:xfrm>
+            <a:off x="6858000" y="3785615"/>
+            <a:ext cx="4846320" cy="310896"/>
+          </a:xfrm>
+          <a:prstGeom prst="rect">
+            <a:avLst/>
+          </a:prstGeom>
+          <a:noFill/>
+        </p:spPr>
+        <p:txBody>
+          <a:bodyPr wrap="square">
+            <a:spAutoFit/>
+          </a:bodyPr>
+          <a:lstStyle/>
+          <a:p>
+            <a:pPr algn="l"/>
+            <a:r>
+              <a:rPr sz="1000" b="0">
+                <a:solidFill>
+                  <a:srgbClr val="606A7A"/>
+                </a:solidFill>
+                <a:latin typeface="Calibri"/>
+              </a:rPr>
+              <a:t>lista colas (mensajes/consumidores)</a:t>
+            </a:r>
+          </a:p>
+        </p:txBody>
+      </p:sp>
+      <p:sp>
+        <p:nvSpPr>
+          <p:cNvPr id="26" name="Rounded Rectangle 25"/>
+          <p:cNvSpPr/>
+          <p:nvPr/>
+        </p:nvSpPr>
+        <p:spPr>
+          <a:xfrm>
+            <a:off x="548640" y="4151376"/>
+            <a:ext cx="1143000" cy="329184"/>
+          </a:xfrm>
+          <a:prstGeom prst="roundRect">
+            <a:avLst>
+              <a:gd name="adj" fmla="val 28000"/>
+            </a:avLst>
+          </a:prstGeom>
+          <a:solidFill>
+            <a:srgbClr val="1F2A44"/>
+          </a:solidFill>
+          <a:ln>
+            <a:noFill/>
+          </a:ln>
+        </p:spPr>
+        <p:style>
+          <a:lnRef idx="1">
+            <a:schemeClr val="accent1"/>
+          </a:lnRef>
+          <a:fillRef idx="3">
+            <a:schemeClr val="accent1"/>
+          </a:fillRef>
+          <a:effectRef idx="2">
+            <a:schemeClr val="accent1"/>
+          </a:effectRef>
+          <a:fontRef idx="minor">
+            <a:schemeClr val="lt1"/>
+          </a:fontRef>
+        </p:style>
+        <p:txBody>
+          <a:bodyPr rtlCol="0" anchor="ctr" wrap="none" lIns="0" rIns="0" tIns="0" bIns="0"/>
+          <a:lstStyle/>
+          <a:p>
+            <a:pPr algn="ctr"/>
+            <a:r>
+              <a:rPr sz="1000" b="1">
+                <a:solidFill>
+                  <a:srgbClr val="FFFFFF"/>
+                </a:solidFill>
+                <a:latin typeface="Consolas"/>
+              </a:rPr>
+              <a:t>GET</a:t>
+            </a:r>
+          </a:p>
+        </p:txBody>
+      </p:sp>
+      <p:sp>
+        <p:nvSpPr>
+          <p:cNvPr id="27" name="TextBox 26"/>
+          <p:cNvSpPr txBox="1"/>
+          <p:nvPr/>
+        </p:nvSpPr>
+        <p:spPr>
+          <a:xfrm>
+            <a:off x="1828800" y="4169663"/>
+            <a:ext cx="4937760" cy="310896"/>
+          </a:xfrm>
+          <a:prstGeom prst="rect">
+            <a:avLst/>
+          </a:prstGeom>
+          <a:noFill/>
+        </p:spPr>
+        <p:txBody>
+          <a:bodyPr wrap="square">
+            <a:spAutoFit/>
+          </a:bodyPr>
+          <a:lstStyle/>
+          <a:p>
+            <a:pPr algn="l"/>
+            <a:r>
+              <a:rPr sz="1100" b="0">
+                <a:solidFill>
+                  <a:srgbClr val="1F2A44"/>
+                </a:solidFill>
+                <a:latin typeface="Consolas"/>
+              </a:rPr>
+              <a:t>/admin/dlq</a:t>
+            </a:r>
+          </a:p>
+        </p:txBody>
+      </p:sp>
+      <p:sp>
+        <p:nvSpPr>
+          <p:cNvPr id="28" name="TextBox 27"/>
+          <p:cNvSpPr txBox="1"/>
+          <p:nvPr/>
+        </p:nvSpPr>
+        <p:spPr>
+          <a:xfrm>
+            <a:off x="6858000" y="4169663"/>
+            <a:ext cx="4846320" cy="310896"/>
+          </a:xfrm>
+          <a:prstGeom prst="rect">
+            <a:avLst/>
+          </a:prstGeom>
+          <a:noFill/>
+        </p:spPr>
+        <p:txBody>
+          <a:bodyPr wrap="square">
+            <a:spAutoFit/>
+          </a:bodyPr>
+          <a:lstStyle/>
+          <a:p>
+            <a:pPr algn="l"/>
+            <a:r>
+              <a:rPr sz="1000" b="0">
+                <a:solidFill>
+                  <a:srgbClr val="606A7A"/>
+                </a:solidFill>
+                <a:latin typeface="Calibri"/>
+              </a:rPr>
+              <a:t>lista DLQ</a:t>
+            </a:r>
+          </a:p>
+        </p:txBody>
+      </p:sp>
+      <p:sp>
+        <p:nvSpPr>
+          <p:cNvPr id="29" name="Rounded Rectangle 28"/>
+          <p:cNvSpPr/>
+          <p:nvPr/>
+        </p:nvSpPr>
+        <p:spPr>
+          <a:xfrm>
+            <a:off x="548640" y="4535424"/>
+            <a:ext cx="1143000" cy="329184"/>
+          </a:xfrm>
+          <a:prstGeom prst="roundRect">
+            <a:avLst>
+              <a:gd name="adj" fmla="val 28000"/>
+            </a:avLst>
+          </a:prstGeom>
+          <a:solidFill>
+            <a:srgbClr val="1F2A44"/>
+          </a:solidFill>
+          <a:ln>
+            <a:noFill/>
+          </a:ln>
+        </p:spPr>
+        <p:style>
+          <a:lnRef idx="1">
+            <a:schemeClr val="accent1"/>
+          </a:lnRef>
+          <a:fillRef idx="3">
+            <a:schemeClr val="accent1"/>
+          </a:fillRef>
+          <a:effectRef idx="2">
+            <a:schemeClr val="accent1"/>
+          </a:effectRef>
+          <a:fontRef idx="minor">
+            <a:schemeClr val="lt1"/>
+          </a:fontRef>
+        </p:style>
+        <p:txBody>
+          <a:bodyPr rtlCol="0" anchor="ctr" wrap="none" lIns="0" rIns="0" tIns="0" bIns="0"/>
+          <a:lstStyle/>
+          <a:p>
+            <a:pPr algn="ctr"/>
+            <a:r>
+              <a:rPr sz="1000" b="1">
+                <a:solidFill>
+                  <a:srgbClr val="FFFFFF"/>
+                </a:solidFill>
+                <a:latin typeface="Consolas"/>
+              </a:rPr>
+              <a:t>GET</a:t>
+            </a:r>
+          </a:p>
+        </p:txBody>
+      </p:sp>
+      <p:sp>
+        <p:nvSpPr>
+          <p:cNvPr id="30" name="TextBox 29"/>
+          <p:cNvSpPr txBox="1"/>
+          <p:nvPr/>
+        </p:nvSpPr>
+        <p:spPr>
+          <a:xfrm>
+            <a:off x="1828800" y="4553712"/>
+            <a:ext cx="4937760" cy="310896"/>
+          </a:xfrm>
+          <a:prstGeom prst="rect">
+            <a:avLst/>
+          </a:prstGeom>
+          <a:noFill/>
+        </p:spPr>
+        <p:txBody>
+          <a:bodyPr wrap="square">
+            <a:spAutoFit/>
+          </a:bodyPr>
+          <a:lstStyle/>
+          <a:p>
+            <a:pPr algn="l"/>
+            <a:r>
+              <a:rPr sz="1100" b="0">
+                <a:solidFill>
+                  <a:srgbClr val="1F2A44"/>
+                </a:solidFill>
+                <a:latin typeface="Consolas"/>
+              </a:rPr>
+              <a:t>/admin/queues/{n}/messages</a:t>
+            </a:r>
+          </a:p>
+        </p:txBody>
+      </p:sp>
+      <p:sp>
+        <p:nvSpPr>
+          <p:cNvPr id="31" name="TextBox 30"/>
+          <p:cNvSpPr txBox="1"/>
+          <p:nvPr/>
+        </p:nvSpPr>
+        <p:spPr>
+          <a:xfrm>
+            <a:off x="6858000" y="4553712"/>
+            <a:ext cx="4846320" cy="310896"/>
+          </a:xfrm>
+          <a:prstGeom prst="rect">
+            <a:avLst/>
+          </a:prstGeom>
+          <a:noFill/>
+        </p:spPr>
+        <p:txBody>
+          <a:bodyPr wrap="square">
+            <a:spAutoFit/>
+          </a:bodyPr>
+          <a:lstStyle/>
+          <a:p>
+            <a:pPr algn="l"/>
+            <a:r>
+              <a:rPr sz="1000" b="0">
+                <a:solidFill>
+                  <a:srgbClr val="606A7A"/>
+                </a:solidFill>
+                <a:latin typeface="Calibri"/>
+              </a:rPr>
+              <a:t>espiar mensajes</a:t>
+            </a:r>
+          </a:p>
+        </p:txBody>
+      </p:sp>
+      <p:sp>
+        <p:nvSpPr>
+          <p:cNvPr id="32" name="Rounded Rectangle 31"/>
+          <p:cNvSpPr/>
+          <p:nvPr/>
+        </p:nvSpPr>
+        <p:spPr>
+          <a:xfrm>
+            <a:off x="548640" y="4919472"/>
+            <a:ext cx="1143000" cy="329184"/>
+          </a:xfrm>
+          <a:prstGeom prst="roundRect">
+            <a:avLst>
+              <a:gd name="adj" fmla="val 28000"/>
+            </a:avLst>
+          </a:prstGeom>
+          <a:solidFill>
+            <a:srgbClr val="C85600"/>
+          </a:solidFill>
+          <a:ln>
+            <a:noFill/>
+          </a:ln>
+        </p:spPr>
+        <p:style>
+          <a:lnRef idx="1">
+            <a:schemeClr val="accent1"/>
+          </a:lnRef>
+          <a:fillRef idx="3">
+            <a:schemeClr val="accent1"/>
+          </a:fillRef>
+          <a:effectRef idx="2">
+            <a:schemeClr val="accent1"/>
+          </a:effectRef>
+          <a:fontRef idx="minor">
+            <a:schemeClr val="lt1"/>
+          </a:fontRef>
+        </p:style>
+        <p:txBody>
+          <a:bodyPr rtlCol="0" anchor="ctr" wrap="none" lIns="0" rIns="0" tIns="0" bIns="0"/>
+          <a:lstStyle/>
+          <a:p>
+            <a:pPr algn="ctr"/>
+            <a:r>
+              <a:rPr sz="1000" b="1">
+                <a:solidFill>
+                  <a:srgbClr val="FFFFFF"/>
+                </a:solidFill>
+                <a:latin typeface="Consolas"/>
+              </a:rPr>
+              <a:t>DELETE</a:t>
+            </a:r>
+          </a:p>
+        </p:txBody>
+      </p:sp>
+      <p:sp>
+        <p:nvSpPr>
+          <p:cNvPr id="33" name="TextBox 32"/>
+          <p:cNvSpPr txBox="1"/>
+          <p:nvPr/>
+        </p:nvSpPr>
+        <p:spPr>
+          <a:xfrm>
+            <a:off x="1828800" y="4937759"/>
+            <a:ext cx="4937760" cy="310896"/>
+          </a:xfrm>
+          <a:prstGeom prst="rect">
+            <a:avLst/>
+          </a:prstGeom>
+          <a:noFill/>
+        </p:spPr>
+        <p:txBody>
+          <a:bodyPr wrap="square">
+            <a:spAutoFit/>
+          </a:bodyPr>
+          <a:lstStyle/>
+          <a:p>
+            <a:pPr algn="l"/>
+            <a:r>
+              <a:rPr sz="1100" b="0">
+                <a:solidFill>
+                  <a:srgbClr val="1F2A44"/>
+                </a:solidFill>
+                <a:latin typeface="Consolas"/>
+              </a:rPr>
+              <a:t>/admin/queues/{n}/messages</a:t>
+            </a:r>
+          </a:p>
+        </p:txBody>
+      </p:sp>
+      <p:sp>
+        <p:nvSpPr>
+          <p:cNvPr id="34" name="TextBox 33"/>
+          <p:cNvSpPr txBox="1"/>
+          <p:nvPr/>
+        </p:nvSpPr>
+        <p:spPr>
+          <a:xfrm>
+            <a:off x="6858000" y="4937759"/>
+            <a:ext cx="4846320" cy="310896"/>
+          </a:xfrm>
+          <a:prstGeom prst="rect">
+            <a:avLst/>
+          </a:prstGeom>
+          <a:noFill/>
+        </p:spPr>
+        <p:txBody>
+          <a:bodyPr wrap="square">
+            <a:spAutoFit/>
+          </a:bodyPr>
+          <a:lstStyle/>
+          <a:p>
+            <a:pPr algn="l"/>
+            <a:r>
+              <a:rPr sz="1000" b="0">
+                <a:solidFill>
+                  <a:srgbClr val="606A7A"/>
+                </a:solidFill>
+                <a:latin typeface="Calibri"/>
+              </a:rPr>
+              <a:t>purgar cola</a:t>
+            </a:r>
+          </a:p>
+        </p:txBody>
+      </p:sp>
+      <p:sp>
+        <p:nvSpPr>
+          <p:cNvPr id="35" name="Rounded Rectangle 34"/>
+          <p:cNvSpPr/>
+          <p:nvPr/>
+        </p:nvSpPr>
+        <p:spPr>
+          <a:xfrm>
+            <a:off x="548640" y="5303520"/>
+            <a:ext cx="1143000" cy="329184"/>
+          </a:xfrm>
+          <a:prstGeom prst="roundRect">
+            <a:avLst>
+              <a:gd name="adj" fmla="val 28000"/>
+            </a:avLst>
+          </a:prstGeom>
+          <a:solidFill>
+            <a:srgbClr val="0B3D91"/>
+          </a:solidFill>
+          <a:ln>
+            <a:noFill/>
+          </a:ln>
+        </p:spPr>
+        <p:style>
+          <a:lnRef idx="1">
+            <a:schemeClr val="accent1"/>
+          </a:lnRef>
+          <a:fillRef idx="3">
+            <a:schemeClr val="accent1"/>
+          </a:fillRef>
+          <a:effectRef idx="2">
+            <a:schemeClr val="accent1"/>
+          </a:effectRef>
+          <a:fontRef idx="minor">
+            <a:schemeClr val="lt1"/>
+          </a:fontRef>
+        </p:style>
+        <p:txBody>
+          <a:bodyPr rtlCol="0" anchor="ctr" wrap="none" lIns="0" rIns="0" tIns="0" bIns="0"/>
+          <a:lstStyle/>
+          <a:p>
+            <a:pPr algn="ctr"/>
+            <a:r>
+              <a:rPr sz="1000" b="1">
+                <a:solidFill>
+                  <a:srgbClr val="FFFFFF"/>
+                </a:solidFill>
+                <a:latin typeface="Consolas"/>
+              </a:rPr>
+              <a:t>POST</a:t>
+            </a:r>
+          </a:p>
+        </p:txBody>
+      </p:sp>
+      <p:sp>
+        <p:nvSpPr>
+          <p:cNvPr id="36" name="TextBox 35"/>
+          <p:cNvSpPr txBox="1"/>
+          <p:nvPr/>
+        </p:nvSpPr>
+        <p:spPr>
+          <a:xfrm>
+            <a:off x="1828800" y="5321807"/>
+            <a:ext cx="4937760" cy="310896"/>
+          </a:xfrm>
+          <a:prstGeom prst="rect">
+            <a:avLst/>
+          </a:prstGeom>
+          <a:noFill/>
+        </p:spPr>
+        <p:txBody>
+          <a:bodyPr wrap="square">
+            <a:spAutoFit/>
+          </a:bodyPr>
+          <a:lstStyle/>
+          <a:p>
+            <a:pPr algn="l"/>
+            <a:r>
+              <a:rPr sz="1100" b="0">
+                <a:solidFill>
+                  <a:srgbClr val="1F2A44"/>
+                </a:solidFill>
+                <a:latin typeface="Consolas"/>
+              </a:rPr>
+              <a:t>/admin/eventos</a:t>
+            </a:r>
+          </a:p>
+        </p:txBody>
+      </p:sp>
+      <p:sp>
+        <p:nvSpPr>
+          <p:cNvPr id="37" name="TextBox 36"/>
+          <p:cNvSpPr txBox="1"/>
+          <p:nvPr/>
+        </p:nvSpPr>
+        <p:spPr>
+          <a:xfrm>
+            <a:off x="6858000" y="5321807"/>
+            <a:ext cx="4846320" cy="310896"/>
+          </a:xfrm>
+          <a:prstGeom prst="rect">
+            <a:avLst/>
+          </a:prstGeom>
+          <a:noFill/>
+        </p:spPr>
+        <p:txBody>
+          <a:bodyPr wrap="square">
+            <a:spAutoFit/>
+          </a:bodyPr>
+          <a:lstStyle/>
+          <a:p>
+            <a:pPr algn="l"/>
+            <a:r>
+              <a:rPr sz="1000" b="0">
+                <a:solidFill>
+                  <a:srgbClr val="606A7A"/>
+                </a:solidFill>
+                <a:latin typeface="Calibri"/>
+              </a:rPr>
+              <a:t>publicar evento de prueba</a:t>
+            </a:r>
+          </a:p>
+        </p:txBody>
+      </p:sp>
+      <p:sp>
+        <p:nvSpPr>
+          <p:cNvPr id="38" name="TextBox 37"/>
+          <p:cNvSpPr txBox="1"/>
+          <p:nvPr/>
+        </p:nvSpPr>
+        <p:spPr>
+          <a:xfrm>
+            <a:off x="548640" y="5760720"/>
+            <a:ext cx="11064240" cy="365760"/>
+          </a:xfrm>
+          <a:prstGeom prst="rect">
+            <a:avLst/>
+          </a:prstGeom>
+          <a:noFill/>
+        </p:spPr>
+        <p:txBody>
+          <a:bodyPr wrap="square">
+            <a:spAutoFit/>
+          </a:bodyPr>
+          <a:lstStyle/>
+          <a:p>
+            <a:pPr algn="l"/>
+            <a:r>
+              <a:rPr sz="1100" b="0">
+                <a:solidFill>
+                  <a:srgbClr val="1F2A44"/>
+                </a:solidFill>
+                <a:latin typeface="Calibri"/>
+              </a:rPr>
+              <a:t>Validacion: nombre vacio/corto/caracteres invalidos o type distinto de direct|topic|fanout|headers → HTTP 400 con detalle por campo.</a:t>
+            </a:r>
+          </a:p>
+        </p:txBody>
+      </p:sp>
+    </p:spTree>
+  </p:cSld>
+  <p:clrMapOvr>
+    <a:masterClrMapping/>
+  </p:clrMapOvr>
+</p:sld>
+</file>
+
+<file path=ppt/slides/slide12.xml><?xml version="1.0" encoding="utf-8"?>
+<p:sld xmlns:a="http://schemas.openxmlformats.org/drawingml/2006/main" xmlns:p="http://schemas.openxmlformats.org/presentationml/2006/main" xmlns:r="http://schemas.openxmlformats.org/officeDocument/2006/relationships">
+  <p:cSld>
+    <p:spTree>
+      <p:nvGrpSpPr>
+        <p:cNvPr id="1" name=""/>
+        <p:cNvGrpSpPr/>
+        <p:nvPr/>
+      </p:nvGrpSpPr>
+      <p:grpSpPr/>
+      <p:sp>
+        <p:nvSpPr>
+          <p:cNvPr id="2" name="Rectangle 1"/>
+          <p:cNvSpPr/>
+          <p:nvPr/>
+        </p:nvSpPr>
+        <p:spPr>
+          <a:xfrm>
+            <a:off x="0" y="0"/>
+            <a:ext cx="12191695" cy="868680"/>
+          </a:xfrm>
+          <a:prstGeom prst="rect">
+            <a:avLst/>
+          </a:prstGeom>
+          <a:solidFill>
+            <a:srgbClr val="1F2A44"/>
+          </a:solidFill>
+          <a:ln>
+            <a:noFill/>
+          </a:ln>
+        </p:spPr>
+        <p:style>
+          <a:lnRef idx="1">
+            <a:schemeClr val="accent1"/>
+          </a:lnRef>
+          <a:fillRef idx="3">
+            <a:schemeClr val="accent1"/>
+          </a:fillRef>
+          <a:effectRef idx="2">
+            <a:schemeClr val="accent1"/>
+          </a:effectRef>
+          <a:fontRef idx="minor">
+            <a:schemeClr val="lt1"/>
+          </a:fontRef>
+        </p:style>
+        <p:txBody>
+          <a:bodyPr rtlCol="0" anchor="ctr"/>
+          <a:lstStyle/>
+          <a:p>
+            <a:pPr algn="ctr"/>
+          </a:p>
+        </p:txBody>
+      </p:sp>
+      <p:sp>
+        <p:nvSpPr>
+          <p:cNvPr id="3" name="TextBox 2"/>
+          <p:cNvSpPr txBox="1"/>
+          <p:nvPr/>
+        </p:nvSpPr>
+        <p:spPr>
+          <a:xfrm>
+            <a:off x="502920" y="109728"/>
+            <a:ext cx="10515600" cy="548640"/>
+          </a:xfrm>
+          <a:prstGeom prst="rect">
+            <a:avLst/>
+          </a:prstGeom>
+          <a:noFill/>
+        </p:spPr>
+        <p:txBody>
+          <a:bodyPr wrap="square">
+            <a:spAutoFit/>
+          </a:bodyPr>
+          <a:lstStyle/>
+          <a:p>
+            <a:pPr algn="l"/>
+            <a:r>
+              <a:rPr sz="2600" b="1">
+                <a:solidFill>
+                  <a:srgbClr val="FFFFFF"/>
+                </a:solidFill>
+                <a:latin typeface="Calibri"/>
+              </a:rPr>
+              <a:t>Indicadores EP3 — cumplimiento (100%)</a:t>
+            </a:r>
+          </a:p>
+        </p:txBody>
+      </p:sp>
+      <p:sp>
+        <p:nvSpPr>
+          <p:cNvPr id="4" name="TextBox 3"/>
+          <p:cNvSpPr txBox="1"/>
+          <p:nvPr/>
+        </p:nvSpPr>
+        <p:spPr>
+          <a:xfrm>
+            <a:off x="731520" y="1280160"/>
+            <a:ext cx="640080" cy="457200"/>
+          </a:xfrm>
+          <a:prstGeom prst="rect">
+            <a:avLst/>
+          </a:prstGeom>
+          <a:noFill/>
+        </p:spPr>
+        <p:txBody>
+          <a:bodyPr wrap="square">
+            <a:spAutoFit/>
+          </a:bodyPr>
+          <a:lstStyle/>
+          <a:p>
+            <a:pPr algn="ctr"/>
+            <a:r>
+              <a:rPr sz="1500" b="1">
+                <a:solidFill>
+                  <a:srgbClr val="0B3D91"/>
+                </a:solidFill>
+                <a:latin typeface="Calibri"/>
+              </a:rPr>
+              <a:t>1</a:t>
+            </a:r>
+          </a:p>
+        </p:txBody>
+      </p:sp>
+      <p:sp>
+        <p:nvSpPr>
+          <p:cNvPr id="5" name="TextBox 4"/>
+          <p:cNvSpPr txBox="1"/>
+          <p:nvPr/>
+        </p:nvSpPr>
+        <p:spPr>
+          <a:xfrm>
+            <a:off x="1554480" y="1280160"/>
+            <a:ext cx="7863840" cy="457200"/>
+          </a:xfrm>
+          <a:prstGeom prst="rect">
+            <a:avLst/>
+          </a:prstGeom>
+          <a:noFill/>
+        </p:spPr>
+        <p:txBody>
+          <a:bodyPr wrap="square">
+            <a:spAutoFit/>
+          </a:bodyPr>
+          <a:lstStyle/>
+          <a:p>
+            <a:pPr algn="l"/>
+            <a:r>
+              <a:rPr sz="1300" b="0">
+                <a:solidFill>
+                  <a:srgbClr val="1F2A44"/>
+                </a:solidFill>
+                <a:latin typeface="Calibri"/>
+              </a:rPr>
+              <a:t>Nombres centralizados (clase @Configuration)</a:t>
+            </a:r>
+          </a:p>
+        </p:txBody>
+      </p:sp>
+      <p:sp>
+        <p:nvSpPr>
+          <p:cNvPr id="6" name="Rounded Rectangle 5"/>
+          <p:cNvSpPr/>
+          <p:nvPr/>
+        </p:nvSpPr>
+        <p:spPr>
+          <a:xfrm>
+            <a:off x="9601200" y="1316736"/>
+            <a:ext cx="1280160" cy="384048"/>
+          </a:xfrm>
+          <a:prstGeom prst="roundRect">
+            <a:avLst>
+              <a:gd name="adj" fmla="val 28000"/>
+            </a:avLst>
+          </a:prstGeom>
+          <a:solidFill>
+            <a:srgbClr val="1B7A43"/>
+          </a:solidFill>
+          <a:ln>
+            <a:noFill/>
+          </a:ln>
+        </p:spPr>
+        <p:style>
+          <a:lnRef idx="1">
+            <a:schemeClr val="accent1"/>
+          </a:lnRef>
+          <a:fillRef idx="3">
+            <a:schemeClr val="accent1"/>
+          </a:fillRef>
+          <a:effectRef idx="2">
+            <a:schemeClr val="accent1"/>
+          </a:effectRef>
+          <a:fontRef idx="minor">
+            <a:schemeClr val="lt1"/>
+          </a:fontRef>
+        </p:style>
+        <p:txBody>
+          <a:bodyPr rtlCol="0" anchor="ctr" wrap="none" lIns="0" rIns="0" tIns="0" bIns="0"/>
+          <a:lstStyle/>
+          <a:p>
+            <a:pPr algn="ctr"/>
+            <a:r>
+              <a:rPr sz="1200" b="1">
+                <a:solidFill>
+                  <a:srgbClr val="FFFFFF"/>
+                </a:solidFill>
+                <a:latin typeface="Consolas"/>
+              </a:rPr>
+              <a:t>12%</a:t>
+            </a:r>
+          </a:p>
+        </p:txBody>
+      </p:sp>
+      <p:sp>
+        <p:nvSpPr>
+          <p:cNvPr id="7" name="TextBox 6"/>
+          <p:cNvSpPr txBox="1"/>
+          <p:nvPr/>
+        </p:nvSpPr>
+        <p:spPr>
+          <a:xfrm>
+            <a:off x="731520" y="1773936"/>
+            <a:ext cx="640080" cy="457200"/>
+          </a:xfrm>
+          <a:prstGeom prst="rect">
+            <a:avLst/>
+          </a:prstGeom>
+          <a:noFill/>
+        </p:spPr>
+        <p:txBody>
+          <a:bodyPr wrap="square">
+            <a:spAutoFit/>
+          </a:bodyPr>
+          <a:lstStyle/>
+          <a:p>
+            <a:pPr algn="ctr"/>
+            <a:r>
+              <a:rPr sz="1500" b="1">
+                <a:solidFill>
+                  <a:srgbClr val="0B3D91"/>
+                </a:solidFill>
+                <a:latin typeface="Calibri"/>
+              </a:rPr>
+              <a:t>2</a:t>
+            </a:r>
+          </a:p>
+        </p:txBody>
+      </p:sp>
+      <p:sp>
+        <p:nvSpPr>
+          <p:cNvPr id="8" name="TextBox 7"/>
+          <p:cNvSpPr txBox="1"/>
+          <p:nvPr/>
+        </p:nvSpPr>
+        <p:spPr>
+          <a:xfrm>
+            <a:off x="1554480" y="1773936"/>
+            <a:ext cx="7863840" cy="457200"/>
+          </a:xfrm>
+          <a:prstGeom prst="rect">
+            <a:avLst/>
+          </a:prstGeom>
+          <a:noFill/>
+        </p:spPr>
+        <p:txBody>
+          <a:bodyPr wrap="square">
+            <a:spAutoFit/>
+          </a:bodyPr>
+          <a:lstStyle/>
+          <a:p>
+            <a:pPr algn="l"/>
+            <a:r>
+              <a:rPr sz="1300" b="0">
+                <a:solidFill>
+                  <a:srgbClr val="1F2A44"/>
+                </a:solidFill>
+                <a:latin typeface="Calibri"/>
+              </a:rPr>
+              <a:t>Beans Queue/Exchange/Binding por caso de uso</a:t>
+            </a:r>
+          </a:p>
+        </p:txBody>
+      </p:sp>
+      <p:sp>
+        <p:nvSpPr>
+          <p:cNvPr id="9" name="Rounded Rectangle 8"/>
+          <p:cNvSpPr/>
+          <p:nvPr/>
+        </p:nvSpPr>
+        <p:spPr>
+          <a:xfrm>
+            <a:off x="9601200" y="1810512"/>
+            <a:ext cx="1280160" cy="384048"/>
+          </a:xfrm>
+          <a:prstGeom prst="roundRect">
+            <a:avLst>
+              <a:gd name="adj" fmla="val 28000"/>
+            </a:avLst>
+          </a:prstGeom>
+          <a:solidFill>
+            <a:srgbClr val="1B7A43"/>
+          </a:solidFill>
+          <a:ln>
+            <a:noFill/>
+          </a:ln>
+        </p:spPr>
+        <p:style>
+          <a:lnRef idx="1">
+            <a:schemeClr val="accent1"/>
+          </a:lnRef>
+          <a:fillRef idx="3">
+            <a:schemeClr val="accent1"/>
+          </a:fillRef>
+          <a:effectRef idx="2">
+            <a:schemeClr val="accent1"/>
+          </a:effectRef>
+          <a:fontRef idx="minor">
+            <a:schemeClr val="lt1"/>
+          </a:fontRef>
+        </p:style>
+        <p:txBody>
+          <a:bodyPr rtlCol="0" anchor="ctr" wrap="none" lIns="0" rIns="0" tIns="0" bIns="0"/>
+          <a:lstStyle/>
+          <a:p>
+            <a:pPr algn="ctr"/>
+            <a:r>
+              <a:rPr sz="1200" b="1">
+                <a:solidFill>
+                  <a:srgbClr val="FFFFFF"/>
+                </a:solidFill>
+                <a:latin typeface="Consolas"/>
+              </a:rPr>
+              <a:t>13%</a:t>
+            </a:r>
+          </a:p>
+        </p:txBody>
+      </p:sp>
+      <p:sp>
+        <p:nvSpPr>
+          <p:cNvPr id="10" name="TextBox 9"/>
+          <p:cNvSpPr txBox="1"/>
+          <p:nvPr/>
+        </p:nvSpPr>
+        <p:spPr>
+          <a:xfrm>
+            <a:off x="731520" y="2267712"/>
+            <a:ext cx="640080" cy="457200"/>
+          </a:xfrm>
+          <a:prstGeom prst="rect">
+            <a:avLst/>
+          </a:prstGeom>
+          <a:noFill/>
+        </p:spPr>
+        <p:txBody>
+          <a:bodyPr wrap="square">
+            <a:spAutoFit/>
+          </a:bodyPr>
+          <a:lstStyle/>
+          <a:p>
+            <a:pPr algn="ctr"/>
+            <a:r>
+              <a:rPr sz="1500" b="1">
+                <a:solidFill>
+                  <a:srgbClr val="0B3D91"/>
+                </a:solidFill>
+                <a:latin typeface="Calibri"/>
+              </a:rPr>
+              <a:t>3</a:t>
+            </a:r>
+          </a:p>
+        </p:txBody>
+      </p:sp>
+      <p:sp>
+        <p:nvSpPr>
+          <p:cNvPr id="11" name="TextBox 10"/>
+          <p:cNvSpPr txBox="1"/>
+          <p:nvPr/>
+        </p:nvSpPr>
+        <p:spPr>
+          <a:xfrm>
+            <a:off x="1554480" y="2267712"/>
+            <a:ext cx="7863840" cy="457200"/>
+          </a:xfrm>
+          <a:prstGeom prst="rect">
+            <a:avLst/>
+          </a:prstGeom>
+          <a:noFill/>
+        </p:spPr>
+        <p:txBody>
+          <a:bodyPr wrap="square">
+            <a:spAutoFit/>
+          </a:bodyPr>
+          <a:lstStyle/>
+          <a:p>
+            <a:pPr algn="l"/>
+            <a:r>
+              <a:rPr sz="1300" b="0">
+                <a:solidFill>
+                  <a:srgbClr val="1F2A44"/>
+                </a:solidFill>
+                <a:latin typeface="Calibri"/>
+              </a:rPr>
+              <a:t>Separacion negocio / config de mensajeria</a:t>
+            </a:r>
+          </a:p>
+        </p:txBody>
+      </p:sp>
+      <p:sp>
+        <p:nvSpPr>
+          <p:cNvPr id="12" name="Rounded Rectangle 11"/>
+          <p:cNvSpPr/>
+          <p:nvPr/>
+        </p:nvSpPr>
+        <p:spPr>
+          <a:xfrm>
+            <a:off x="9601200" y="2304288"/>
+            <a:ext cx="1280160" cy="384048"/>
+          </a:xfrm>
+          <a:prstGeom prst="roundRect">
+            <a:avLst>
+              <a:gd name="adj" fmla="val 28000"/>
+            </a:avLst>
+          </a:prstGeom>
+          <a:solidFill>
+            <a:srgbClr val="1B7A43"/>
+          </a:solidFill>
+          <a:ln>
+            <a:noFill/>
+          </a:ln>
+        </p:spPr>
+        <p:style>
+          <a:lnRef idx="1">
+            <a:schemeClr val="accent1"/>
+          </a:lnRef>
+          <a:fillRef idx="3">
+            <a:schemeClr val="accent1"/>
+          </a:fillRef>
+          <a:effectRef idx="2">
+            <a:schemeClr val="accent1"/>
+          </a:effectRef>
+          <a:fontRef idx="minor">
+            <a:schemeClr val="lt1"/>
+          </a:fontRef>
+        </p:style>
+        <p:txBody>
+          <a:bodyPr rtlCol="0" anchor="ctr" wrap="none" lIns="0" rIns="0" tIns="0" bIns="0"/>
+          <a:lstStyle/>
+          <a:p>
+            <a:pPr algn="ctr"/>
+            <a:r>
+              <a:rPr sz="1200" b="1">
+                <a:solidFill>
+                  <a:srgbClr val="FFFFFF"/>
+                </a:solidFill>
+                <a:latin typeface="Consolas"/>
+              </a:rPr>
+              <a:t>10%</a:t>
+            </a:r>
+          </a:p>
+        </p:txBody>
+      </p:sp>
+      <p:sp>
+        <p:nvSpPr>
+          <p:cNvPr id="13" name="TextBox 12"/>
+          <p:cNvSpPr txBox="1"/>
+          <p:nvPr/>
+        </p:nvSpPr>
+        <p:spPr>
+          <a:xfrm>
+            <a:off x="731520" y="2761488"/>
+            <a:ext cx="640080" cy="457200"/>
+          </a:xfrm>
+          <a:prstGeom prst="rect">
+            <a:avLst/>
+          </a:prstGeom>
+          <a:noFill/>
+        </p:spPr>
+        <p:txBody>
+          <a:bodyPr wrap="square">
+            <a:spAutoFit/>
+          </a:bodyPr>
+          <a:lstStyle/>
+          <a:p>
+            <a:pPr algn="ctr"/>
+            <a:r>
+              <a:rPr sz="1500" b="1">
+                <a:solidFill>
+                  <a:srgbClr val="0B3D91"/>
+                </a:solidFill>
+                <a:latin typeface="Calibri"/>
+              </a:rPr>
+              <a:t>4</a:t>
+            </a:r>
+          </a:p>
+        </p:txBody>
+      </p:sp>
+      <p:sp>
+        <p:nvSpPr>
+          <p:cNvPr id="14" name="TextBox 13"/>
+          <p:cNvSpPr txBox="1"/>
+          <p:nvPr/>
+        </p:nvSpPr>
+        <p:spPr>
+          <a:xfrm>
+            <a:off x="1554480" y="2761488"/>
+            <a:ext cx="7863840" cy="457200"/>
+          </a:xfrm>
+          <a:prstGeom prst="rect">
+            <a:avLst/>
+          </a:prstGeom>
+          <a:noFill/>
+        </p:spPr>
+        <p:txBody>
+          <a:bodyPr wrap="square">
+            <a:spAutoFit/>
+          </a:bodyPr>
+          <a:lstStyle/>
+          <a:p>
+            <a:pPr algn="l"/>
+            <a:r>
+              <a:rPr sz="1300" b="0">
+                <a:solidFill>
+                  <a:srgbClr val="1F2A44"/>
+                </a:solidFill>
+                <a:latin typeface="Calibri"/>
+              </a:rPr>
+              <a:t>@RabbitListener agrupados por dominio</a:t>
+            </a:r>
+          </a:p>
+        </p:txBody>
+      </p:sp>
+      <p:sp>
+        <p:nvSpPr>
+          <p:cNvPr id="15" name="Rounded Rectangle 14"/>
+          <p:cNvSpPr/>
+          <p:nvPr/>
+        </p:nvSpPr>
+        <p:spPr>
+          <a:xfrm>
+            <a:off x="9601200" y="2798064"/>
+            <a:ext cx="1280160" cy="384048"/>
+          </a:xfrm>
+          <a:prstGeom prst="roundRect">
+            <a:avLst>
+              <a:gd name="adj" fmla="val 28000"/>
+            </a:avLst>
+          </a:prstGeom>
+          <a:solidFill>
+            <a:srgbClr val="1B7A43"/>
+          </a:solidFill>
+          <a:ln>
+            <a:noFill/>
+          </a:ln>
+        </p:spPr>
+        <p:style>
+          <a:lnRef idx="1">
+            <a:schemeClr val="accent1"/>
+          </a:lnRef>
+          <a:fillRef idx="3">
+            <a:schemeClr val="accent1"/>
+          </a:fillRef>
+          <a:effectRef idx="2">
+            <a:schemeClr val="accent1"/>
+          </a:effectRef>
+          <a:fontRef idx="minor">
+            <a:schemeClr val="lt1"/>
+          </a:fontRef>
+        </p:style>
+        <p:txBody>
+          <a:bodyPr rtlCol="0" anchor="ctr" wrap="none" lIns="0" rIns="0" tIns="0" bIns="0"/>
+          <a:lstStyle/>
+          <a:p>
+            <a:pPr algn="ctr"/>
+            <a:r>
+              <a:rPr sz="1200" b="1">
+                <a:solidFill>
+                  <a:srgbClr val="FFFFFF"/>
+                </a:solidFill>
+                <a:latin typeface="Consolas"/>
+              </a:rPr>
+              <a:t>15%</a:t>
+            </a:r>
+          </a:p>
+        </p:txBody>
+      </p:sp>
+      <p:sp>
+        <p:nvSpPr>
+          <p:cNvPr id="16" name="TextBox 15"/>
+          <p:cNvSpPr txBox="1"/>
+          <p:nvPr/>
+        </p:nvSpPr>
+        <p:spPr>
+          <a:xfrm>
+            <a:off x="731520" y="3255264"/>
+            <a:ext cx="640080" cy="457200"/>
+          </a:xfrm>
+          <a:prstGeom prst="rect">
+            <a:avLst/>
+          </a:prstGeom>
+          <a:noFill/>
+        </p:spPr>
+        <p:txBody>
+          <a:bodyPr wrap="square">
+            <a:spAutoFit/>
+          </a:bodyPr>
+          <a:lstStyle/>
+          <a:p>
+            <a:pPr algn="ctr"/>
+            <a:r>
+              <a:rPr sz="1500" b="1">
+                <a:solidFill>
+                  <a:srgbClr val="0B3D91"/>
+                </a:solidFill>
+                <a:latin typeface="Calibri"/>
+              </a:rPr>
+              <a:t>5</a:t>
+            </a:r>
+          </a:p>
+        </p:txBody>
+      </p:sp>
+      <p:sp>
+        <p:nvSpPr>
+          <p:cNvPr id="17" name="TextBox 16"/>
+          <p:cNvSpPr txBox="1"/>
+          <p:nvPr/>
+        </p:nvSpPr>
+        <p:spPr>
+          <a:xfrm>
+            <a:off x="1554480" y="3255264"/>
+            <a:ext cx="7863840" cy="457200"/>
+          </a:xfrm>
+          <a:prstGeom prst="rect">
+            <a:avLst/>
+          </a:prstGeom>
+          <a:noFill/>
+        </p:spPr>
+        <p:txBody>
+          <a:bodyPr wrap="square">
+            <a:spAutoFit/>
+          </a:bodyPr>
+          <a:lstStyle/>
+          <a:p>
+            <a:pPr algn="l"/>
+            <a:r>
+              <a:rPr sz="1300" b="0">
+                <a:solidFill>
+                  <a:srgbClr val="1F2A44"/>
+                </a:solidFill>
+                <a:latin typeface="Calibri"/>
+              </a:rPr>
+              <a:t>ACK manual + NACK + DLQ</a:t>
+            </a:r>
+          </a:p>
+        </p:txBody>
+      </p:sp>
+      <p:sp>
+        <p:nvSpPr>
+          <p:cNvPr id="18" name="Rounded Rectangle 17"/>
+          <p:cNvSpPr/>
+          <p:nvPr/>
+        </p:nvSpPr>
+        <p:spPr>
+          <a:xfrm>
+            <a:off x="9601200" y="3291840"/>
+            <a:ext cx="1280160" cy="384048"/>
+          </a:xfrm>
+          <a:prstGeom prst="roundRect">
+            <a:avLst>
+              <a:gd name="adj" fmla="val 28000"/>
+            </a:avLst>
+          </a:prstGeom>
+          <a:solidFill>
+            <a:srgbClr val="1B7A43"/>
+          </a:solidFill>
+          <a:ln>
+            <a:noFill/>
+          </a:ln>
+        </p:spPr>
+        <p:style>
+          <a:lnRef idx="1">
+            <a:schemeClr val="accent1"/>
+          </a:lnRef>
+          <a:fillRef idx="3">
+            <a:schemeClr val="accent1"/>
+          </a:fillRef>
+          <a:effectRef idx="2">
+            <a:schemeClr val="accent1"/>
+          </a:effectRef>
+          <a:fontRef idx="minor">
+            <a:schemeClr val="lt1"/>
+          </a:fontRef>
+        </p:style>
+        <p:txBody>
+          <a:bodyPr rtlCol="0" anchor="ctr" wrap="none" lIns="0" rIns="0" tIns="0" bIns="0"/>
+          <a:lstStyle/>
+          <a:p>
+            <a:pPr algn="ctr"/>
+            <a:r>
+              <a:rPr sz="1200" b="1">
+                <a:solidFill>
+                  <a:srgbClr val="FFFFFF"/>
+                </a:solidFill>
+                <a:latin typeface="Consolas"/>
+              </a:rPr>
+              <a:t>20%</a:t>
+            </a:r>
+          </a:p>
+        </p:txBody>
+      </p:sp>
+      <p:sp>
+        <p:nvSpPr>
+          <p:cNvPr id="19" name="TextBox 18"/>
+          <p:cNvSpPr txBox="1"/>
+          <p:nvPr/>
+        </p:nvSpPr>
+        <p:spPr>
+          <a:xfrm>
+            <a:off x="731520" y="3749039"/>
+            <a:ext cx="640080" cy="457200"/>
+          </a:xfrm>
+          <a:prstGeom prst="rect">
+            <a:avLst/>
+          </a:prstGeom>
+          <a:noFill/>
+        </p:spPr>
+        <p:txBody>
+          <a:bodyPr wrap="square">
+            <a:spAutoFit/>
+          </a:bodyPr>
+          <a:lstStyle/>
+          <a:p>
+            <a:pPr algn="ctr"/>
+            <a:r>
+              <a:rPr sz="1500" b="1">
+                <a:solidFill>
+                  <a:srgbClr val="0B3D91"/>
+                </a:solidFill>
+                <a:latin typeface="Calibri"/>
+              </a:rPr>
+              <a:t>6</a:t>
+            </a:r>
+          </a:p>
+        </p:txBody>
+      </p:sp>
+      <p:sp>
+        <p:nvSpPr>
+          <p:cNvPr id="20" name="TextBox 19"/>
+          <p:cNvSpPr txBox="1"/>
+          <p:nvPr/>
+        </p:nvSpPr>
+        <p:spPr>
+          <a:xfrm>
+            <a:off x="1554480" y="3749039"/>
+            <a:ext cx="7863840" cy="457200"/>
+          </a:xfrm>
+          <a:prstGeom prst="rect">
+            <a:avLst/>
+          </a:prstGeom>
+          <a:noFill/>
+        </p:spPr>
+        <p:txBody>
+          <a:bodyPr wrap="square">
+            <a:spAutoFit/>
+          </a:bodyPr>
+          <a:lstStyle/>
+          <a:p>
+            <a:pPr algn="l"/>
+            <a:r>
+              <a:rPr sz="1300" b="0">
+                <a:solidFill>
+                  <a:srgbClr val="1F2A44"/>
+                </a:solidFill>
+                <a:latin typeface="Calibri"/>
+              </a:rPr>
+              <a:t>API REST admin (POST/DELETE queues, exchanges, bindings)</a:t>
+            </a:r>
+          </a:p>
+        </p:txBody>
+      </p:sp>
+      <p:sp>
+        <p:nvSpPr>
+          <p:cNvPr id="21" name="Rounded Rectangle 20"/>
+          <p:cNvSpPr/>
+          <p:nvPr/>
+        </p:nvSpPr>
+        <p:spPr>
+          <a:xfrm>
+            <a:off x="9601200" y="3785615"/>
+            <a:ext cx="1280160" cy="384048"/>
+          </a:xfrm>
+          <a:prstGeom prst="roundRect">
+            <a:avLst>
+              <a:gd name="adj" fmla="val 28000"/>
+            </a:avLst>
+          </a:prstGeom>
+          <a:solidFill>
+            <a:srgbClr val="1B7A43"/>
+          </a:solidFill>
+          <a:ln>
+            <a:noFill/>
+          </a:ln>
+        </p:spPr>
+        <p:style>
+          <a:lnRef idx="1">
+            <a:schemeClr val="accent1"/>
+          </a:lnRef>
+          <a:fillRef idx="3">
+            <a:schemeClr val="accent1"/>
+          </a:fillRef>
+          <a:effectRef idx="2">
+            <a:schemeClr val="accent1"/>
+          </a:effectRef>
+          <a:fontRef idx="minor">
+            <a:schemeClr val="lt1"/>
+          </a:fontRef>
+        </p:style>
+        <p:txBody>
+          <a:bodyPr rtlCol="0" anchor="ctr" wrap="none" lIns="0" rIns="0" tIns="0" bIns="0"/>
+          <a:lstStyle/>
+          <a:p>
+            <a:pPr algn="ctr"/>
+            <a:r>
+              <a:rPr sz="1200" b="1">
+                <a:solidFill>
+                  <a:srgbClr val="FFFFFF"/>
+                </a:solidFill>
+                <a:latin typeface="Consolas"/>
+              </a:rPr>
+              <a:t>13%</a:t>
+            </a:r>
+          </a:p>
+        </p:txBody>
+      </p:sp>
+      <p:sp>
+        <p:nvSpPr>
+          <p:cNvPr id="22" name="TextBox 21"/>
+          <p:cNvSpPr txBox="1"/>
+          <p:nvPr/>
+        </p:nvSpPr>
+        <p:spPr>
+          <a:xfrm>
+            <a:off x="731520" y="4242816"/>
+            <a:ext cx="640080" cy="457200"/>
+          </a:xfrm>
+          <a:prstGeom prst="rect">
+            <a:avLst/>
+          </a:prstGeom>
+          <a:noFill/>
+        </p:spPr>
+        <p:txBody>
+          <a:bodyPr wrap="square">
+            <a:spAutoFit/>
+          </a:bodyPr>
+          <a:lstStyle/>
+          <a:p>
+            <a:pPr algn="ctr"/>
+            <a:r>
+              <a:rPr sz="1500" b="1">
+                <a:solidFill>
+                  <a:srgbClr val="0B3D91"/>
+                </a:solidFill>
+                <a:latin typeface="Calibri"/>
+              </a:rPr>
+              <a:t>7</a:t>
+            </a:r>
+          </a:p>
+        </p:txBody>
+      </p:sp>
+      <p:sp>
+        <p:nvSpPr>
+          <p:cNvPr id="23" name="TextBox 22"/>
+          <p:cNvSpPr txBox="1"/>
+          <p:nvPr/>
+        </p:nvSpPr>
+        <p:spPr>
+          <a:xfrm>
+            <a:off x="1554480" y="4242816"/>
+            <a:ext cx="7863840" cy="457200"/>
+          </a:xfrm>
+          <a:prstGeom prst="rect">
+            <a:avLst/>
+          </a:prstGeom>
+          <a:noFill/>
+        </p:spPr>
+        <p:txBody>
+          <a:bodyPr wrap="square">
+            <a:spAutoFit/>
+          </a:bodyPr>
+          <a:lstStyle/>
+          <a:p>
+            <a:pPr algn="l"/>
+            <a:r>
+              <a:rPr sz="1300" b="0">
+                <a:solidFill>
+                  <a:srgbClr val="1F2A44"/>
+                </a:solidFill>
+                <a:latin typeface="Calibri"/>
+              </a:rPr>
+              <a:t>Encapsulacion en RabbitAdminService</a:t>
+            </a:r>
+          </a:p>
+        </p:txBody>
+      </p:sp>
+      <p:sp>
+        <p:nvSpPr>
+          <p:cNvPr id="24" name="Rounded Rectangle 23"/>
+          <p:cNvSpPr/>
+          <p:nvPr/>
+        </p:nvSpPr>
+        <p:spPr>
+          <a:xfrm>
+            <a:off x="9601200" y="4279392"/>
+            <a:ext cx="1280160" cy="384048"/>
+          </a:xfrm>
+          <a:prstGeom prst="roundRect">
+            <a:avLst>
+              <a:gd name="adj" fmla="val 28000"/>
+            </a:avLst>
+          </a:prstGeom>
+          <a:solidFill>
+            <a:srgbClr val="1B7A43"/>
+          </a:solidFill>
+          <a:ln>
+            <a:noFill/>
+          </a:ln>
+        </p:spPr>
+        <p:style>
+          <a:lnRef idx="1">
+            <a:schemeClr val="accent1"/>
+          </a:lnRef>
+          <a:fillRef idx="3">
+            <a:schemeClr val="accent1"/>
+          </a:fillRef>
+          <a:effectRef idx="2">
+            <a:schemeClr val="accent1"/>
+          </a:effectRef>
+          <a:fontRef idx="minor">
+            <a:schemeClr val="lt1"/>
+          </a:fontRef>
+        </p:style>
+        <p:txBody>
+          <a:bodyPr rtlCol="0" anchor="ctr" wrap="none" lIns="0" rIns="0" tIns="0" bIns="0"/>
+          <a:lstStyle/>
+          <a:p>
+            <a:pPr algn="ctr"/>
+            <a:r>
+              <a:rPr sz="1200" b="1">
+                <a:solidFill>
+                  <a:srgbClr val="FFFFFF"/>
+                </a:solidFill>
+                <a:latin typeface="Consolas"/>
+              </a:rPr>
+              <a:t>10%</a:t>
+            </a:r>
+          </a:p>
+        </p:txBody>
+      </p:sp>
+      <p:sp>
+        <p:nvSpPr>
+          <p:cNvPr id="25" name="TextBox 24"/>
+          <p:cNvSpPr txBox="1"/>
+          <p:nvPr/>
+        </p:nvSpPr>
+        <p:spPr>
+          <a:xfrm>
+            <a:off x="731520" y="4736592"/>
+            <a:ext cx="640080" cy="457200"/>
+          </a:xfrm>
+          <a:prstGeom prst="rect">
+            <a:avLst/>
+          </a:prstGeom>
+          <a:noFill/>
+        </p:spPr>
+        <p:txBody>
+          <a:bodyPr wrap="square">
+            <a:spAutoFit/>
+          </a:bodyPr>
+          <a:lstStyle/>
+          <a:p>
+            <a:pPr algn="ctr"/>
+            <a:r>
+              <a:rPr sz="1500" b="1">
+                <a:solidFill>
+                  <a:srgbClr val="0B3D91"/>
+                </a:solidFill>
+                <a:latin typeface="Calibri"/>
+              </a:rPr>
+              <a:t>8</a:t>
+            </a:r>
+          </a:p>
+        </p:txBody>
+      </p:sp>
+      <p:sp>
+        <p:nvSpPr>
+          <p:cNvPr id="26" name="TextBox 25"/>
+          <p:cNvSpPr txBox="1"/>
+          <p:nvPr/>
+        </p:nvSpPr>
+        <p:spPr>
+          <a:xfrm>
+            <a:off x="1554480" y="4736592"/>
+            <a:ext cx="7863840" cy="457200"/>
+          </a:xfrm>
+          <a:prstGeom prst="rect">
+            <a:avLst/>
+          </a:prstGeom>
+          <a:noFill/>
+        </p:spPr>
+        <p:txBody>
+          <a:bodyPr wrap="square">
+            <a:spAutoFit/>
+          </a:bodyPr>
+          <a:lstStyle/>
+          <a:p>
+            <a:pPr algn="l"/>
+            <a:r>
+              <a:rPr sz="1300" b="0">
+                <a:solidFill>
+                  <a:srgbClr val="1F2A44"/>
+                </a:solidFill>
+                <a:latin typeface="Calibri"/>
+              </a:rPr>
+              <a:t>Validacion de entrada con DTO</a:t>
+            </a:r>
+          </a:p>
+        </p:txBody>
+      </p:sp>
+      <p:sp>
+        <p:nvSpPr>
+          <p:cNvPr id="27" name="Rounded Rectangle 26"/>
+          <p:cNvSpPr/>
+          <p:nvPr/>
+        </p:nvSpPr>
+        <p:spPr>
+          <a:xfrm>
+            <a:off x="9601200" y="4773168"/>
+            <a:ext cx="1280160" cy="384048"/>
+          </a:xfrm>
+          <a:prstGeom prst="roundRect">
+            <a:avLst>
+              <a:gd name="adj" fmla="val 28000"/>
+            </a:avLst>
+          </a:prstGeom>
+          <a:solidFill>
+            <a:srgbClr val="1B7A43"/>
+          </a:solidFill>
+          <a:ln>
+            <a:noFill/>
+          </a:ln>
+        </p:spPr>
+        <p:style>
+          <a:lnRef idx="1">
+            <a:schemeClr val="accent1"/>
+          </a:lnRef>
+          <a:fillRef idx="3">
+            <a:schemeClr val="accent1"/>
+          </a:fillRef>
+          <a:effectRef idx="2">
+            <a:schemeClr val="accent1"/>
+          </a:effectRef>
+          <a:fontRef idx="minor">
+            <a:schemeClr val="lt1"/>
+          </a:fontRef>
+        </p:style>
+        <p:txBody>
+          <a:bodyPr rtlCol="0" anchor="ctr" wrap="none" lIns="0" rIns="0" tIns="0" bIns="0"/>
+          <a:lstStyle/>
+          <a:p>
+            <a:pPr algn="ctr"/>
+            <a:r>
+              <a:rPr sz="1200" b="1">
+                <a:solidFill>
+                  <a:srgbClr val="FFFFFF"/>
+                </a:solidFill>
+                <a:latin typeface="Consolas"/>
+              </a:rPr>
+              <a:t>7%</a:t>
+            </a:r>
+          </a:p>
+        </p:txBody>
+      </p:sp>
+      <p:sp>
+        <p:nvSpPr>
+          <p:cNvPr id="28" name="Rounded Rectangle 27"/>
+          <p:cNvSpPr/>
+          <p:nvPr/>
+        </p:nvSpPr>
+        <p:spPr>
+          <a:xfrm>
+            <a:off x="9601200" y="5248655"/>
+            <a:ext cx="1280160" cy="384048"/>
+          </a:xfrm>
+          <a:prstGeom prst="roundRect">
+            <a:avLst>
+              <a:gd name="adj" fmla="val 28000"/>
+            </a:avLst>
+          </a:prstGeom>
+          <a:solidFill>
+            <a:srgbClr val="1F2A44"/>
+          </a:solidFill>
+          <a:ln>
+            <a:noFill/>
+          </a:ln>
+        </p:spPr>
+        <p:style>
+          <a:lnRef idx="1">
+            <a:schemeClr val="accent1"/>
+          </a:lnRef>
+          <a:fillRef idx="3">
+            <a:schemeClr val="accent1"/>
+          </a:fillRef>
+          <a:effectRef idx="2">
+            <a:schemeClr val="accent1"/>
+          </a:effectRef>
+          <a:fontRef idx="minor">
+            <a:schemeClr val="lt1"/>
+          </a:fontRef>
+        </p:style>
+        <p:txBody>
+          <a:bodyPr rtlCol="0" anchor="ctr" wrap="none" lIns="0" rIns="0" tIns="0" bIns="0"/>
+          <a:lstStyle/>
+          <a:p>
+            <a:pPr algn="ctr"/>
+            <a:r>
+              <a:rPr sz="1200" b="1">
+                <a:solidFill>
+                  <a:srgbClr val="FFFFFF"/>
+                </a:solidFill>
+                <a:latin typeface="Consolas"/>
+              </a:rPr>
+              <a:t>100%</a:t>
+            </a:r>
+          </a:p>
+        </p:txBody>
+      </p:sp>
+      <p:sp>
+        <p:nvSpPr>
+          <p:cNvPr id="29" name="TextBox 28"/>
+          <p:cNvSpPr txBox="1"/>
+          <p:nvPr/>
+        </p:nvSpPr>
+        <p:spPr>
+          <a:xfrm>
+            <a:off x="1554480" y="5266944"/>
+            <a:ext cx="7863840" cy="457200"/>
+          </a:xfrm>
+          <a:prstGeom prst="rect">
+            <a:avLst/>
+          </a:prstGeom>
+          <a:noFill/>
+        </p:spPr>
+        <p:txBody>
+          <a:bodyPr wrap="square">
+            <a:spAutoFit/>
+          </a:bodyPr>
+          <a:lstStyle/>
+          <a:p>
+            <a:pPr algn="l"/>
+            <a:r>
+              <a:rPr sz="1300" b="1">
+                <a:solidFill>
+                  <a:srgbClr val="1F2A44"/>
+                </a:solidFill>
+                <a:latin typeface="Calibri"/>
+              </a:rPr>
+              <a:t>TOTAL</a:t>
+            </a:r>
+          </a:p>
+        </p:txBody>
+      </p:sp>
+    </p:spTree>
+  </p:cSld>
+  <p:clrMapOvr>
+    <a:masterClrMapping/>
+  </p:clrMapOvr>
+</p:sld>
+</file>
+
+<file path=ppt/slides/slide13.xml><?xml version="1.0" encoding="utf-8"?>
+<p:sld xmlns:a="http://schemas.openxmlformats.org/drawingml/2006/main" xmlns:p="http://schemas.openxmlformats.org/presentationml/2006/main" xmlns:r="http://schemas.openxmlformats.org/officeDocument/2006/relationships">
+  <p:cSld>
+    <p:spTree>
+      <p:nvGrpSpPr>
+        <p:cNvPr id="1" name=""/>
+        <p:cNvGrpSpPr/>
+        <p:nvPr/>
+      </p:nvGrpSpPr>
+      <p:grpSpPr/>
+      <p:sp>
+        <p:nvSpPr>
+          <p:cNvPr id="2" name="Rectangle 1"/>
+          <p:cNvSpPr/>
+          <p:nvPr/>
+        </p:nvSpPr>
+        <p:spPr>
+          <a:xfrm>
+            <a:off x="0" y="0"/>
+            <a:ext cx="12191695" cy="868680"/>
+          </a:xfrm>
+          <a:prstGeom prst="rect">
+            <a:avLst/>
+          </a:prstGeom>
+          <a:solidFill>
+            <a:srgbClr val="1F2A44"/>
+          </a:solidFill>
+          <a:ln>
+            <a:noFill/>
+          </a:ln>
+        </p:spPr>
+        <p:style>
+          <a:lnRef idx="1">
+            <a:schemeClr val="accent1"/>
+          </a:lnRef>
+          <a:fillRef idx="3">
+            <a:schemeClr val="accent1"/>
+          </a:fillRef>
+          <a:effectRef idx="2">
+            <a:schemeClr val="accent1"/>
+          </a:effectRef>
+          <a:fontRef idx="minor">
+            <a:schemeClr val="lt1"/>
+          </a:fontRef>
+        </p:style>
+        <p:txBody>
+          <a:bodyPr rtlCol="0" anchor="ctr"/>
+          <a:lstStyle/>
+          <a:p>
+            <a:pPr algn="ctr"/>
+          </a:p>
+        </p:txBody>
+      </p:sp>
+      <p:sp>
+        <p:nvSpPr>
+          <p:cNvPr id="3" name="TextBox 2"/>
+          <p:cNvSpPr txBox="1"/>
+          <p:nvPr/>
+        </p:nvSpPr>
+        <p:spPr>
+          <a:xfrm>
+            <a:off x="502920" y="109728"/>
+            <a:ext cx="10515600" cy="548640"/>
+          </a:xfrm>
+          <a:prstGeom prst="rect">
+            <a:avLst/>
+          </a:prstGeom>
+          <a:noFill/>
+        </p:spPr>
+        <p:txBody>
+          <a:bodyPr wrap="square">
+            <a:spAutoFit/>
+          </a:bodyPr>
+          <a:lstStyle/>
+          <a:p>
+            <a:pPr algn="l"/>
+            <a:r>
+              <a:rPr sz="2600" b="1">
+                <a:solidFill>
+                  <a:srgbClr val="FFFFFF"/>
+                </a:solidFill>
+                <a:latin typeface="Calibri"/>
+              </a:rPr>
+              <a:t>Checklist de demostracion EP4 (presentacion 5–10 min)</a:t>
+            </a:r>
+          </a:p>
+        </p:txBody>
+      </p:sp>
+      <p:sp>
+        <p:nvSpPr>
+          <p:cNvPr id="4" name="Rounded Rectangle 3"/>
+          <p:cNvSpPr/>
+          <p:nvPr/>
+        </p:nvSpPr>
+        <p:spPr>
+          <a:xfrm>
+            <a:off x="640080" y="1188720"/>
+            <a:ext cx="457200" cy="384048"/>
+          </a:xfrm>
+          <a:prstGeom prst="roundRect">
+            <a:avLst>
+              <a:gd name="adj" fmla="val 28000"/>
+            </a:avLst>
+          </a:prstGeom>
+          <a:solidFill>
+            <a:srgbClr val="1B7A43"/>
+          </a:solidFill>
+          <a:ln>
+            <a:noFill/>
+          </a:ln>
+        </p:spPr>
+        <p:style>
+          <a:lnRef idx="1">
+            <a:schemeClr val="accent1"/>
+          </a:lnRef>
+          <a:fillRef idx="3">
+            <a:schemeClr val="accent1"/>
+          </a:fillRef>
+          <a:effectRef idx="2">
+            <a:schemeClr val="accent1"/>
+          </a:effectRef>
+          <a:fontRef idx="minor">
+            <a:schemeClr val="lt1"/>
+          </a:fontRef>
+        </p:style>
+        <p:txBody>
+          <a:bodyPr rtlCol="0" anchor="ctr" wrap="none" lIns="0" rIns="0" tIns="0" bIns="0"/>
+          <a:lstStyle/>
+          <a:p>
+            <a:pPr algn="ctr"/>
+            <a:r>
+              <a:rPr sz="1100" b="1">
+                <a:solidFill>
+                  <a:srgbClr val="FFFFFF"/>
+                </a:solidFill>
+                <a:latin typeface="Consolas"/>
+              </a:rPr>
+              <a:t>OK</a:t>
+            </a:r>
+          </a:p>
+        </p:txBody>
+      </p:sp>
+      <p:sp>
+        <p:nvSpPr>
+          <p:cNvPr id="5" name="TextBox 4"/>
+          <p:cNvSpPr txBox="1"/>
+          <p:nvPr/>
+        </p:nvSpPr>
+        <p:spPr>
+          <a:xfrm>
+            <a:off x="1280160" y="1207008"/>
+            <a:ext cx="10424160" cy="365760"/>
+          </a:xfrm>
+          <a:prstGeom prst="rect">
+            <a:avLst/>
+          </a:prstGeom>
+          <a:noFill/>
+        </p:spPr>
+        <p:txBody>
+          <a:bodyPr wrap="square">
+            <a:spAutoFit/>
+          </a:bodyPr>
+          <a:lstStyle/>
+          <a:p>
+            <a:pPr algn="l"/>
+            <a:r>
+              <a:rPr sz="1200" b="0">
+                <a:solidFill>
+                  <a:srgbClr val="1F2A44"/>
+                </a:solidFill>
+                <a:latin typeface="Calibri"/>
+              </a:rPr>
+              <a:t>API Manager en la nube en funcionamiento (rutas + JWT authorizer).</a:t>
+            </a:r>
+          </a:p>
+        </p:txBody>
+      </p:sp>
+      <p:sp>
+        <p:nvSpPr>
+          <p:cNvPr id="6" name="Rounded Rectangle 5"/>
+          <p:cNvSpPr/>
+          <p:nvPr/>
+        </p:nvSpPr>
+        <p:spPr>
+          <a:xfrm>
+            <a:off x="640080" y="1645920"/>
+            <a:ext cx="457200" cy="384048"/>
+          </a:xfrm>
+          <a:prstGeom prst="roundRect">
+            <a:avLst>
+              <a:gd name="adj" fmla="val 28000"/>
+            </a:avLst>
+          </a:prstGeom>
+          <a:solidFill>
+            <a:srgbClr val="1B7A43"/>
+          </a:solidFill>
+          <a:ln>
+            <a:noFill/>
+          </a:ln>
+        </p:spPr>
+        <p:style>
+          <a:lnRef idx="1">
+            <a:schemeClr val="accent1"/>
+          </a:lnRef>
+          <a:fillRef idx="3">
+            <a:schemeClr val="accent1"/>
+          </a:fillRef>
+          <a:effectRef idx="2">
+            <a:schemeClr val="accent1"/>
+          </a:effectRef>
+          <a:fontRef idx="minor">
+            <a:schemeClr val="lt1"/>
+          </a:fontRef>
+        </p:style>
+        <p:txBody>
+          <a:bodyPr rtlCol="0" anchor="ctr" wrap="none" lIns="0" rIns="0" tIns="0" bIns="0"/>
+          <a:lstStyle/>
+          <a:p>
+            <a:pPr algn="ctr"/>
+            <a:r>
+              <a:rPr sz="1100" b="1">
+                <a:solidFill>
+                  <a:srgbClr val="FFFFFF"/>
+                </a:solidFill>
+                <a:latin typeface="Consolas"/>
+              </a:rPr>
+              <a:t>OK</a:t>
+            </a:r>
+          </a:p>
+        </p:txBody>
+      </p:sp>
+      <p:sp>
+        <p:nvSpPr>
+          <p:cNvPr id="7" name="TextBox 6"/>
+          <p:cNvSpPr txBox="1"/>
+          <p:nvPr/>
+        </p:nvSpPr>
+        <p:spPr>
+          <a:xfrm>
+            <a:off x="1280160" y="1664208"/>
+            <a:ext cx="10424160" cy="365760"/>
+          </a:xfrm>
+          <a:prstGeom prst="rect">
+            <a:avLst/>
+          </a:prstGeom>
+          <a:noFill/>
+        </p:spPr>
+        <p:txBody>
+          <a:bodyPr wrap="square">
+            <a:spAutoFit/>
+          </a:bodyPr>
+          <a:lstStyle/>
+          <a:p>
+            <a:pPr algn="l"/>
+            <a:r>
+              <a:rPr sz="1200" b="0">
+                <a:solidFill>
+                  <a:srgbClr val="1F2A44"/>
+                </a:solidFill>
+                <a:latin typeface="Calibri"/>
+              </a:rPr>
+              <a:t>El frontend consume los endpoints via el API Manager.</a:t>
+            </a:r>
+          </a:p>
+        </p:txBody>
+      </p:sp>
+      <p:sp>
+        <p:nvSpPr>
+          <p:cNvPr id="8" name="Rounded Rectangle 7"/>
+          <p:cNvSpPr/>
+          <p:nvPr/>
+        </p:nvSpPr>
+        <p:spPr>
+          <a:xfrm>
+            <a:off x="640080" y="2103120"/>
+            <a:ext cx="457200" cy="384048"/>
+          </a:xfrm>
+          <a:prstGeom prst="roundRect">
+            <a:avLst>
+              <a:gd name="adj" fmla="val 28000"/>
+            </a:avLst>
+          </a:prstGeom>
+          <a:solidFill>
+            <a:srgbClr val="1B7A43"/>
+          </a:solidFill>
+          <a:ln>
+            <a:noFill/>
+          </a:ln>
+        </p:spPr>
+        <p:style>
+          <a:lnRef idx="1">
+            <a:schemeClr val="accent1"/>
+          </a:lnRef>
+          <a:fillRef idx="3">
+            <a:schemeClr val="accent1"/>
+          </a:fillRef>
+          <a:effectRef idx="2">
+            <a:schemeClr val="accent1"/>
+          </a:effectRef>
+          <a:fontRef idx="minor">
+            <a:schemeClr val="lt1"/>
+          </a:fontRef>
+        </p:style>
+        <p:txBody>
+          <a:bodyPr rtlCol="0" anchor="ctr" wrap="none" lIns="0" rIns="0" tIns="0" bIns="0"/>
+          <a:lstStyle/>
+          <a:p>
+            <a:pPr algn="ctr"/>
+            <a:r>
+              <a:rPr sz="1100" b="1">
+                <a:solidFill>
+                  <a:srgbClr val="FFFFFF"/>
+                </a:solidFill>
+                <a:latin typeface="Consolas"/>
+              </a:rPr>
+              <a:t>OK</a:t>
+            </a:r>
+          </a:p>
+        </p:txBody>
+      </p:sp>
+      <p:sp>
+        <p:nvSpPr>
+          <p:cNvPr id="9" name="TextBox 8"/>
+          <p:cNvSpPr txBox="1"/>
+          <p:nvPr/>
+        </p:nvSpPr>
+        <p:spPr>
+          <a:xfrm>
+            <a:off x="1280160" y="2121408"/>
+            <a:ext cx="10424160" cy="365760"/>
+          </a:xfrm>
+          <a:prstGeom prst="rect">
+            <a:avLst/>
+          </a:prstGeom>
+          <a:noFill/>
+        </p:spPr>
+        <p:txBody>
+          <a:bodyPr wrap="square">
+            <a:spAutoFit/>
+          </a:bodyPr>
+          <a:lstStyle/>
+          <a:p>
+            <a:pPr algn="l"/>
+            <a:r>
+              <a:rPr sz="1200" b="0">
+                <a:solidFill>
+                  <a:srgbClr val="1F2A44"/>
+                </a:solidFill>
+                <a:latin typeface="Calibri"/>
+              </a:rPr>
+              <a:t>El API Manager valida JWT: rechaza invalido (401), acepta valido (200).</a:t>
+            </a:r>
+          </a:p>
+        </p:txBody>
+      </p:sp>
+      <p:sp>
+        <p:nvSpPr>
+          <p:cNvPr id="10" name="Rounded Rectangle 9"/>
+          <p:cNvSpPr/>
+          <p:nvPr/>
+        </p:nvSpPr>
+        <p:spPr>
+          <a:xfrm>
+            <a:off x="640080" y="2560320"/>
+            <a:ext cx="457200" cy="384048"/>
+          </a:xfrm>
+          <a:prstGeom prst="roundRect">
+            <a:avLst>
+              <a:gd name="adj" fmla="val 28000"/>
+            </a:avLst>
+          </a:prstGeom>
+          <a:solidFill>
+            <a:srgbClr val="1B7A43"/>
+          </a:solidFill>
+          <a:ln>
+            <a:noFill/>
+          </a:ln>
+        </p:spPr>
+        <p:style>
+          <a:lnRef idx="1">
+            <a:schemeClr val="accent1"/>
+          </a:lnRef>
+          <a:fillRef idx="3">
+            <a:schemeClr val="accent1"/>
+          </a:fillRef>
+          <a:effectRef idx="2">
+            <a:schemeClr val="accent1"/>
+          </a:effectRef>
+          <a:fontRef idx="minor">
+            <a:schemeClr val="lt1"/>
+          </a:fontRef>
+        </p:style>
+        <p:txBody>
+          <a:bodyPr rtlCol="0" anchor="ctr" wrap="none" lIns="0" rIns="0" tIns="0" bIns="0"/>
+          <a:lstStyle/>
+          <a:p>
+            <a:pPr algn="ctr"/>
+            <a:r>
+              <a:rPr sz="1100" b="1">
+                <a:solidFill>
+                  <a:srgbClr val="FFFFFF"/>
+                </a:solidFill>
+                <a:latin typeface="Consolas"/>
+              </a:rPr>
+              <a:t>OK</a:t>
+            </a:r>
+          </a:p>
+        </p:txBody>
+      </p:sp>
+      <p:sp>
+        <p:nvSpPr>
+          <p:cNvPr id="11" name="TextBox 10"/>
+          <p:cNvSpPr txBox="1"/>
+          <p:nvPr/>
+        </p:nvSpPr>
+        <p:spPr>
+          <a:xfrm>
+            <a:off x="1280160" y="2578608"/>
+            <a:ext cx="10424160" cy="365760"/>
+          </a:xfrm>
+          <a:prstGeom prst="rect">
+            <a:avLst/>
+          </a:prstGeom>
+          <a:noFill/>
+        </p:spPr>
+        <p:txBody>
+          <a:bodyPr wrap="square">
+            <a:spAutoFit/>
+          </a:bodyPr>
+          <a:lstStyle/>
+          <a:p>
+            <a:pPr algn="l"/>
+            <a:r>
+              <a:rPr sz="1200" b="0">
+                <a:solidFill>
+                  <a:srgbClr val="1F2A44"/>
+                </a:solidFill>
+                <a:latin typeface="Calibri"/>
+              </a:rPr>
+              <a:t>Tenant en IDaaS + usuarios registrados (maria, jose).</a:t>
+            </a:r>
+          </a:p>
+        </p:txBody>
+      </p:sp>
+      <p:sp>
+        <p:nvSpPr>
+          <p:cNvPr id="12" name="Rounded Rectangle 11"/>
+          <p:cNvSpPr/>
+          <p:nvPr/>
+        </p:nvSpPr>
+        <p:spPr>
+          <a:xfrm>
+            <a:off x="640080" y="3017520"/>
+            <a:ext cx="457200" cy="384048"/>
+          </a:xfrm>
+          <a:prstGeom prst="roundRect">
+            <a:avLst>
+              <a:gd name="adj" fmla="val 28000"/>
+            </a:avLst>
+          </a:prstGeom>
+          <a:solidFill>
+            <a:srgbClr val="1B7A43"/>
+          </a:solidFill>
+          <a:ln>
+            <a:noFill/>
+          </a:ln>
+        </p:spPr>
+        <p:style>
+          <a:lnRef idx="1">
+            <a:schemeClr val="accent1"/>
+          </a:lnRef>
+          <a:fillRef idx="3">
+            <a:schemeClr val="accent1"/>
+          </a:fillRef>
+          <a:effectRef idx="2">
+            <a:schemeClr val="accent1"/>
+          </a:effectRef>
+          <a:fontRef idx="minor">
+            <a:schemeClr val="lt1"/>
+          </a:fontRef>
+        </p:style>
+        <p:txBody>
+          <a:bodyPr rtlCol="0" anchor="ctr" wrap="none" lIns="0" rIns="0" tIns="0" bIns="0"/>
+          <a:lstStyle/>
+          <a:p>
+            <a:pPr algn="ctr"/>
+            <a:r>
+              <a:rPr sz="1100" b="1">
+                <a:solidFill>
+                  <a:srgbClr val="FFFFFF"/>
+                </a:solidFill>
+                <a:latin typeface="Consolas"/>
+              </a:rPr>
+              <a:t>OK</a:t>
+            </a:r>
+          </a:p>
+        </p:txBody>
+      </p:sp>
+      <p:sp>
+        <p:nvSpPr>
+          <p:cNvPr id="13" name="TextBox 12"/>
+          <p:cNvSpPr txBox="1"/>
+          <p:nvPr/>
+        </p:nvSpPr>
+        <p:spPr>
+          <a:xfrm>
+            <a:off x="1280160" y="3035808"/>
+            <a:ext cx="10424160" cy="365760"/>
+          </a:xfrm>
+          <a:prstGeom prst="rect">
+            <a:avLst/>
+          </a:prstGeom>
+          <a:noFill/>
+        </p:spPr>
+        <p:txBody>
+          <a:bodyPr wrap="square">
+            <a:spAutoFit/>
+          </a:bodyPr>
+          <a:lstStyle/>
+          <a:p>
+            <a:pPr algn="l"/>
+            <a:r>
+              <a:rPr sz="1200" b="0">
+                <a:solidFill>
+                  <a:srgbClr val="1F2A44"/>
+                </a:solidFill>
+                <a:latin typeface="Calibri"/>
+              </a:rPr>
+              <a:t>Frontend usa OAuth 2.0 / OIDC para login y obtener JWT.</a:t>
+            </a:r>
+          </a:p>
+        </p:txBody>
+      </p:sp>
+      <p:sp>
+        <p:nvSpPr>
+          <p:cNvPr id="14" name="Rounded Rectangle 13"/>
+          <p:cNvSpPr/>
+          <p:nvPr/>
+        </p:nvSpPr>
+        <p:spPr>
+          <a:xfrm>
+            <a:off x="640080" y="3474720"/>
+            <a:ext cx="457200" cy="384048"/>
+          </a:xfrm>
+          <a:prstGeom prst="roundRect">
+            <a:avLst>
+              <a:gd name="adj" fmla="val 28000"/>
+            </a:avLst>
+          </a:prstGeom>
+          <a:solidFill>
+            <a:srgbClr val="1B7A43"/>
+          </a:solidFill>
+          <a:ln>
+            <a:noFill/>
+          </a:ln>
+        </p:spPr>
+        <p:style>
+          <a:lnRef idx="1">
+            <a:schemeClr val="accent1"/>
+          </a:lnRef>
+          <a:fillRef idx="3">
+            <a:schemeClr val="accent1"/>
+          </a:fillRef>
+          <a:effectRef idx="2">
+            <a:schemeClr val="accent1"/>
+          </a:effectRef>
+          <a:fontRef idx="minor">
+            <a:schemeClr val="lt1"/>
+          </a:fontRef>
+        </p:style>
+        <p:txBody>
+          <a:bodyPr rtlCol="0" anchor="ctr" wrap="none" lIns="0" rIns="0" tIns="0" bIns="0"/>
+          <a:lstStyle/>
+          <a:p>
+            <a:pPr algn="ctr"/>
+            <a:r>
+              <a:rPr sz="1100" b="1">
+                <a:solidFill>
+                  <a:srgbClr val="FFFFFF"/>
+                </a:solidFill>
+                <a:latin typeface="Consolas"/>
+              </a:rPr>
+              <a:t>OK</a:t>
+            </a:r>
+          </a:p>
+        </p:txBody>
+      </p:sp>
+      <p:sp>
+        <p:nvSpPr>
+          <p:cNvPr id="15" name="TextBox 14"/>
+          <p:cNvSpPr txBox="1"/>
+          <p:nvPr/>
+        </p:nvSpPr>
+        <p:spPr>
+          <a:xfrm>
+            <a:off x="1280160" y="3493008"/>
+            <a:ext cx="10424160" cy="365760"/>
+          </a:xfrm>
+          <a:prstGeom prst="rect">
+            <a:avLst/>
+          </a:prstGeom>
+          <a:noFill/>
+        </p:spPr>
+        <p:txBody>
+          <a:bodyPr wrap="square">
+            <a:spAutoFit/>
+          </a:bodyPr>
+          <a:lstStyle/>
+          <a:p>
+            <a:pPr algn="l"/>
+            <a:r>
+              <a:rPr sz="1200" b="0">
+                <a:solidFill>
+                  <a:srgbClr val="1F2A44"/>
+                </a:solidFill>
+                <a:latin typeface="Calibri"/>
+              </a:rPr>
+              <a:t>Backend y frontend desplegados, activos e integrados (EC2 + CloudFront).</a:t>
+            </a:r>
+          </a:p>
+        </p:txBody>
+      </p:sp>
+      <p:sp>
+        <p:nvSpPr>
+          <p:cNvPr id="16" name="Rounded Rectangle 15"/>
+          <p:cNvSpPr/>
+          <p:nvPr/>
+        </p:nvSpPr>
+        <p:spPr>
+          <a:xfrm>
+            <a:off x="640080" y="3931920"/>
+            <a:ext cx="457200" cy="384048"/>
+          </a:xfrm>
+          <a:prstGeom prst="roundRect">
+            <a:avLst>
+              <a:gd name="adj" fmla="val 28000"/>
+            </a:avLst>
+          </a:prstGeom>
+          <a:solidFill>
+            <a:srgbClr val="1B7A43"/>
+          </a:solidFill>
+          <a:ln>
+            <a:noFill/>
+          </a:ln>
+        </p:spPr>
+        <p:style>
+          <a:lnRef idx="1">
+            <a:schemeClr val="accent1"/>
+          </a:lnRef>
+          <a:fillRef idx="3">
+            <a:schemeClr val="accent1"/>
+          </a:fillRef>
+          <a:effectRef idx="2">
+            <a:schemeClr val="accent1"/>
+          </a:effectRef>
+          <a:fontRef idx="minor">
+            <a:schemeClr val="lt1"/>
+          </a:fontRef>
+        </p:style>
+        <p:txBody>
+          <a:bodyPr rtlCol="0" anchor="ctr" wrap="none" lIns="0" rIns="0" tIns="0" bIns="0"/>
+          <a:lstStyle/>
+          <a:p>
+            <a:pPr algn="ctr"/>
+            <a:r>
+              <a:rPr sz="1100" b="1">
+                <a:solidFill>
+                  <a:srgbClr val="FFFFFF"/>
+                </a:solidFill>
+                <a:latin typeface="Consolas"/>
+              </a:rPr>
+              <a:t>OK</a:t>
+            </a:r>
+          </a:p>
+        </p:txBody>
+      </p:sp>
+      <p:sp>
+        <p:nvSpPr>
+          <p:cNvPr id="17" name="TextBox 16"/>
+          <p:cNvSpPr txBox="1"/>
+          <p:nvPr/>
+        </p:nvSpPr>
+        <p:spPr>
+          <a:xfrm>
+            <a:off x="1280160" y="3950207"/>
+            <a:ext cx="10424160" cy="365760"/>
+          </a:xfrm>
+          <a:prstGeom prst="rect">
+            <a:avLst/>
+          </a:prstGeom>
+          <a:noFill/>
+        </p:spPr>
+        <p:txBody>
+          <a:bodyPr wrap="square">
+            <a:spAutoFit/>
+          </a:bodyPr>
+          <a:lstStyle/>
+          <a:p>
+            <a:pPr algn="l"/>
+            <a:r>
+              <a:rPr sz="1200" b="0">
+                <a:solidFill>
+                  <a:srgbClr val="1F2A44"/>
+                </a:solidFill>
+                <a:latin typeface="Calibri"/>
+              </a:rPr>
+              <a:t>Dos nodos RabbitMQ en cluster.</a:t>
+            </a:r>
+          </a:p>
+        </p:txBody>
+      </p:sp>
+      <p:sp>
+        <p:nvSpPr>
+          <p:cNvPr id="18" name="Rounded Rectangle 17"/>
+          <p:cNvSpPr/>
+          <p:nvPr/>
+        </p:nvSpPr>
+        <p:spPr>
+          <a:xfrm>
+            <a:off x="640080" y="4389120"/>
+            <a:ext cx="457200" cy="384048"/>
+          </a:xfrm>
+          <a:prstGeom prst="roundRect">
+            <a:avLst>
+              <a:gd name="adj" fmla="val 28000"/>
+            </a:avLst>
+          </a:prstGeom>
+          <a:solidFill>
+            <a:srgbClr val="1B7A43"/>
+          </a:solidFill>
+          <a:ln>
+            <a:noFill/>
+          </a:ln>
+        </p:spPr>
+        <p:style>
+          <a:lnRef idx="1">
+            <a:schemeClr val="accent1"/>
+          </a:lnRef>
+          <a:fillRef idx="3">
+            <a:schemeClr val="accent1"/>
+          </a:fillRef>
+          <a:effectRef idx="2">
+            <a:schemeClr val="accent1"/>
+          </a:effectRef>
+          <a:fontRef idx="minor">
+            <a:schemeClr val="lt1"/>
+          </a:fontRef>
+        </p:style>
+        <p:txBody>
+          <a:bodyPr rtlCol="0" anchor="ctr" wrap="none" lIns="0" rIns="0" tIns="0" bIns="0"/>
+          <a:lstStyle/>
+          <a:p>
+            <a:pPr algn="ctr"/>
+            <a:r>
+              <a:rPr sz="1100" b="1">
+                <a:solidFill>
+                  <a:srgbClr val="FFFFFF"/>
+                </a:solidFill>
+                <a:latin typeface="Consolas"/>
+              </a:rPr>
+              <a:t>OK</a:t>
+            </a:r>
+          </a:p>
+        </p:txBody>
+      </p:sp>
+      <p:sp>
+        <p:nvSpPr>
+          <p:cNvPr id="19" name="TextBox 18"/>
+          <p:cNvSpPr txBox="1"/>
+          <p:nvPr/>
+        </p:nvSpPr>
+        <p:spPr>
+          <a:xfrm>
+            <a:off x="1280160" y="4407407"/>
+            <a:ext cx="10424160" cy="365760"/>
+          </a:xfrm>
+          <a:prstGeom prst="rect">
+            <a:avLst/>
+          </a:prstGeom>
+          <a:noFill/>
+        </p:spPr>
+        <p:txBody>
+          <a:bodyPr wrap="square">
+            <a:spAutoFit/>
+          </a:bodyPr>
+          <a:lstStyle/>
+          <a:p>
+            <a:pPr algn="l"/>
+            <a:r>
+              <a:rPr sz="1200" b="0">
+                <a:solidFill>
+                  <a:srgbClr val="1F2A44"/>
+                </a:solidFill>
+                <a:latin typeface="Calibri"/>
+              </a:rPr>
+              <a:t>Tres colas con sus DLQ funcionando.</a:t>
+            </a:r>
+          </a:p>
+        </p:txBody>
+      </p:sp>
+      <p:sp>
+        <p:nvSpPr>
+          <p:cNvPr id="20" name="Rounded Rectangle 19"/>
+          <p:cNvSpPr/>
+          <p:nvPr/>
+        </p:nvSpPr>
+        <p:spPr>
+          <a:xfrm>
+            <a:off x="640080" y="4846320"/>
+            <a:ext cx="457200" cy="384048"/>
+          </a:xfrm>
+          <a:prstGeom prst="roundRect">
+            <a:avLst>
+              <a:gd name="adj" fmla="val 28000"/>
+            </a:avLst>
+          </a:prstGeom>
+          <a:solidFill>
+            <a:srgbClr val="1B7A43"/>
+          </a:solidFill>
+          <a:ln>
+            <a:noFill/>
+          </a:ln>
+        </p:spPr>
+        <p:style>
+          <a:lnRef idx="1">
+            <a:schemeClr val="accent1"/>
+          </a:lnRef>
+          <a:fillRef idx="3">
+            <a:schemeClr val="accent1"/>
+          </a:fillRef>
+          <a:effectRef idx="2">
+            <a:schemeClr val="accent1"/>
+          </a:effectRef>
+          <a:fontRef idx="minor">
+            <a:schemeClr val="lt1"/>
+          </a:fontRef>
+        </p:style>
+        <p:txBody>
+          <a:bodyPr rtlCol="0" anchor="ctr" wrap="none" lIns="0" rIns="0" tIns="0" bIns="0"/>
+          <a:lstStyle/>
+          <a:p>
+            <a:pPr algn="ctr"/>
+            <a:r>
+              <a:rPr sz="1100" b="1">
+                <a:solidFill>
+                  <a:srgbClr val="FFFFFF"/>
+                </a:solidFill>
+                <a:latin typeface="Consolas"/>
+              </a:rPr>
+              <a:t>OK</a:t>
+            </a:r>
+          </a:p>
+        </p:txBody>
+      </p:sp>
+      <p:sp>
+        <p:nvSpPr>
+          <p:cNvPr id="21" name="TextBox 20"/>
+          <p:cNvSpPr txBox="1"/>
+          <p:nvPr/>
+        </p:nvSpPr>
+        <p:spPr>
+          <a:xfrm>
+            <a:off x="1280160" y="4864607"/>
+            <a:ext cx="10424160" cy="365760"/>
+          </a:xfrm>
+          <a:prstGeom prst="rect">
+            <a:avLst/>
+          </a:prstGeom>
+          <a:noFill/>
+        </p:spPr>
+        <p:txBody>
+          <a:bodyPr wrap="square">
+            <a:spAutoFit/>
+          </a:bodyPr>
+          <a:lstStyle/>
+          <a:p>
+            <a:pPr algn="l"/>
+            <a:r>
+              <a:rPr sz="1200" b="0">
+                <a:solidFill>
+                  <a:srgbClr val="1F2A44"/>
+                </a:solidFill>
+                <a:latin typeface="Calibri"/>
+              </a:rPr>
+              <a:t>Exchanges direct y topic configurados.</a:t>
+            </a:r>
+          </a:p>
+        </p:txBody>
+      </p:sp>
+      <p:sp>
+        <p:nvSpPr>
+          <p:cNvPr id="22" name="Rounded Rectangle 21"/>
+          <p:cNvSpPr/>
+          <p:nvPr/>
+        </p:nvSpPr>
+        <p:spPr>
+          <a:xfrm>
+            <a:off x="640080" y="5303520"/>
+            <a:ext cx="457200" cy="384048"/>
+          </a:xfrm>
+          <a:prstGeom prst="roundRect">
+            <a:avLst>
+              <a:gd name="adj" fmla="val 28000"/>
+            </a:avLst>
+          </a:prstGeom>
+          <a:solidFill>
+            <a:srgbClr val="1B7A43"/>
+          </a:solidFill>
+          <a:ln>
+            <a:noFill/>
+          </a:ln>
+        </p:spPr>
+        <p:style>
+          <a:lnRef idx="1">
+            <a:schemeClr val="accent1"/>
+          </a:lnRef>
+          <a:fillRef idx="3">
+            <a:schemeClr val="accent1"/>
+          </a:fillRef>
+          <a:effectRef idx="2">
+            <a:schemeClr val="accent1"/>
+          </a:effectRef>
+          <a:fontRef idx="minor">
+            <a:schemeClr val="lt1"/>
+          </a:fontRef>
+        </p:style>
+        <p:txBody>
+          <a:bodyPr rtlCol="0" anchor="ctr" wrap="none" lIns="0" rIns="0" tIns="0" bIns="0"/>
+          <a:lstStyle/>
+          <a:p>
+            <a:pPr algn="ctr"/>
+            <a:r>
+              <a:rPr sz="1100" b="1">
+                <a:solidFill>
+                  <a:srgbClr val="FFFFFF"/>
+                </a:solidFill>
+                <a:latin typeface="Consolas"/>
+              </a:rPr>
+              <a:t>OK</a:t>
+            </a:r>
+          </a:p>
+        </p:txBody>
+      </p:sp>
+      <p:sp>
+        <p:nvSpPr>
+          <p:cNvPr id="23" name="TextBox 22"/>
+          <p:cNvSpPr txBox="1"/>
+          <p:nvPr/>
+        </p:nvSpPr>
+        <p:spPr>
+          <a:xfrm>
+            <a:off x="1280160" y="5321807"/>
+            <a:ext cx="10424160" cy="365760"/>
+          </a:xfrm>
+          <a:prstGeom prst="rect">
+            <a:avLst/>
+          </a:prstGeom>
+          <a:noFill/>
+        </p:spPr>
+        <p:txBody>
+          <a:bodyPr wrap="square">
+            <a:spAutoFit/>
+          </a:bodyPr>
+          <a:lstStyle/>
+          <a:p>
+            <a:pPr algn="l"/>
+            <a:r>
+              <a:rPr sz="1200" b="0">
+                <a:solidFill>
+                  <a:srgbClr val="1F2A44"/>
+                </a:solidFill>
+                <a:latin typeface="Calibri"/>
+              </a:rPr>
+              <a:t>docker-compose levantando servicios de RabbitMQ.</a:t>
+            </a:r>
+          </a:p>
+        </p:txBody>
+      </p:sp>
+      <p:sp>
+        <p:nvSpPr>
+          <p:cNvPr id="24" name="TextBox 23"/>
+          <p:cNvSpPr txBox="1"/>
+          <p:nvPr/>
+        </p:nvSpPr>
+        <p:spPr>
+          <a:xfrm>
+            <a:off x="640080" y="5852159"/>
+            <a:ext cx="10607040" cy="365760"/>
+          </a:xfrm>
+          <a:prstGeom prst="rect">
+            <a:avLst/>
+          </a:prstGeom>
+          <a:noFill/>
+        </p:spPr>
+        <p:txBody>
+          <a:bodyPr wrap="square">
+            <a:spAutoFit/>
+          </a:bodyPr>
+          <a:lstStyle/>
+          <a:p>
+            <a:pPr algn="l"/>
+            <a:r>
+              <a:rPr sz="1200" b="1">
+                <a:solidFill>
+                  <a:srgbClr val="0B3D91"/>
+                </a:solidFill>
+                <a:latin typeface="Calibri"/>
+              </a:rPr>
+              <a:t>Mensajeria en vivo: crear pedido → cadena notificacion/documento/ticket; demo DLQ con FORZAR_DLQ.</a:t>
             </a:r>
           </a:p>
         </p:txBody>
@@ -11225,6 +16363,1319 @@
                 <a:latin typeface="Calibri"/>
               </a:rPr>
               <a:t>Defensa: mismo JWT validado en 3 puntos (SPA→API Gateway→back-end) = defense in depth.</a:t>
+            </a:r>
+          </a:p>
+        </p:txBody>
+      </p:sp>
+    </p:spTree>
+  </p:cSld>
+  <p:clrMapOvr>
+    <a:masterClrMapping/>
+  </p:clrMapOvr>
+</p:sld>
+</file>
+
+<file path=ppt/slides/slide9.xml><?xml version="1.0" encoding="utf-8"?>
+<p:sld xmlns:a="http://schemas.openxmlformats.org/drawingml/2006/main" xmlns:p="http://schemas.openxmlformats.org/presentationml/2006/main" xmlns:r="http://schemas.openxmlformats.org/officeDocument/2006/relationships">
+  <p:cSld>
+    <p:spTree>
+      <p:nvGrpSpPr>
+        <p:cNvPr id="1" name=""/>
+        <p:cNvGrpSpPr/>
+        <p:nvPr/>
+      </p:nvGrpSpPr>
+      <p:grpSpPr/>
+      <p:sp>
+        <p:nvSpPr>
+          <p:cNvPr id="2" name="Rectangle 1"/>
+          <p:cNvSpPr/>
+          <p:nvPr/>
+        </p:nvSpPr>
+        <p:spPr>
+          <a:xfrm>
+            <a:off x="0" y="0"/>
+            <a:ext cx="12191695" cy="868680"/>
+          </a:xfrm>
+          <a:prstGeom prst="rect">
+            <a:avLst/>
+          </a:prstGeom>
+          <a:solidFill>
+            <a:srgbClr val="1F2A44"/>
+          </a:solidFill>
+          <a:ln>
+            <a:noFill/>
+          </a:ln>
+        </p:spPr>
+        <p:style>
+          <a:lnRef idx="1">
+            <a:schemeClr val="accent1"/>
+          </a:lnRef>
+          <a:fillRef idx="3">
+            <a:schemeClr val="accent1"/>
+          </a:fillRef>
+          <a:effectRef idx="2">
+            <a:schemeClr val="accent1"/>
+          </a:effectRef>
+          <a:fontRef idx="minor">
+            <a:schemeClr val="lt1"/>
+          </a:fontRef>
+        </p:style>
+        <p:txBody>
+          <a:bodyPr rtlCol="0" anchor="ctr"/>
+          <a:lstStyle/>
+          <a:p>
+            <a:pPr algn="ctr"/>
+          </a:p>
+        </p:txBody>
+      </p:sp>
+      <p:sp>
+        <p:nvSpPr>
+          <p:cNvPr id="3" name="TextBox 2"/>
+          <p:cNvSpPr txBox="1"/>
+          <p:nvPr/>
+        </p:nvSpPr>
+        <p:spPr>
+          <a:xfrm>
+            <a:off x="502920" y="109728"/>
+            <a:ext cx="10515600" cy="548640"/>
+          </a:xfrm>
+          <a:prstGeom prst="rect">
+            <a:avLst/>
+          </a:prstGeom>
+          <a:noFill/>
+        </p:spPr>
+        <p:txBody>
+          <a:bodyPr wrap="square">
+            <a:spAutoFit/>
+          </a:bodyPr>
+          <a:lstStyle/>
+          <a:p>
+            <a:pPr algn="l"/>
+            <a:r>
+              <a:rPr sz="2600" b="1">
+                <a:solidFill>
+                  <a:srgbClr val="FFFFFF"/>
+                </a:solidFill>
+                <a:latin typeface="Calibri"/>
+              </a:rPr>
+              <a:t>Etapa 3 · Mensajeria RabbitMQ — arquitectura (EP3/EP4)</a:t>
+            </a:r>
+          </a:p>
+        </p:txBody>
+      </p:sp>
+      <p:sp>
+        <p:nvSpPr>
+          <p:cNvPr id="4" name="TextBox 3"/>
+          <p:cNvSpPr txBox="1"/>
+          <p:nvPr/>
+        </p:nvSpPr>
+        <p:spPr>
+          <a:xfrm>
+            <a:off x="502920" y="1097280"/>
+            <a:ext cx="11155680" cy="365760"/>
+          </a:xfrm>
+          <a:prstGeom prst="rect">
+            <a:avLst/>
+          </a:prstGeom>
+          <a:noFill/>
+        </p:spPr>
+        <p:txBody>
+          <a:bodyPr wrap="square">
+            <a:spAutoFit/>
+          </a:bodyPr>
+          <a:lstStyle/>
+          <a:p>
+            <a:pPr algn="l"/>
+            <a:r>
+              <a:rPr sz="1500" b="1">
+                <a:solidFill>
+                  <a:srgbClr val="0B3D91"/>
+                </a:solidFill>
+                <a:latin typeface="Calibri"/>
+              </a:rPr>
+              <a:t>PedidoService (publisher fail-safe) → exchanges → colas → @RabbitListener (ACK manual) → DLQ</a:t>
+            </a:r>
+          </a:p>
+        </p:txBody>
+      </p:sp>
+      <p:sp>
+        <p:nvSpPr>
+          <p:cNvPr id="5" name="Rounded Rectangle 4"/>
+          <p:cNvSpPr/>
+          <p:nvPr/>
+        </p:nvSpPr>
+        <p:spPr>
+          <a:xfrm>
+            <a:off x="502920" y="1645920"/>
+            <a:ext cx="3703320" cy="3108960"/>
+          </a:xfrm>
+          <a:prstGeom prst="roundRect">
+            <a:avLst>
+              <a:gd name="adj" fmla="val 5000"/>
+            </a:avLst>
+          </a:prstGeom>
+          <a:solidFill>
+            <a:srgbClr val="F4F6FA"/>
+          </a:solidFill>
+          <a:ln w="15240">
+            <a:solidFill>
+              <a:srgbClr val="0B3D91"/>
+            </a:solidFill>
+          </a:ln>
+        </p:spPr>
+        <p:style>
+          <a:lnRef idx="1">
+            <a:schemeClr val="accent1"/>
+          </a:lnRef>
+          <a:fillRef idx="3">
+            <a:schemeClr val="accent1"/>
+          </a:fillRef>
+          <a:effectRef idx="2">
+            <a:schemeClr val="accent1"/>
+          </a:effectRef>
+          <a:fontRef idx="minor">
+            <a:schemeClr val="lt1"/>
+          </a:fontRef>
+        </p:style>
+        <p:txBody>
+          <a:bodyPr rtlCol="0" anchor="ctr"/>
+          <a:lstStyle/>
+          <a:p>
+            <a:pPr algn="ctr"/>
+          </a:p>
+        </p:txBody>
+      </p:sp>
+      <p:sp>
+        <p:nvSpPr>
+          <p:cNvPr id="6" name="Rounded Rectangle 5"/>
+          <p:cNvSpPr/>
+          <p:nvPr/>
+        </p:nvSpPr>
+        <p:spPr>
+          <a:xfrm>
+            <a:off x="640080" y="1783080"/>
+            <a:ext cx="3429000" cy="384048"/>
+          </a:xfrm>
+          <a:prstGeom prst="roundRect">
+            <a:avLst>
+              <a:gd name="adj" fmla="val 28000"/>
+            </a:avLst>
+          </a:prstGeom>
+          <a:solidFill>
+            <a:srgbClr val="0B3D91"/>
+          </a:solidFill>
+          <a:ln>
+            <a:noFill/>
+          </a:ln>
+        </p:spPr>
+        <p:style>
+          <a:lnRef idx="1">
+            <a:schemeClr val="accent1"/>
+          </a:lnRef>
+          <a:fillRef idx="3">
+            <a:schemeClr val="accent1"/>
+          </a:fillRef>
+          <a:effectRef idx="2">
+            <a:schemeClr val="accent1"/>
+          </a:effectRef>
+          <a:fontRef idx="minor">
+            <a:schemeClr val="lt1"/>
+          </a:fontRef>
+        </p:style>
+        <p:txBody>
+          <a:bodyPr rtlCol="0" anchor="ctr" wrap="none" lIns="0" rIns="0" tIns="0" bIns="0"/>
+          <a:lstStyle/>
+          <a:p>
+            <a:pPr algn="ctr"/>
+            <a:r>
+              <a:rPr sz="1400" b="1">
+                <a:solidFill>
+                  <a:srgbClr val="FFFFFF"/>
+                </a:solidFill>
+                <a:latin typeface="Consolas"/>
+              </a:rPr>
+              <a:t>Notificaciones</a:t>
+            </a:r>
+          </a:p>
+        </p:txBody>
+      </p:sp>
+      <p:sp>
+        <p:nvSpPr>
+          <p:cNvPr id="7" name="TextBox 6"/>
+          <p:cNvSpPr txBox="1"/>
+          <p:nvPr/>
+        </p:nvSpPr>
+        <p:spPr>
+          <a:xfrm>
+            <a:off x="667512" y="2331720"/>
+            <a:ext cx="3374136" cy="228600"/>
+          </a:xfrm>
+          <a:prstGeom prst="rect">
+            <a:avLst/>
+          </a:prstGeom>
+          <a:noFill/>
+        </p:spPr>
+        <p:txBody>
+          <a:bodyPr wrap="square">
+            <a:spAutoFit/>
+          </a:bodyPr>
+          <a:lstStyle/>
+          <a:p>
+            <a:pPr algn="l"/>
+            <a:r>
+              <a:rPr sz="1000" b="1">
+                <a:solidFill>
+                  <a:srgbClr val="606A7A"/>
+                </a:solidFill>
+                <a:latin typeface="Calibri"/>
+              </a:rPr>
+              <a:t>Exchange</a:t>
+            </a:r>
+          </a:p>
+        </p:txBody>
+      </p:sp>
+      <p:sp>
+        <p:nvSpPr>
+          <p:cNvPr id="8" name="TextBox 7"/>
+          <p:cNvSpPr txBox="1"/>
+          <p:nvPr/>
+        </p:nvSpPr>
+        <p:spPr>
+          <a:xfrm>
+            <a:off x="667512" y="2532888"/>
+            <a:ext cx="3374136" cy="365760"/>
+          </a:xfrm>
+          <a:prstGeom prst="rect">
+            <a:avLst/>
+          </a:prstGeom>
+          <a:noFill/>
+        </p:spPr>
+        <p:txBody>
+          <a:bodyPr wrap="square">
+            <a:spAutoFit/>
+          </a:bodyPr>
+          <a:lstStyle/>
+          <a:p>
+            <a:pPr algn="l"/>
+            <a:r>
+              <a:rPr sz="1000" b="0">
+                <a:solidFill>
+                  <a:srgbClr val="1F2A44"/>
+                </a:solidFill>
+                <a:latin typeface="Consolas"/>
+              </a:rPr>
+              <a:t>pedido.notificacion  (Direct)</a:t>
+            </a:r>
+          </a:p>
+        </p:txBody>
+      </p:sp>
+      <p:sp>
+        <p:nvSpPr>
+          <p:cNvPr id="9" name="TextBox 8"/>
+          <p:cNvSpPr txBox="1"/>
+          <p:nvPr/>
+        </p:nvSpPr>
+        <p:spPr>
+          <a:xfrm>
+            <a:off x="667512" y="2935224"/>
+            <a:ext cx="3374136" cy="228600"/>
+          </a:xfrm>
+          <a:prstGeom prst="rect">
+            <a:avLst/>
+          </a:prstGeom>
+          <a:noFill/>
+        </p:spPr>
+        <p:txBody>
+          <a:bodyPr wrap="square">
+            <a:spAutoFit/>
+          </a:bodyPr>
+          <a:lstStyle/>
+          <a:p>
+            <a:pPr algn="l"/>
+            <a:r>
+              <a:rPr sz="1000" b="1">
+                <a:solidFill>
+                  <a:srgbClr val="606A7A"/>
+                </a:solidFill>
+                <a:latin typeface="Calibri"/>
+              </a:rPr>
+              <a:t>Routing key</a:t>
+            </a:r>
+          </a:p>
+        </p:txBody>
+      </p:sp>
+      <p:sp>
+        <p:nvSpPr>
+          <p:cNvPr id="10" name="TextBox 9"/>
+          <p:cNvSpPr txBox="1"/>
+          <p:nvPr/>
+        </p:nvSpPr>
+        <p:spPr>
+          <a:xfrm>
+            <a:off x="667512" y="3136392"/>
+            <a:ext cx="3374136" cy="365760"/>
+          </a:xfrm>
+          <a:prstGeom prst="rect">
+            <a:avLst/>
+          </a:prstGeom>
+          <a:noFill/>
+        </p:spPr>
+        <p:txBody>
+          <a:bodyPr wrap="square">
+            <a:spAutoFit/>
+          </a:bodyPr>
+          <a:lstStyle/>
+          <a:p>
+            <a:pPr algn="l"/>
+            <a:r>
+              <a:rPr sz="1000" b="0">
+                <a:solidFill>
+                  <a:srgbClr val="1F2A44"/>
+                </a:solidFill>
+                <a:latin typeface="Consolas"/>
+              </a:rPr>
+              <a:t>pedido.notificacion</a:t>
+            </a:r>
+          </a:p>
+        </p:txBody>
+      </p:sp>
+      <p:sp>
+        <p:nvSpPr>
+          <p:cNvPr id="11" name="TextBox 10"/>
+          <p:cNvSpPr txBox="1"/>
+          <p:nvPr/>
+        </p:nvSpPr>
+        <p:spPr>
+          <a:xfrm>
+            <a:off x="667512" y="3538728"/>
+            <a:ext cx="3374136" cy="228600"/>
+          </a:xfrm>
+          <a:prstGeom prst="rect">
+            <a:avLst/>
+          </a:prstGeom>
+          <a:noFill/>
+        </p:spPr>
+        <p:txBody>
+          <a:bodyPr wrap="square">
+            <a:spAutoFit/>
+          </a:bodyPr>
+          <a:lstStyle/>
+          <a:p>
+            <a:pPr algn="l"/>
+            <a:r>
+              <a:rPr sz="1000" b="1">
+                <a:solidFill>
+                  <a:srgbClr val="606A7A"/>
+                </a:solidFill>
+                <a:latin typeface="Calibri"/>
+              </a:rPr>
+              <a:t>Cola</a:t>
+            </a:r>
+          </a:p>
+        </p:txBody>
+      </p:sp>
+      <p:sp>
+        <p:nvSpPr>
+          <p:cNvPr id="12" name="TextBox 11"/>
+          <p:cNvSpPr txBox="1"/>
+          <p:nvPr/>
+        </p:nvSpPr>
+        <p:spPr>
+          <a:xfrm>
+            <a:off x="667512" y="3739896"/>
+            <a:ext cx="3374136" cy="365760"/>
+          </a:xfrm>
+          <a:prstGeom prst="rect">
+            <a:avLst/>
+          </a:prstGeom>
+          <a:noFill/>
+        </p:spPr>
+        <p:txBody>
+          <a:bodyPr wrap="square">
+            <a:spAutoFit/>
+          </a:bodyPr>
+          <a:lstStyle/>
+          <a:p>
+            <a:pPr algn="l"/>
+            <a:r>
+              <a:rPr sz="1000" b="0">
+                <a:solidFill>
+                  <a:srgbClr val="1F2A44"/>
+                </a:solidFill>
+                <a:latin typeface="Consolas"/>
+              </a:rPr>
+              <a:t>notificaciones.pedidos</a:t>
+            </a:r>
+          </a:p>
+        </p:txBody>
+      </p:sp>
+      <p:sp>
+        <p:nvSpPr>
+          <p:cNvPr id="13" name="TextBox 12"/>
+          <p:cNvSpPr txBox="1"/>
+          <p:nvPr/>
+        </p:nvSpPr>
+        <p:spPr>
+          <a:xfrm>
+            <a:off x="667512" y="4142232"/>
+            <a:ext cx="3374136" cy="228600"/>
+          </a:xfrm>
+          <a:prstGeom prst="rect">
+            <a:avLst/>
+          </a:prstGeom>
+          <a:noFill/>
+        </p:spPr>
+        <p:txBody>
+          <a:bodyPr wrap="square">
+            <a:spAutoFit/>
+          </a:bodyPr>
+          <a:lstStyle/>
+          <a:p>
+            <a:pPr algn="l"/>
+            <a:r>
+              <a:rPr sz="1000" b="1">
+                <a:solidFill>
+                  <a:srgbClr val="606A7A"/>
+                </a:solidFill>
+                <a:latin typeface="Calibri"/>
+              </a:rPr>
+              <a:t>DLQ</a:t>
+            </a:r>
+          </a:p>
+        </p:txBody>
+      </p:sp>
+      <p:sp>
+        <p:nvSpPr>
+          <p:cNvPr id="14" name="TextBox 13"/>
+          <p:cNvSpPr txBox="1"/>
+          <p:nvPr/>
+        </p:nvSpPr>
+        <p:spPr>
+          <a:xfrm>
+            <a:off x="667512" y="4343400"/>
+            <a:ext cx="3374136" cy="365760"/>
+          </a:xfrm>
+          <a:prstGeom prst="rect">
+            <a:avLst/>
+          </a:prstGeom>
+          <a:noFill/>
+        </p:spPr>
+        <p:txBody>
+          <a:bodyPr wrap="square">
+            <a:spAutoFit/>
+          </a:bodyPr>
+          <a:lstStyle/>
+          <a:p>
+            <a:pPr algn="l"/>
+            <a:r>
+              <a:rPr sz="1000" b="0">
+                <a:solidFill>
+                  <a:srgbClr val="1F2A44"/>
+                </a:solidFill>
+                <a:latin typeface="Consolas"/>
+              </a:rPr>
+              <a:t>notificaciones.pedidos.dlq</a:t>
+            </a:r>
+          </a:p>
+        </p:txBody>
+      </p:sp>
+      <p:sp>
+        <p:nvSpPr>
+          <p:cNvPr id="15" name="Rounded Rectangle 14"/>
+          <p:cNvSpPr/>
+          <p:nvPr/>
+        </p:nvSpPr>
+        <p:spPr>
+          <a:xfrm>
+            <a:off x="4297679" y="1645920"/>
+            <a:ext cx="3703320" cy="3108960"/>
+          </a:xfrm>
+          <a:prstGeom prst="roundRect">
+            <a:avLst>
+              <a:gd name="adj" fmla="val 5000"/>
+            </a:avLst>
+          </a:prstGeom>
+          <a:solidFill>
+            <a:srgbClr val="F4F6FA"/>
+          </a:solidFill>
+          <a:ln w="15240">
+            <a:solidFill>
+              <a:srgbClr val="0B3D91"/>
+            </a:solidFill>
+          </a:ln>
+        </p:spPr>
+        <p:style>
+          <a:lnRef idx="1">
+            <a:schemeClr val="accent1"/>
+          </a:lnRef>
+          <a:fillRef idx="3">
+            <a:schemeClr val="accent1"/>
+          </a:fillRef>
+          <a:effectRef idx="2">
+            <a:schemeClr val="accent1"/>
+          </a:effectRef>
+          <a:fontRef idx="minor">
+            <a:schemeClr val="lt1"/>
+          </a:fontRef>
+        </p:style>
+        <p:txBody>
+          <a:bodyPr rtlCol="0" anchor="ctr"/>
+          <a:lstStyle/>
+          <a:p>
+            <a:pPr algn="ctr"/>
+          </a:p>
+        </p:txBody>
+      </p:sp>
+      <p:sp>
+        <p:nvSpPr>
+          <p:cNvPr id="16" name="Rounded Rectangle 15"/>
+          <p:cNvSpPr/>
+          <p:nvPr/>
+        </p:nvSpPr>
+        <p:spPr>
+          <a:xfrm>
+            <a:off x="4434840" y="1783080"/>
+            <a:ext cx="3429000" cy="384048"/>
+          </a:xfrm>
+          <a:prstGeom prst="roundRect">
+            <a:avLst>
+              <a:gd name="adj" fmla="val 28000"/>
+            </a:avLst>
+          </a:prstGeom>
+          <a:solidFill>
+            <a:srgbClr val="0B3D91"/>
+          </a:solidFill>
+          <a:ln>
+            <a:noFill/>
+          </a:ln>
+        </p:spPr>
+        <p:style>
+          <a:lnRef idx="1">
+            <a:schemeClr val="accent1"/>
+          </a:lnRef>
+          <a:fillRef idx="3">
+            <a:schemeClr val="accent1"/>
+          </a:fillRef>
+          <a:effectRef idx="2">
+            <a:schemeClr val="accent1"/>
+          </a:effectRef>
+          <a:fontRef idx="minor">
+            <a:schemeClr val="lt1"/>
+          </a:fontRef>
+        </p:style>
+        <p:txBody>
+          <a:bodyPr rtlCol="0" anchor="ctr" wrap="none" lIns="0" rIns="0" tIns="0" bIns="0"/>
+          <a:lstStyle/>
+          <a:p>
+            <a:pPr algn="ctr"/>
+            <a:r>
+              <a:rPr sz="1400" b="1">
+                <a:solidFill>
+                  <a:srgbClr val="FFFFFF"/>
+                </a:solidFill>
+                <a:latin typeface="Consolas"/>
+              </a:rPr>
+              <a:t>Documentos</a:t>
+            </a:r>
+          </a:p>
+        </p:txBody>
+      </p:sp>
+      <p:sp>
+        <p:nvSpPr>
+          <p:cNvPr id="17" name="TextBox 16"/>
+          <p:cNvSpPr txBox="1"/>
+          <p:nvPr/>
+        </p:nvSpPr>
+        <p:spPr>
+          <a:xfrm>
+            <a:off x="4462271" y="2331720"/>
+            <a:ext cx="3374136" cy="228600"/>
+          </a:xfrm>
+          <a:prstGeom prst="rect">
+            <a:avLst/>
+          </a:prstGeom>
+          <a:noFill/>
+        </p:spPr>
+        <p:txBody>
+          <a:bodyPr wrap="square">
+            <a:spAutoFit/>
+          </a:bodyPr>
+          <a:lstStyle/>
+          <a:p>
+            <a:pPr algn="l"/>
+            <a:r>
+              <a:rPr sz="1000" b="1">
+                <a:solidFill>
+                  <a:srgbClr val="606A7A"/>
+                </a:solidFill>
+                <a:latin typeface="Calibri"/>
+              </a:rPr>
+              <a:t>Exchange</a:t>
+            </a:r>
+          </a:p>
+        </p:txBody>
+      </p:sp>
+      <p:sp>
+        <p:nvSpPr>
+          <p:cNvPr id="18" name="TextBox 17"/>
+          <p:cNvSpPr txBox="1"/>
+          <p:nvPr/>
+        </p:nvSpPr>
+        <p:spPr>
+          <a:xfrm>
+            <a:off x="4462271" y="2532888"/>
+            <a:ext cx="3374136" cy="365760"/>
+          </a:xfrm>
+          <a:prstGeom prst="rect">
+            <a:avLst/>
+          </a:prstGeom>
+          <a:noFill/>
+        </p:spPr>
+        <p:txBody>
+          <a:bodyPr wrap="square">
+            <a:spAutoFit/>
+          </a:bodyPr>
+          <a:lstStyle/>
+          <a:p>
+            <a:pPr algn="l"/>
+            <a:r>
+              <a:rPr sz="1000" b="0">
+                <a:solidFill>
+                  <a:srgbClr val="1F2A44"/>
+                </a:solidFill>
+                <a:latin typeface="Consolas"/>
+              </a:rPr>
+              <a:t>pedido.documento  (Topic)</a:t>
+            </a:r>
+          </a:p>
+        </p:txBody>
+      </p:sp>
+      <p:sp>
+        <p:nvSpPr>
+          <p:cNvPr id="19" name="TextBox 18"/>
+          <p:cNvSpPr txBox="1"/>
+          <p:nvPr/>
+        </p:nvSpPr>
+        <p:spPr>
+          <a:xfrm>
+            <a:off x="4462271" y="2935224"/>
+            <a:ext cx="3374136" cy="228600"/>
+          </a:xfrm>
+          <a:prstGeom prst="rect">
+            <a:avLst/>
+          </a:prstGeom>
+          <a:noFill/>
+        </p:spPr>
+        <p:txBody>
+          <a:bodyPr wrap="square">
+            <a:spAutoFit/>
+          </a:bodyPr>
+          <a:lstStyle/>
+          <a:p>
+            <a:pPr algn="l"/>
+            <a:r>
+              <a:rPr sz="1000" b="1">
+                <a:solidFill>
+                  <a:srgbClr val="606A7A"/>
+                </a:solidFill>
+                <a:latin typeface="Calibri"/>
+              </a:rPr>
+              <a:t>Routing key</a:t>
+            </a:r>
+          </a:p>
+        </p:txBody>
+      </p:sp>
+      <p:sp>
+        <p:nvSpPr>
+          <p:cNvPr id="20" name="TextBox 19"/>
+          <p:cNvSpPr txBox="1"/>
+          <p:nvPr/>
+        </p:nvSpPr>
+        <p:spPr>
+          <a:xfrm>
+            <a:off x="4462271" y="3136392"/>
+            <a:ext cx="3374136" cy="365760"/>
+          </a:xfrm>
+          <a:prstGeom prst="rect">
+            <a:avLst/>
+          </a:prstGeom>
+          <a:noFill/>
+        </p:spPr>
+        <p:txBody>
+          <a:bodyPr wrap="square">
+            <a:spAutoFit/>
+          </a:bodyPr>
+          <a:lstStyle/>
+          <a:p>
+            <a:pPr algn="l"/>
+            <a:r>
+              <a:rPr sz="1000" b="0">
+                <a:solidFill>
+                  <a:srgbClr val="1F2A44"/>
+                </a:solidFill>
+                <a:latin typeface="Consolas"/>
+              </a:rPr>
+              <a:t>pedido.documento.*</a:t>
+            </a:r>
+          </a:p>
+        </p:txBody>
+      </p:sp>
+      <p:sp>
+        <p:nvSpPr>
+          <p:cNvPr id="21" name="TextBox 20"/>
+          <p:cNvSpPr txBox="1"/>
+          <p:nvPr/>
+        </p:nvSpPr>
+        <p:spPr>
+          <a:xfrm>
+            <a:off x="4462271" y="3538728"/>
+            <a:ext cx="3374136" cy="228600"/>
+          </a:xfrm>
+          <a:prstGeom prst="rect">
+            <a:avLst/>
+          </a:prstGeom>
+          <a:noFill/>
+        </p:spPr>
+        <p:txBody>
+          <a:bodyPr wrap="square">
+            <a:spAutoFit/>
+          </a:bodyPr>
+          <a:lstStyle/>
+          <a:p>
+            <a:pPr algn="l"/>
+            <a:r>
+              <a:rPr sz="1000" b="1">
+                <a:solidFill>
+                  <a:srgbClr val="606A7A"/>
+                </a:solidFill>
+                <a:latin typeface="Calibri"/>
+              </a:rPr>
+              <a:t>Cola</a:t>
+            </a:r>
+          </a:p>
+        </p:txBody>
+      </p:sp>
+      <p:sp>
+        <p:nvSpPr>
+          <p:cNvPr id="22" name="TextBox 21"/>
+          <p:cNvSpPr txBox="1"/>
+          <p:nvPr/>
+        </p:nvSpPr>
+        <p:spPr>
+          <a:xfrm>
+            <a:off x="4462271" y="3739896"/>
+            <a:ext cx="3374136" cy="365760"/>
+          </a:xfrm>
+          <a:prstGeom prst="rect">
+            <a:avLst/>
+          </a:prstGeom>
+          <a:noFill/>
+        </p:spPr>
+        <p:txBody>
+          <a:bodyPr wrap="square">
+            <a:spAutoFit/>
+          </a:bodyPr>
+          <a:lstStyle/>
+          <a:p>
+            <a:pPr algn="l"/>
+            <a:r>
+              <a:rPr sz="1000" b="0">
+                <a:solidFill>
+                  <a:srgbClr val="1F2A44"/>
+                </a:solidFill>
+                <a:latin typeface="Consolas"/>
+              </a:rPr>
+              <a:t>documentos.pedidos</a:t>
+            </a:r>
+          </a:p>
+        </p:txBody>
+      </p:sp>
+      <p:sp>
+        <p:nvSpPr>
+          <p:cNvPr id="23" name="TextBox 22"/>
+          <p:cNvSpPr txBox="1"/>
+          <p:nvPr/>
+        </p:nvSpPr>
+        <p:spPr>
+          <a:xfrm>
+            <a:off x="4462271" y="4142232"/>
+            <a:ext cx="3374136" cy="228600"/>
+          </a:xfrm>
+          <a:prstGeom prst="rect">
+            <a:avLst/>
+          </a:prstGeom>
+          <a:noFill/>
+        </p:spPr>
+        <p:txBody>
+          <a:bodyPr wrap="square">
+            <a:spAutoFit/>
+          </a:bodyPr>
+          <a:lstStyle/>
+          <a:p>
+            <a:pPr algn="l"/>
+            <a:r>
+              <a:rPr sz="1000" b="1">
+                <a:solidFill>
+                  <a:srgbClr val="606A7A"/>
+                </a:solidFill>
+                <a:latin typeface="Calibri"/>
+              </a:rPr>
+              <a:t>DLQ</a:t>
+            </a:r>
+          </a:p>
+        </p:txBody>
+      </p:sp>
+      <p:sp>
+        <p:nvSpPr>
+          <p:cNvPr id="24" name="TextBox 23"/>
+          <p:cNvSpPr txBox="1"/>
+          <p:nvPr/>
+        </p:nvSpPr>
+        <p:spPr>
+          <a:xfrm>
+            <a:off x="4462271" y="4343400"/>
+            <a:ext cx="3374136" cy="365760"/>
+          </a:xfrm>
+          <a:prstGeom prst="rect">
+            <a:avLst/>
+          </a:prstGeom>
+          <a:noFill/>
+        </p:spPr>
+        <p:txBody>
+          <a:bodyPr wrap="square">
+            <a:spAutoFit/>
+          </a:bodyPr>
+          <a:lstStyle/>
+          <a:p>
+            <a:pPr algn="l"/>
+            <a:r>
+              <a:rPr sz="1000" b="0">
+                <a:solidFill>
+                  <a:srgbClr val="1F2A44"/>
+                </a:solidFill>
+                <a:latin typeface="Consolas"/>
+              </a:rPr>
+              <a:t>documentos.pedidos.dlq</a:t>
+            </a:r>
+          </a:p>
+        </p:txBody>
+      </p:sp>
+      <p:sp>
+        <p:nvSpPr>
+          <p:cNvPr id="25" name="Rounded Rectangle 24"/>
+          <p:cNvSpPr/>
+          <p:nvPr/>
+        </p:nvSpPr>
+        <p:spPr>
+          <a:xfrm>
+            <a:off x="8092440" y="1645920"/>
+            <a:ext cx="3703320" cy="3108960"/>
+          </a:xfrm>
+          <a:prstGeom prst="roundRect">
+            <a:avLst>
+              <a:gd name="adj" fmla="val 5000"/>
+            </a:avLst>
+          </a:prstGeom>
+          <a:solidFill>
+            <a:srgbClr val="F4F6FA"/>
+          </a:solidFill>
+          <a:ln w="15240">
+            <a:solidFill>
+              <a:srgbClr val="0B3D91"/>
+            </a:solidFill>
+          </a:ln>
+        </p:spPr>
+        <p:style>
+          <a:lnRef idx="1">
+            <a:schemeClr val="accent1"/>
+          </a:lnRef>
+          <a:fillRef idx="3">
+            <a:schemeClr val="accent1"/>
+          </a:fillRef>
+          <a:effectRef idx="2">
+            <a:schemeClr val="accent1"/>
+          </a:effectRef>
+          <a:fontRef idx="minor">
+            <a:schemeClr val="lt1"/>
+          </a:fontRef>
+        </p:style>
+        <p:txBody>
+          <a:bodyPr rtlCol="0" anchor="ctr"/>
+          <a:lstStyle/>
+          <a:p>
+            <a:pPr algn="ctr"/>
+          </a:p>
+        </p:txBody>
+      </p:sp>
+      <p:sp>
+        <p:nvSpPr>
+          <p:cNvPr id="26" name="Rounded Rectangle 25"/>
+          <p:cNvSpPr/>
+          <p:nvPr/>
+        </p:nvSpPr>
+        <p:spPr>
+          <a:xfrm>
+            <a:off x="8229600" y="1783080"/>
+            <a:ext cx="3429000" cy="384048"/>
+          </a:xfrm>
+          <a:prstGeom prst="roundRect">
+            <a:avLst>
+              <a:gd name="adj" fmla="val 28000"/>
+            </a:avLst>
+          </a:prstGeom>
+          <a:solidFill>
+            <a:srgbClr val="0B3D91"/>
+          </a:solidFill>
+          <a:ln>
+            <a:noFill/>
+          </a:ln>
+        </p:spPr>
+        <p:style>
+          <a:lnRef idx="1">
+            <a:schemeClr val="accent1"/>
+          </a:lnRef>
+          <a:fillRef idx="3">
+            <a:schemeClr val="accent1"/>
+          </a:fillRef>
+          <a:effectRef idx="2">
+            <a:schemeClr val="accent1"/>
+          </a:effectRef>
+          <a:fontRef idx="minor">
+            <a:schemeClr val="lt1"/>
+          </a:fontRef>
+        </p:style>
+        <p:txBody>
+          <a:bodyPr rtlCol="0" anchor="ctr" wrap="none" lIns="0" rIns="0" tIns="0" bIns="0"/>
+          <a:lstStyle/>
+          <a:p>
+            <a:pPr algn="ctr"/>
+            <a:r>
+              <a:rPr sz="1400" b="1">
+                <a:solidFill>
+                  <a:srgbClr val="FFFFFF"/>
+                </a:solidFill>
+                <a:latin typeface="Consolas"/>
+              </a:rPr>
+              <a:t>Tickets</a:t>
+            </a:r>
+          </a:p>
+        </p:txBody>
+      </p:sp>
+      <p:sp>
+        <p:nvSpPr>
+          <p:cNvPr id="27" name="TextBox 26"/>
+          <p:cNvSpPr txBox="1"/>
+          <p:nvPr/>
+        </p:nvSpPr>
+        <p:spPr>
+          <a:xfrm>
+            <a:off x="8257031" y="2331720"/>
+            <a:ext cx="3374136" cy="228600"/>
+          </a:xfrm>
+          <a:prstGeom prst="rect">
+            <a:avLst/>
+          </a:prstGeom>
+          <a:noFill/>
+        </p:spPr>
+        <p:txBody>
+          <a:bodyPr wrap="square">
+            <a:spAutoFit/>
+          </a:bodyPr>
+          <a:lstStyle/>
+          <a:p>
+            <a:pPr algn="l"/>
+            <a:r>
+              <a:rPr sz="1000" b="1">
+                <a:solidFill>
+                  <a:srgbClr val="606A7A"/>
+                </a:solidFill>
+                <a:latin typeface="Calibri"/>
+              </a:rPr>
+              <a:t>Exchange</a:t>
+            </a:r>
+          </a:p>
+        </p:txBody>
+      </p:sp>
+      <p:sp>
+        <p:nvSpPr>
+          <p:cNvPr id="28" name="TextBox 27"/>
+          <p:cNvSpPr txBox="1"/>
+          <p:nvPr/>
+        </p:nvSpPr>
+        <p:spPr>
+          <a:xfrm>
+            <a:off x="8257031" y="2532888"/>
+            <a:ext cx="3374136" cy="365760"/>
+          </a:xfrm>
+          <a:prstGeom prst="rect">
+            <a:avLst/>
+          </a:prstGeom>
+          <a:noFill/>
+        </p:spPr>
+        <p:txBody>
+          <a:bodyPr wrap="square">
+            <a:spAutoFit/>
+          </a:bodyPr>
+          <a:lstStyle/>
+          <a:p>
+            <a:pPr algn="l"/>
+            <a:r>
+              <a:rPr sz="1000" b="0">
+                <a:solidFill>
+                  <a:srgbClr val="1F2A44"/>
+                </a:solidFill>
+                <a:latin typeface="Consolas"/>
+              </a:rPr>
+              <a:t>ticket  (Topic)</a:t>
+            </a:r>
+          </a:p>
+        </p:txBody>
+      </p:sp>
+      <p:sp>
+        <p:nvSpPr>
+          <p:cNvPr id="29" name="TextBox 28"/>
+          <p:cNvSpPr txBox="1"/>
+          <p:nvPr/>
+        </p:nvSpPr>
+        <p:spPr>
+          <a:xfrm>
+            <a:off x="8257031" y="2935224"/>
+            <a:ext cx="3374136" cy="228600"/>
+          </a:xfrm>
+          <a:prstGeom prst="rect">
+            <a:avLst/>
+          </a:prstGeom>
+          <a:noFill/>
+        </p:spPr>
+        <p:txBody>
+          <a:bodyPr wrap="square">
+            <a:spAutoFit/>
+          </a:bodyPr>
+          <a:lstStyle/>
+          <a:p>
+            <a:pPr algn="l"/>
+            <a:r>
+              <a:rPr sz="1000" b="1">
+                <a:solidFill>
+                  <a:srgbClr val="606A7A"/>
+                </a:solidFill>
+                <a:latin typeface="Calibri"/>
+              </a:rPr>
+              <a:t>Routing key</a:t>
+            </a:r>
+          </a:p>
+        </p:txBody>
+      </p:sp>
+      <p:sp>
+        <p:nvSpPr>
+          <p:cNvPr id="30" name="TextBox 29"/>
+          <p:cNvSpPr txBox="1"/>
+          <p:nvPr/>
+        </p:nvSpPr>
+        <p:spPr>
+          <a:xfrm>
+            <a:off x="8257031" y="3136392"/>
+            <a:ext cx="3374136" cy="365760"/>
+          </a:xfrm>
+          <a:prstGeom prst="rect">
+            <a:avLst/>
+          </a:prstGeom>
+          <a:noFill/>
+        </p:spPr>
+        <p:txBody>
+          <a:bodyPr wrap="square">
+            <a:spAutoFit/>
+          </a:bodyPr>
+          <a:lstStyle/>
+          <a:p>
+            <a:pPr algn="l"/>
+            <a:r>
+              <a:rPr sz="1000" b="0">
+                <a:solidFill>
+                  <a:srgbClr val="1F2A44"/>
+                </a:solidFill>
+                <a:latin typeface="Consolas"/>
+              </a:rPr>
+              <a:t>ticket.*</a:t>
+            </a:r>
+          </a:p>
+        </p:txBody>
+      </p:sp>
+      <p:sp>
+        <p:nvSpPr>
+          <p:cNvPr id="31" name="TextBox 30"/>
+          <p:cNvSpPr txBox="1"/>
+          <p:nvPr/>
+        </p:nvSpPr>
+        <p:spPr>
+          <a:xfrm>
+            <a:off x="8257031" y="3538728"/>
+            <a:ext cx="3374136" cy="228600"/>
+          </a:xfrm>
+          <a:prstGeom prst="rect">
+            <a:avLst/>
+          </a:prstGeom>
+          <a:noFill/>
+        </p:spPr>
+        <p:txBody>
+          <a:bodyPr wrap="square">
+            <a:spAutoFit/>
+          </a:bodyPr>
+          <a:lstStyle/>
+          <a:p>
+            <a:pPr algn="l"/>
+            <a:r>
+              <a:rPr sz="1000" b="1">
+                <a:solidFill>
+                  <a:srgbClr val="606A7A"/>
+                </a:solidFill>
+                <a:latin typeface="Calibri"/>
+              </a:rPr>
+              <a:t>Cola</a:t>
+            </a:r>
+          </a:p>
+        </p:txBody>
+      </p:sp>
+      <p:sp>
+        <p:nvSpPr>
+          <p:cNvPr id="32" name="TextBox 31"/>
+          <p:cNvSpPr txBox="1"/>
+          <p:nvPr/>
+        </p:nvSpPr>
+        <p:spPr>
+          <a:xfrm>
+            <a:off x="8257031" y="3739896"/>
+            <a:ext cx="3374136" cy="365760"/>
+          </a:xfrm>
+          <a:prstGeom prst="rect">
+            <a:avLst/>
+          </a:prstGeom>
+          <a:noFill/>
+        </p:spPr>
+        <p:txBody>
+          <a:bodyPr wrap="square">
+            <a:spAutoFit/>
+          </a:bodyPr>
+          <a:lstStyle/>
+          <a:p>
+            <a:pPr algn="l"/>
+            <a:r>
+              <a:rPr sz="1000" b="0">
+                <a:solidFill>
+                  <a:srgbClr val="1F2A44"/>
+                </a:solidFill>
+                <a:latin typeface="Consolas"/>
+              </a:rPr>
+              <a:t>tickets.pedidos</a:t>
+            </a:r>
+          </a:p>
+        </p:txBody>
+      </p:sp>
+      <p:sp>
+        <p:nvSpPr>
+          <p:cNvPr id="33" name="TextBox 32"/>
+          <p:cNvSpPr txBox="1"/>
+          <p:nvPr/>
+        </p:nvSpPr>
+        <p:spPr>
+          <a:xfrm>
+            <a:off x="8257031" y="4142232"/>
+            <a:ext cx="3374136" cy="228600"/>
+          </a:xfrm>
+          <a:prstGeom prst="rect">
+            <a:avLst/>
+          </a:prstGeom>
+          <a:noFill/>
+        </p:spPr>
+        <p:txBody>
+          <a:bodyPr wrap="square">
+            <a:spAutoFit/>
+          </a:bodyPr>
+          <a:lstStyle/>
+          <a:p>
+            <a:pPr algn="l"/>
+            <a:r>
+              <a:rPr sz="1000" b="1">
+                <a:solidFill>
+                  <a:srgbClr val="606A7A"/>
+                </a:solidFill>
+                <a:latin typeface="Calibri"/>
+              </a:rPr>
+              <a:t>DLQ</a:t>
+            </a:r>
+          </a:p>
+        </p:txBody>
+      </p:sp>
+      <p:sp>
+        <p:nvSpPr>
+          <p:cNvPr id="34" name="TextBox 33"/>
+          <p:cNvSpPr txBox="1"/>
+          <p:nvPr/>
+        </p:nvSpPr>
+        <p:spPr>
+          <a:xfrm>
+            <a:off x="8257031" y="4343400"/>
+            <a:ext cx="3374136" cy="365760"/>
+          </a:xfrm>
+          <a:prstGeom prst="rect">
+            <a:avLst/>
+          </a:prstGeom>
+          <a:noFill/>
+        </p:spPr>
+        <p:txBody>
+          <a:bodyPr wrap="square">
+            <a:spAutoFit/>
+          </a:bodyPr>
+          <a:lstStyle/>
+          <a:p>
+            <a:pPr algn="l"/>
+            <a:r>
+              <a:rPr sz="1000" b="0">
+                <a:solidFill>
+                  <a:srgbClr val="1F2A44"/>
+                </a:solidFill>
+                <a:latin typeface="Consolas"/>
+              </a:rPr>
+              <a:t>tickets.pedidos.dlq</a:t>
+            </a:r>
+          </a:p>
+        </p:txBody>
+      </p:sp>
+      <p:sp>
+        <p:nvSpPr>
+          <p:cNvPr id="35" name="TextBox 34"/>
+          <p:cNvSpPr txBox="1"/>
+          <p:nvPr/>
+        </p:nvSpPr>
+        <p:spPr>
+          <a:xfrm>
+            <a:off x="502920" y="4892040"/>
+            <a:ext cx="11155680" cy="1371600"/>
+          </a:xfrm>
+          <a:prstGeom prst="rect">
+            <a:avLst/>
+          </a:prstGeom>
+          <a:noFill/>
+        </p:spPr>
+        <p:txBody>
+          <a:bodyPr wrap="square">
+            <a:spAutoFit/>
+          </a:bodyPr>
+          <a:lstStyle/>
+          <a:p>
+            <a:pPr algn="l"/>
+            <a:r>
+              <a:rPr sz="1100" b="0">
+                <a:solidFill>
+                  <a:srgbClr val="1F2A44"/>
+                </a:solidFill>
+                <a:latin typeface="Calibri"/>
+              </a:rPr>
+              <a:t>Cadena: crear pedido → notificacion → documento generado → (total&gt;=1000) ticket abierto.  cancelar → notificacion + ticket de cancelacion.  cambiarEstado → evento de estado.</a:t>
+            </a:r>
+            <a:br/>
+            <a:r>
+              <a:t>Robustez: ACK manual + prefetch=1; hasta 3 reintentos (sleep); luego basicNack(requeue=false) → DLQ.  EventoPublisher no rompe el flujo HTTP si RabbitMQ cae (fail-safe).</a:t>
             </a:r>
           </a:p>
         </p:txBody>
